--- a/static/ppts/G6_Sci_T5_Earth_Sun_Moon.pptx
+++ b/static/ppts/G6_Sci_T5_Earth_Sun_Moon.pptx
@@ -9,11 +9,9 @@
     <p:sldId id="257" r:id="rId3"/>
     <p:sldId id="258" r:id="rId4"/>
     <p:sldId id="259" r:id="rId5"/>
-    <p:sldId id="260" r:id="rId6"/>
-    <p:sldId id="261" r:id="rId7"/>
   </p:sldIdLst>
   <p:notesMasterIdLst>
-    <p:notesMasterId r:id="rId8"/>
+    <p:notesMasterId r:id="rId6"/>
   </p:notesMasterIdLst>
   <p:sldSz cx="9144000" cy="5143500"/>
   <p:notesSz cx="5143500" cy="9144000"/>
@@ -795,182 +793,6 @@
             <a:fld id="{F7021451-1387-4CA6-816F-3879F97B5CBC}" type="slidenum">
               <a:rPr lang="en-US"/>
               <a:t>4</a:t>
-            </a:fld>
-            <a:endParaRPr lang="en-US"/>
-          </a:p>
-        </p:txBody>
-      </p:sp>
-    </p:spTree>
-    <p:extLst>
-      <p:ext uri="{BB962C8B-B14F-4D97-AF65-F5344CB8AC3E}">
-        <p14:creationId xmlns:p14="http://schemas.microsoft.com/office/powerpoint/2010/main" val="1024086991"/>
-      </p:ext>
-    </p:extLst>
-  </p:cSld>
-  <p:clrMapOvr>
-    <a:masterClrMapping/>
-  </p:clrMapOvr>
-</p:notes>
-</file>
-
-<file path=ppt/notesSlides/notesSlide5.xml><?xml version="1.0" encoding="utf-8"?>
-<p:notes xmlns:a="http://schemas.openxmlformats.org/drawingml/2006/main" xmlns:r="http://schemas.openxmlformats.org/officeDocument/2006/relationships" xmlns:p="http://schemas.openxmlformats.org/presentationml/2006/main">
-  <p:cSld>
-    <p:spTree>
-      <p:nvGrpSpPr>
-        <p:cNvPr id="1" name=""/>
-        <p:cNvGrpSpPr/>
-        <p:nvPr/>
-      </p:nvGrpSpPr>
-      <p:grpSpPr>
-        <a:xfrm>
-          <a:off x="0" y="0"/>
-          <a:ext cx="0" cy="0"/>
-          <a:chOff x="0" y="0"/>
-          <a:chExt cx="0" cy="0"/>
-        </a:xfrm>
-      </p:grpSpPr>
-      <p:sp>
-        <p:nvSpPr>
-          <p:cNvPr id="2" name="Slide Image Placeholder 1"/>
-          <p:cNvSpPr>
-            <a:spLocks noGrp="1" noRot="1" noChangeAspect="1"/>
-          </p:cNvSpPr>
-          <p:nvPr>
-            <p:ph type="sldImg"/>
-          </p:nvPr>
-        </p:nvSpPr>
-        <p:spPr/>
-      </p:sp>
-      <p:sp>
-        <p:nvSpPr>
-          <p:cNvPr id="3" name="Notes Placeholder 2"/>
-          <p:cNvSpPr>
-            <a:spLocks noGrp="1"/>
-          </p:cNvSpPr>
-          <p:nvPr>
-            <p:ph type="body" idx="1"/>
-          </p:nvPr>
-        </p:nvSpPr>
-        <p:spPr/>
-        <p:txBody>
-          <a:bodyPr/>
-          <a:lstStyle/>
-          <a:p>
-            <a:r>
-              <a:rPr lang="en-US" dirty="0"/>
-              <a:t/>
-            </a:r>
-            <a:endParaRPr lang="en-US" dirty="0"/>
-          </a:p>
-        </p:txBody>
-      </p:sp>
-      <p:sp>
-        <p:nvSpPr>
-          <p:cNvPr id="4" name="Slide Number Placeholder 3"/>
-          <p:cNvSpPr>
-            <a:spLocks noGrp="1"/>
-          </p:cNvSpPr>
-          <p:nvPr>
-            <p:ph type="sldNum" sz="quarter" idx="10"/>
-          </p:nvPr>
-        </p:nvSpPr>
-        <p:spPr/>
-        <p:txBody>
-          <a:bodyPr/>
-          <a:lstStyle/>
-          <a:p>
-            <a:fld id="{F7021451-1387-4CA6-816F-3879F97B5CBC}" type="slidenum">
-              <a:rPr lang="en-US"/>
-              <a:t>5</a:t>
-            </a:fld>
-            <a:endParaRPr lang="en-US"/>
-          </a:p>
-        </p:txBody>
-      </p:sp>
-    </p:spTree>
-    <p:extLst>
-      <p:ext uri="{BB962C8B-B14F-4D97-AF65-F5344CB8AC3E}">
-        <p14:creationId xmlns:p14="http://schemas.microsoft.com/office/powerpoint/2010/main" val="1024086991"/>
-      </p:ext>
-    </p:extLst>
-  </p:cSld>
-  <p:clrMapOvr>
-    <a:masterClrMapping/>
-  </p:clrMapOvr>
-</p:notes>
-</file>
-
-<file path=ppt/notesSlides/notesSlide6.xml><?xml version="1.0" encoding="utf-8"?>
-<p:notes xmlns:a="http://schemas.openxmlformats.org/drawingml/2006/main" xmlns:r="http://schemas.openxmlformats.org/officeDocument/2006/relationships" xmlns:p="http://schemas.openxmlformats.org/presentationml/2006/main">
-  <p:cSld>
-    <p:spTree>
-      <p:nvGrpSpPr>
-        <p:cNvPr id="1" name=""/>
-        <p:cNvGrpSpPr/>
-        <p:nvPr/>
-      </p:nvGrpSpPr>
-      <p:grpSpPr>
-        <a:xfrm>
-          <a:off x="0" y="0"/>
-          <a:ext cx="0" cy="0"/>
-          <a:chOff x="0" y="0"/>
-          <a:chExt cx="0" cy="0"/>
-        </a:xfrm>
-      </p:grpSpPr>
-      <p:sp>
-        <p:nvSpPr>
-          <p:cNvPr id="2" name="Slide Image Placeholder 1"/>
-          <p:cNvSpPr>
-            <a:spLocks noGrp="1" noRot="1" noChangeAspect="1"/>
-          </p:cNvSpPr>
-          <p:nvPr>
-            <p:ph type="sldImg"/>
-          </p:nvPr>
-        </p:nvSpPr>
-        <p:spPr/>
-      </p:sp>
-      <p:sp>
-        <p:nvSpPr>
-          <p:cNvPr id="3" name="Notes Placeholder 2"/>
-          <p:cNvSpPr>
-            <a:spLocks noGrp="1"/>
-          </p:cNvSpPr>
-          <p:nvPr>
-            <p:ph type="body" idx="1"/>
-          </p:nvPr>
-        </p:nvSpPr>
-        <p:spPr/>
-        <p:txBody>
-          <a:bodyPr/>
-          <a:lstStyle/>
-          <a:p>
-            <a:r>
-              <a:rPr lang="en-US" dirty="0"/>
-              <a:t/>
-            </a:r>
-            <a:endParaRPr lang="en-US" dirty="0"/>
-          </a:p>
-        </p:txBody>
-      </p:sp>
-      <p:sp>
-        <p:nvSpPr>
-          <p:cNvPr id="4" name="Slide Number Placeholder 3"/>
-          <p:cNvSpPr>
-            <a:spLocks noGrp="1"/>
-          </p:cNvSpPr>
-          <p:nvPr>
-            <p:ph type="sldNum" sz="quarter" idx="10"/>
-          </p:nvPr>
-        </p:nvSpPr>
-        <p:spPr/>
-        <p:txBody>
-          <a:bodyPr/>
-          <a:lstStyle/>
-          <a:p>
-            <a:fld id="{F7021451-1387-4CA6-816F-3879F97B5CBC}" type="slidenum">
-              <a:rPr lang="en-US"/>
-              <a:t>6</a:t>
             </a:fld>
             <a:endParaRPr lang="en-US"/>
           </a:p>
@@ -1302,7 +1124,7 @@
     <p:bg>
       <p:bgPr>
         <a:solidFill>
-          <a:srgbClr val="1E3A5F"/>
+          <a:srgbClr val="1B2A4A"/>
         </a:solidFill>
       </p:bgPr>
     </p:bg>
@@ -1322,14 +1144,34 @@
       </p:grpSpPr>
       <p:sp>
         <p:nvSpPr>
-          <p:cNvPr id="2" name="Text 0"/>
+          <p:cNvPr id="2" name="Shape 0"/>
           <p:cNvSpPr/>
           <p:nvPr/>
         </p:nvSpPr>
         <p:spPr>
           <a:xfrm>
-            <a:off x="731520" y="1371600"/>
-            <a:ext cx="7680960" cy="1371600"/>
+            <a:off x="0" y="0"/>
+            <a:ext cx="109728" cy="5143500"/>
+          </a:xfrm>
+          <a:prstGeom prst="rect">
+            <a:avLst/>
+          </a:prstGeom>
+          <a:solidFill>
+            <a:srgbClr val="2A9D8F"/>
+          </a:solidFill>
+          <a:ln/>
+        </p:spPr>
+      </p:sp>
+      <p:sp>
+        <p:nvSpPr>
+          <p:cNvPr id="3" name="Text 1"/>
+          <p:cNvSpPr/>
+          <p:nvPr/>
+        </p:nvSpPr>
+        <p:spPr>
+          <a:xfrm>
+            <a:off x="731520" y="1280160"/>
+            <a:ext cx="7772400" cy="1371600"/>
           </a:xfrm>
           <a:prstGeom prst="rect">
             <a:avLst/>
@@ -1345,30 +1187,30 @@
               <a:buNone/>
             </a:pPr>
             <a:r>
-              <a:rPr lang="en-US" sz="4000" b="1" dirty="0">
+              <a:rPr lang="en-US" sz="3600" b="1" dirty="0">
                 <a:solidFill>
                   <a:srgbClr val="FFFFFF"/>
                 </a:solidFill>
-                <a:latin typeface="Calibri" pitchFamily="34" charset="0"/>
-                <a:ea typeface="Calibri" pitchFamily="34" charset="-122"/>
-                <a:cs typeface="Calibri" pitchFamily="34" charset="-120"/>
+                <a:latin typeface="Georgia" pitchFamily="34" charset="0"/>
+                <a:ea typeface="Georgia" pitchFamily="34" charset="-122"/>
+                <a:cs typeface="Georgia" pitchFamily="34" charset="-120"/>
               </a:rPr>
               <a:t>Earth, Sun &amp; Moon</a:t>
             </a:r>
-            <a:endParaRPr lang="en-US" sz="4000" dirty="0"/>
-          </a:p>
-        </p:txBody>
-      </p:sp>
-      <p:sp>
-        <p:nvSpPr>
-          <p:cNvPr id="3" name="Text 1"/>
+            <a:endParaRPr lang="en-US" sz="3600" dirty="0"/>
+          </a:p>
+        </p:txBody>
+      </p:sp>
+      <p:sp>
+        <p:nvSpPr>
+          <p:cNvPr id="4" name="Text 2"/>
           <p:cNvSpPr/>
           <p:nvPr/>
         </p:nvSpPr>
         <p:spPr>
           <a:xfrm>
-            <a:off x="731520" y="2926080"/>
-            <a:ext cx="7680960" cy="548640"/>
+            <a:off x="731520" y="2743200"/>
+            <a:ext cx="7772400" cy="548640"/>
           </a:xfrm>
           <a:prstGeom prst="rect">
             <a:avLst/>
@@ -1384,17 +1226,56 @@
               <a:buNone/>
             </a:pPr>
             <a:r>
-              <a:rPr lang="en-US" sz="1600" i="1" dirty="0">
+              <a:rPr lang="en-US" sz="1600" dirty="0">
                 <a:solidFill>
-                  <a:srgbClr val="FFFFFF"/>
+                  <a:srgbClr val="9B9690"/>
                 </a:solidFill>
                 <a:latin typeface="Calibri" pitchFamily="34" charset="0"/>
                 <a:ea typeface="Calibri" pitchFamily="34" charset="-122"/>
                 <a:cs typeface="Calibri" pitchFamily="34" charset="-120"/>
               </a:rPr>
-              <a:t>Grade 6 Science · Mr Zocchi</a:t>
+              <a:t>G6 Science · Space Science</a:t>
             </a:r>
             <a:endParaRPr lang="en-US" sz="1600" dirty="0"/>
+          </a:p>
+        </p:txBody>
+      </p:sp>
+      <p:sp>
+        <p:nvSpPr>
+          <p:cNvPr id="5" name="Text 3"/>
+          <p:cNvSpPr/>
+          <p:nvPr/>
+        </p:nvSpPr>
+        <p:spPr>
+          <a:xfrm>
+            <a:off x="731520" y="4389120"/>
+            <a:ext cx="7772400" cy="457200"/>
+          </a:xfrm>
+          <a:prstGeom prst="rect">
+            <a:avLst/>
+          </a:prstGeom>
+          <a:noFill/>
+          <a:ln/>
+        </p:spPr>
+        <p:txBody>
+          <a:bodyPr wrap="square" rtlCol="0" anchor="ctr"/>
+          <a:lstStyle/>
+          <a:p>
+            <a:pPr indent="0" marL="0">
+              <a:buNone/>
+            </a:pPr>
+            <a:r>
+              <a:rPr lang="en-US" sz="1000" dirty="0">
+                <a:solidFill>
+                  <a:srgbClr val="6B6660"/>
+                </a:solidFill>
+                <a:latin typeface="Calibri" pitchFamily="34" charset="0"/>
+                <a:ea typeface="Calibri" pitchFamily="34" charset="-122"/>
+                <a:cs typeface="Calibri" pitchFamily="34" charset="-120"/>
+              </a:rPr>
+              <a:t>Mr Zocchi · mrzocchi.com</a:t>
+            </a:r>
+            <a:endParaRPr lang="en-US" sz="1000" dirty="0"/>
           </a:p>
         </p:txBody>
       </p:sp>
@@ -1409,6 +1290,13 @@
 <file path=ppt/slides/slide2.xml><?xml version="1.0" encoding="utf-8"?>
 <p:sld xmlns:a="http://schemas.openxmlformats.org/drawingml/2006/main" xmlns:r="http://schemas.openxmlformats.org/officeDocument/2006/relationships" xmlns:p="http://schemas.openxmlformats.org/presentationml/2006/main">
   <p:cSld name="Slide 2">
+    <p:bg>
+      <p:bgPr>
+        <a:solidFill>
+          <a:srgbClr val="FFFFFF"/>
+        </a:solidFill>
+      </p:bgPr>
+    </p:bg>
     <p:spTree>
       <p:nvGrpSpPr>
         <p:cNvPr id="1" name=""/>
@@ -1432,13 +1320,13 @@
         <p:spPr>
           <a:xfrm>
             <a:off x="0" y="0"/>
-            <a:ext cx="9144000" cy="548640"/>
+            <a:ext cx="9144000" cy="54864"/>
           </a:xfrm>
           <a:prstGeom prst="rect">
             <a:avLst/>
           </a:prstGeom>
           <a:solidFill>
-            <a:srgbClr val="1E3A5F"/>
+            <a:srgbClr val="2A9D8F"/>
           </a:solidFill>
           <a:ln/>
         </p:spPr>
@@ -1451,8 +1339,8 @@
         </p:nvSpPr>
         <p:spPr>
           <a:xfrm>
-            <a:off x="457200" y="45720"/>
-            <a:ext cx="8229600" cy="457200"/>
+            <a:off x="548640" y="274320"/>
+            <a:ext cx="8046720" cy="640080"/>
           </a:xfrm>
           <a:prstGeom prst="rect">
             <a:avLst/>
@@ -1461,24 +1349,24 @@
           <a:ln/>
         </p:spPr>
         <p:txBody>
-          <a:bodyPr wrap="square" rtlCol="0" anchor="ctr"/>
+          <a:bodyPr wrap="square" lIns="0" tIns="0" rIns="0" bIns="0" rtlCol="0" anchor="ctr"/>
           <a:lstStyle/>
           <a:p>
             <a:pPr indent="0" marL="0">
               <a:buNone/>
             </a:pPr>
             <a:r>
-              <a:rPr lang="en-US" sz="1800" b="1" dirty="0">
+              <a:rPr lang="en-US" sz="2600" b="1" dirty="0">
                 <a:solidFill>
-                  <a:srgbClr val="FFFFFF"/>
+                  <a:srgbClr val="1B2A4A"/>
                 </a:solidFill>
-                <a:latin typeface="Calibri" pitchFamily="34" charset="0"/>
-                <a:ea typeface="Calibri" pitchFamily="34" charset="-122"/>
-                <a:cs typeface="Calibri" pitchFamily="34" charset="-120"/>
+                <a:latin typeface="Georgia" pitchFamily="34" charset="0"/>
+                <a:ea typeface="Georgia" pitchFamily="34" charset="-122"/>
+                <a:cs typeface="Georgia" pitchFamily="34" charset="-120"/>
               </a:rPr>
-              <a:t>Earth's orbit around the Sun</a:t>
-            </a:r>
-            <a:endParaRPr lang="en-US" sz="1800" dirty="0"/>
+              <a:t>The Earth-Sun-Moon System</a:t>
+            </a:r>
+            <a:endParaRPr lang="en-US" sz="2600" dirty="0"/>
           </a:p>
         </p:txBody>
       </p:sp>
@@ -1490,8 +1378,8 @@
         </p:nvSpPr>
         <p:spPr>
           <a:xfrm>
-            <a:off x="731520" y="1097280"/>
-            <a:ext cx="7680960" cy="3200400"/>
+            <a:off x="548640" y="1097280"/>
+            <a:ext cx="8046720" cy="3474720"/>
           </a:xfrm>
           <a:prstGeom prst="rect">
             <a:avLst/>
@@ -1500,47 +1388,112 @@
           <a:ln/>
         </p:spPr>
         <p:txBody>
-          <a:bodyPr wrap="square" rtlCol="0" anchor="ctr"/>
+          <a:bodyPr wrap="square" rtlCol="0" anchor="t"/>
           <a:lstStyle/>
           <a:p>
-            <a:pPr indent="0" marL="0">
-              <a:buNone/>
+            <a:pPr marL="342900" indent="-342900">
+              <a:spcAft>
+                <a:spcPts val="800"/>
+              </a:spcAft>
+              <a:buSzPct val="100000"/>
+              <a:buChar char="•"/>
             </a:pPr>
             <a:r>
-              <a:rPr lang="en-US" sz="1600" dirty="0">
+              <a:rPr lang="en-US" sz="1500" dirty="0">
                 <a:solidFill>
-                  <a:srgbClr val="363636"/>
+                  <a:srgbClr val="3D3A36"/>
                 </a:solidFill>
                 <a:latin typeface="Calibri" pitchFamily="34" charset="0"/>
                 <a:ea typeface="Calibri" pitchFamily="34" charset="-122"/>
                 <a:cs typeface="Calibri" pitchFamily="34" charset="-120"/>
               </a:rPr>
-              <a:t>Content for: Earth's orbit around the Sun</a:t>
-            </a:r>
-            <a:endParaRPr lang="en-US" sz="1600" dirty="0"/>
-          </a:p>
-          <a:p>
-            <a:pPr indent="0" marL="0">
-              <a:buNone/>
+              <a:t>Earth orbits the Sun (takes 365.25 days = 1 year)</a:t>
+            </a:r>
+            <a:endParaRPr lang="en-US" sz="1500" dirty="0"/>
+          </a:p>
+          <a:p>
+            <a:pPr marL="342900" indent="-342900">
+              <a:spcAft>
+                <a:spcPts val="800"/>
+              </a:spcAft>
+              <a:buSzPct val="100000"/>
+              <a:buChar char="•"/>
             </a:pPr>
-            <a:endParaRPr lang="en-US" sz="1600" dirty="0"/>
-          </a:p>
-          <a:p>
-            <a:pPr indent="0" marL="0">
-              <a:buNone/>
-            </a:pPr>
-            <a:r>
-              <a:rPr lang="en-US" sz="1600" dirty="0">
+            <a:r>
+              <a:rPr lang="en-US" sz="1500" dirty="0">
                 <a:solidFill>
-                  <a:srgbClr val="363636"/>
+                  <a:srgbClr val="3D3A36"/>
                 </a:solidFill>
                 <a:latin typeface="Calibri" pitchFamily="34" charset="0"/>
                 <a:ea typeface="Calibri" pitchFamily="34" charset="-122"/>
                 <a:cs typeface="Calibri" pitchFamily="34" charset="-120"/>
               </a:rPr>
-              <a:t>Key points will be covered in class.</a:t>
-            </a:r>
-            <a:endParaRPr lang="en-US" sz="1600" dirty="0"/>
+              <a:t>The Moon orbits Earth (takes ~28 days = 1 lunar month)</a:t>
+            </a:r>
+            <a:endParaRPr lang="en-US" sz="1500" dirty="0"/>
+          </a:p>
+          <a:p>
+            <a:pPr marL="342900" indent="-342900">
+              <a:spcAft>
+                <a:spcPts val="800"/>
+              </a:spcAft>
+              <a:buSzPct val="100000"/>
+              <a:buChar char="•"/>
+            </a:pPr>
+            <a:r>
+              <a:rPr lang="en-US" sz="1500" dirty="0">
+                <a:solidFill>
+                  <a:srgbClr val="3D3A36"/>
+                </a:solidFill>
+                <a:latin typeface="Calibri" pitchFamily="34" charset="0"/>
+                <a:ea typeface="Calibri" pitchFamily="34" charset="-122"/>
+                <a:cs typeface="Calibri" pitchFamily="34" charset="-120"/>
+              </a:rPr>
+              <a:t>Earth spins on its axis (takes 24 hours = 1 day)</a:t>
+            </a:r>
+            <a:endParaRPr lang="en-US" sz="1500" dirty="0"/>
+          </a:p>
+          <a:p>
+            <a:pPr marL="342900" indent="-342900">
+              <a:spcAft>
+                <a:spcPts val="800"/>
+              </a:spcAft>
+              <a:buSzPct val="100000"/>
+              <a:buChar char="•"/>
+            </a:pPr>
+            <a:r>
+              <a:rPr lang="en-US" sz="1500" dirty="0">
+                <a:solidFill>
+                  <a:srgbClr val="3D3A36"/>
+                </a:solidFill>
+                <a:latin typeface="Calibri" pitchFamily="34" charset="0"/>
+                <a:ea typeface="Calibri" pitchFamily="34" charset="-122"/>
+                <a:cs typeface="Calibri" pitchFamily="34" charset="-120"/>
+              </a:rPr>
+              <a:t>The Sun is a star; the Moon is a natural satellite</a:t>
+            </a:r>
+            <a:endParaRPr lang="en-US" sz="1500" dirty="0"/>
+          </a:p>
+          <a:p>
+            <a:pPr marL="342900" indent="-342900">
+              <a:spcAft>
+                <a:spcPts val="800"/>
+              </a:spcAft>
+              <a:buSzPct val="100000"/>
+              <a:buChar char="•"/>
+            </a:pPr>
+            <a:r>
+              <a:rPr lang="en-US" sz="1500" dirty="0">
+                <a:solidFill>
+                  <a:srgbClr val="3D3A36"/>
+                </a:solidFill>
+                <a:latin typeface="Calibri" pitchFamily="34" charset="0"/>
+                <a:ea typeface="Calibri" pitchFamily="34" charset="-122"/>
+                <a:cs typeface="Calibri" pitchFamily="34" charset="-120"/>
+              </a:rPr>
+              <a:t>The Moon does NOT produce its own light — it reflects sunlight</a:t>
+            </a:r>
+            <a:endParaRPr lang="en-US" sz="1500" dirty="0"/>
           </a:p>
         </p:txBody>
       </p:sp>
@@ -1552,8 +1505,8 @@
         </p:nvSpPr>
         <p:spPr>
           <a:xfrm>
-            <a:off x="7772400" y="4663440"/>
-            <a:ext cx="1097280" cy="365760"/>
+            <a:off x="548640" y="4800600"/>
+            <a:ext cx="3657600" cy="274320"/>
           </a:xfrm>
           <a:prstGeom prst="rect">
             <a:avLst/>
@@ -1565,21 +1518,18 @@
           <a:bodyPr wrap="square" rtlCol="0" anchor="ctr"/>
           <a:lstStyle/>
           <a:p>
-            <a:pPr algn="r" indent="0" marL="0">
+            <a:pPr indent="0" marL="0">
               <a:buNone/>
             </a:pPr>
             <a:r>
-              <a:rPr lang="en-US" sz="1000" dirty="0">
+              <a:rPr lang="en-US" sz="800" dirty="0">
                 <a:solidFill>
-                  <a:srgbClr val="999999"/>
+                  <a:srgbClr val="9B9690"/>
                 </a:solidFill>
-                <a:latin typeface="Calibri" pitchFamily="34" charset="0"/>
-                <a:ea typeface="Calibri" pitchFamily="34" charset="-122"/>
-                <a:cs typeface="Calibri" pitchFamily="34" charset="-120"/>
               </a:rPr>
-              <a:t>2 / 6</a:t>
-            </a:r>
-            <a:endParaRPr lang="en-US" sz="1000" dirty="0"/>
+              <a:t>mrzocchi.com</a:t>
+            </a:r>
+            <a:endParaRPr lang="en-US" sz="800" dirty="0"/>
           </a:p>
         </p:txBody>
       </p:sp>
@@ -1594,6 +1544,13 @@
 <file path=ppt/slides/slide3.xml><?xml version="1.0" encoding="utf-8"?>
 <p:sld xmlns:a="http://schemas.openxmlformats.org/drawingml/2006/main" xmlns:r="http://schemas.openxmlformats.org/officeDocument/2006/relationships" xmlns:p="http://schemas.openxmlformats.org/presentationml/2006/main">
   <p:cSld name="Slide 3">
+    <p:bg>
+      <p:bgPr>
+        <a:solidFill>
+          <a:srgbClr val="FFFFFF"/>
+        </a:solidFill>
+      </p:bgPr>
+    </p:bg>
     <p:spTree>
       <p:nvGrpSpPr>
         <p:cNvPr id="1" name=""/>
@@ -1617,13 +1574,13 @@
         <p:spPr>
           <a:xfrm>
             <a:off x="0" y="0"/>
-            <a:ext cx="9144000" cy="548640"/>
+            <a:ext cx="9144000" cy="54864"/>
           </a:xfrm>
           <a:prstGeom prst="rect">
             <a:avLst/>
           </a:prstGeom>
           <a:solidFill>
-            <a:srgbClr val="1E3A5F"/>
+            <a:srgbClr val="2A9D8F"/>
           </a:solidFill>
           <a:ln/>
         </p:spPr>
@@ -1636,8 +1593,8 @@
         </p:nvSpPr>
         <p:spPr>
           <a:xfrm>
-            <a:off x="457200" y="45720"/>
-            <a:ext cx="8229600" cy="457200"/>
+            <a:off x="548640" y="274320"/>
+            <a:ext cx="8046720" cy="640080"/>
           </a:xfrm>
           <a:prstGeom prst="rect">
             <a:avLst/>
@@ -1646,24 +1603,24 @@
           <a:ln/>
         </p:spPr>
         <p:txBody>
-          <a:bodyPr wrap="square" rtlCol="0" anchor="ctr"/>
+          <a:bodyPr wrap="square" lIns="0" tIns="0" rIns="0" bIns="0" rtlCol="0" anchor="ctr"/>
           <a:lstStyle/>
           <a:p>
             <a:pPr indent="0" marL="0">
               <a:buNone/>
             </a:pPr>
             <a:r>
-              <a:rPr lang="en-US" sz="1800" b="1" dirty="0">
+              <a:rPr lang="en-US" sz="2600" b="1" dirty="0">
                 <a:solidFill>
-                  <a:srgbClr val="FFFFFF"/>
+                  <a:srgbClr val="1B2A4A"/>
                 </a:solidFill>
-                <a:latin typeface="Calibri" pitchFamily="34" charset="0"/>
-                <a:ea typeface="Calibri" pitchFamily="34" charset="-122"/>
-                <a:cs typeface="Calibri" pitchFamily="34" charset="-120"/>
+                <a:latin typeface="Georgia" pitchFamily="34" charset="0"/>
+                <a:ea typeface="Georgia" pitchFamily="34" charset="-122"/>
+                <a:cs typeface="Georgia" pitchFamily="34" charset="-120"/>
               </a:rPr>
-              <a:t>The Moon's orbit around Earth</a:t>
-            </a:r>
-            <a:endParaRPr lang="en-US" sz="1800" dirty="0"/>
+              <a:t>The Moon</a:t>
+            </a:r>
+            <a:endParaRPr lang="en-US" sz="2600" dirty="0"/>
           </a:p>
         </p:txBody>
       </p:sp>
@@ -1675,8 +1632,8 @@
         </p:nvSpPr>
         <p:spPr>
           <a:xfrm>
-            <a:off x="731520" y="1097280"/>
-            <a:ext cx="7680960" cy="3200400"/>
+            <a:off x="548640" y="1097280"/>
+            <a:ext cx="8046720" cy="3474720"/>
           </a:xfrm>
           <a:prstGeom prst="rect">
             <a:avLst/>
@@ -1685,47 +1642,112 @@
           <a:ln/>
         </p:spPr>
         <p:txBody>
-          <a:bodyPr wrap="square" rtlCol="0" anchor="ctr"/>
+          <a:bodyPr wrap="square" rtlCol="0" anchor="t"/>
           <a:lstStyle/>
           <a:p>
-            <a:pPr indent="0" marL="0">
-              <a:buNone/>
+            <a:pPr marL="342900" indent="-342900">
+              <a:spcAft>
+                <a:spcPts val="800"/>
+              </a:spcAft>
+              <a:buSzPct val="100000"/>
+              <a:buChar char="•"/>
             </a:pPr>
             <a:r>
-              <a:rPr lang="en-US" sz="1600" dirty="0">
+              <a:rPr lang="en-US" sz="1500" dirty="0">
                 <a:solidFill>
-                  <a:srgbClr val="363636"/>
+                  <a:srgbClr val="3D3A36"/>
                 </a:solidFill>
                 <a:latin typeface="Calibri" pitchFamily="34" charset="0"/>
                 <a:ea typeface="Calibri" pitchFamily="34" charset="-122"/>
                 <a:cs typeface="Calibri" pitchFamily="34" charset="-120"/>
               </a:rPr>
-              <a:t>Content for: The Moon's orbit around Earth</a:t>
-            </a:r>
-            <a:endParaRPr lang="en-US" sz="1600" dirty="0"/>
-          </a:p>
-          <a:p>
-            <a:pPr indent="0" marL="0">
-              <a:buNone/>
+              <a:t>Diameter about 1/4 of Earth's</a:t>
+            </a:r>
+            <a:endParaRPr lang="en-US" sz="1500" dirty="0"/>
+          </a:p>
+          <a:p>
+            <a:pPr marL="342900" indent="-342900">
+              <a:spcAft>
+                <a:spcPts val="800"/>
+              </a:spcAft>
+              <a:buSzPct val="100000"/>
+              <a:buChar char="•"/>
             </a:pPr>
-            <a:endParaRPr lang="en-US" sz="1600" dirty="0"/>
-          </a:p>
-          <a:p>
-            <a:pPr indent="0" marL="0">
-              <a:buNone/>
-            </a:pPr>
-            <a:r>
-              <a:rPr lang="en-US" sz="1600" dirty="0">
+            <a:r>
+              <a:rPr lang="en-US" sz="1500" dirty="0">
                 <a:solidFill>
-                  <a:srgbClr val="363636"/>
+                  <a:srgbClr val="3D3A36"/>
                 </a:solidFill>
                 <a:latin typeface="Calibri" pitchFamily="34" charset="0"/>
                 <a:ea typeface="Calibri" pitchFamily="34" charset="-122"/>
                 <a:cs typeface="Calibri" pitchFamily="34" charset="-120"/>
               </a:rPr>
-              <a:t>Key points will be covered in class.</a:t>
-            </a:r>
-            <a:endParaRPr lang="en-US" sz="1600" dirty="0"/>
+              <a:t>No atmosphere — no weather, no sound</a:t>
+            </a:r>
+            <a:endParaRPr lang="en-US" sz="1500" dirty="0"/>
+          </a:p>
+          <a:p>
+            <a:pPr marL="342900" indent="-342900">
+              <a:spcAft>
+                <a:spcPts val="800"/>
+              </a:spcAft>
+              <a:buSzPct val="100000"/>
+              <a:buChar char="•"/>
+            </a:pPr>
+            <a:r>
+              <a:rPr lang="en-US" sz="1500" dirty="0">
+                <a:solidFill>
+                  <a:srgbClr val="3D3A36"/>
+                </a:solidFill>
+                <a:latin typeface="Calibri" pitchFamily="34" charset="0"/>
+                <a:ea typeface="Calibri" pitchFamily="34" charset="-122"/>
+                <a:cs typeface="Calibri" pitchFamily="34" charset="-120"/>
+              </a:rPr>
+              <a:t>Gravity is 1/6 of Earth's</a:t>
+            </a:r>
+            <a:endParaRPr lang="en-US" sz="1500" dirty="0"/>
+          </a:p>
+          <a:p>
+            <a:pPr marL="342900" indent="-342900">
+              <a:spcAft>
+                <a:spcPts val="800"/>
+              </a:spcAft>
+              <a:buSzPct val="100000"/>
+              <a:buChar char="•"/>
+            </a:pPr>
+            <a:r>
+              <a:rPr lang="en-US" sz="1500" dirty="0">
+                <a:solidFill>
+                  <a:srgbClr val="3D3A36"/>
+                </a:solidFill>
+                <a:latin typeface="Calibri" pitchFamily="34" charset="0"/>
+                <a:ea typeface="Calibri" pitchFamily="34" charset="-122"/>
+                <a:cs typeface="Calibri" pitchFamily="34" charset="-120"/>
+              </a:rPr>
+              <a:t>We see phases because of how sunlight hits the Moon as it orbits</a:t>
+            </a:r>
+            <a:endParaRPr lang="en-US" sz="1500" dirty="0"/>
+          </a:p>
+          <a:p>
+            <a:pPr marL="342900" indent="-342900">
+              <a:spcAft>
+                <a:spcPts val="800"/>
+              </a:spcAft>
+              <a:buSzPct val="100000"/>
+              <a:buChar char="•"/>
+            </a:pPr>
+            <a:r>
+              <a:rPr lang="en-US" sz="1500" dirty="0">
+                <a:solidFill>
+                  <a:srgbClr val="3D3A36"/>
+                </a:solidFill>
+                <a:latin typeface="Calibri" pitchFamily="34" charset="0"/>
+                <a:ea typeface="Calibri" pitchFamily="34" charset="-122"/>
+                <a:cs typeface="Calibri" pitchFamily="34" charset="-120"/>
+              </a:rPr>
+              <a:t>New Moon → Crescent → Quarter → Gibbous → Full Moon (and back)</a:t>
+            </a:r>
+            <a:endParaRPr lang="en-US" sz="1500" dirty="0"/>
           </a:p>
         </p:txBody>
       </p:sp>
@@ -1737,8 +1759,8 @@
         </p:nvSpPr>
         <p:spPr>
           <a:xfrm>
-            <a:off x="7772400" y="4663440"/>
-            <a:ext cx="1097280" cy="365760"/>
+            <a:off x="548640" y="4800600"/>
+            <a:ext cx="3657600" cy="274320"/>
           </a:xfrm>
           <a:prstGeom prst="rect">
             <a:avLst/>
@@ -1750,21 +1772,18 @@
           <a:bodyPr wrap="square" rtlCol="0" anchor="ctr"/>
           <a:lstStyle/>
           <a:p>
-            <a:pPr algn="r" indent="0" marL="0">
+            <a:pPr indent="0" marL="0">
               <a:buNone/>
             </a:pPr>
             <a:r>
-              <a:rPr lang="en-US" sz="1000" dirty="0">
+              <a:rPr lang="en-US" sz="800" dirty="0">
                 <a:solidFill>
-                  <a:srgbClr val="999999"/>
+                  <a:srgbClr val="9B9690"/>
                 </a:solidFill>
-                <a:latin typeface="Calibri" pitchFamily="34" charset="0"/>
-                <a:ea typeface="Calibri" pitchFamily="34" charset="-122"/>
-                <a:cs typeface="Calibri" pitchFamily="34" charset="-120"/>
               </a:rPr>
-              <a:t>3 / 6</a:t>
-            </a:r>
-            <a:endParaRPr lang="en-US" sz="1000" dirty="0"/>
+              <a:t>mrzocchi.com</a:t>
+            </a:r>
+            <a:endParaRPr lang="en-US" sz="800" dirty="0"/>
           </a:p>
         </p:txBody>
       </p:sp>
@@ -1779,6 +1798,13 @@
 <file path=ppt/slides/slide4.xml><?xml version="1.0" encoding="utf-8"?>
 <p:sld xmlns:a="http://schemas.openxmlformats.org/drawingml/2006/main" xmlns:r="http://schemas.openxmlformats.org/officeDocument/2006/relationships" xmlns:p="http://schemas.openxmlformats.org/presentationml/2006/main">
   <p:cSld name="Slide 4">
+    <p:bg>
+      <p:bgPr>
+        <a:solidFill>
+          <a:srgbClr val="1B2A4A"/>
+        </a:solidFill>
+      </p:bgPr>
+    </p:bg>
     <p:spTree>
       <p:nvGrpSpPr>
         <p:cNvPr id="1" name=""/>
@@ -1802,13 +1828,13 @@
         <p:spPr>
           <a:xfrm>
             <a:off x="0" y="0"/>
-            <a:ext cx="9144000" cy="548640"/>
+            <a:ext cx="9144000" cy="54864"/>
           </a:xfrm>
           <a:prstGeom prst="rect">
             <a:avLst/>
           </a:prstGeom>
           <a:solidFill>
-            <a:srgbClr val="1E3A5F"/>
+            <a:srgbClr val="2A9D8F"/>
           </a:solidFill>
           <a:ln/>
         </p:spPr>
@@ -1821,8 +1847,8 @@
         </p:nvSpPr>
         <p:spPr>
           <a:xfrm>
-            <a:off x="457200" y="45720"/>
-            <a:ext cx="8229600" cy="457200"/>
+            <a:off x="548640" y="457200"/>
+            <a:ext cx="8046720" cy="640080"/>
           </a:xfrm>
           <a:prstGeom prst="rect">
             <a:avLst/>
@@ -1838,17 +1864,17 @@
               <a:buNone/>
             </a:pPr>
             <a:r>
-              <a:rPr lang="en-US" sz="1800" b="1" dirty="0">
+              <a:rPr lang="en-US" sz="2800" b="1" dirty="0">
                 <a:solidFill>
                   <a:srgbClr val="FFFFFF"/>
                 </a:solidFill>
-                <a:latin typeface="Calibri" pitchFamily="34" charset="0"/>
-                <a:ea typeface="Calibri" pitchFamily="34" charset="-122"/>
-                <a:cs typeface="Calibri" pitchFamily="34" charset="-120"/>
+                <a:latin typeface="Georgia" pitchFamily="34" charset="0"/>
+                <a:ea typeface="Georgia" pitchFamily="34" charset="-122"/>
+                <a:cs typeface="Georgia" pitchFamily="34" charset="-120"/>
               </a:rPr>
-              <a:t>Phases of the Moon</a:t>
-            </a:r>
-            <a:endParaRPr lang="en-US" sz="1800" dirty="0"/>
+              <a:t>Key Takeaways</a:t>
+            </a:r>
+            <a:endParaRPr lang="en-US" sz="2800" dirty="0"/>
           </a:p>
         </p:txBody>
       </p:sp>
@@ -1860,7 +1886,7 @@
         </p:nvSpPr>
         <p:spPr>
           <a:xfrm>
-            <a:off x="731520" y="1097280"/>
+            <a:off x="731520" y="1371600"/>
             <a:ext cx="7680960" cy="3200400"/>
           </a:xfrm>
           <a:prstGeom prst="rect">
@@ -1870,45 +1896,89 @@
           <a:ln/>
         </p:spPr>
         <p:txBody>
-          <a:bodyPr wrap="square" rtlCol="0" anchor="ctr"/>
+          <a:bodyPr wrap="square" rtlCol="0" anchor="t"/>
           <a:lstStyle/>
           <a:p>
-            <a:pPr indent="0" marL="0">
-              <a:buNone/>
+            <a:pPr marL="342900" indent="-342900">
+              <a:spcAft>
+                <a:spcPts val="1000"/>
+              </a:spcAft>
+              <a:buSzPct val="100000"/>
+              <a:buChar char="•"/>
             </a:pPr>
             <a:r>
               <a:rPr lang="en-US" sz="1600" dirty="0">
                 <a:solidFill>
-                  <a:srgbClr val="363636"/>
+                  <a:srgbClr val="CADCFC"/>
                 </a:solidFill>
                 <a:latin typeface="Calibri" pitchFamily="34" charset="0"/>
                 <a:ea typeface="Calibri" pitchFamily="34" charset="-122"/>
                 <a:cs typeface="Calibri" pitchFamily="34" charset="-120"/>
               </a:rPr>
-              <a:t>Content for: Phases of the Moon</a:t>
+              <a:t>Earth orbits Sun (1 year), Moon orbits Earth (~28 days), Earth spins (1 day)</a:t>
             </a:r>
             <a:endParaRPr lang="en-US" sz="1600" dirty="0"/>
           </a:p>
           <a:p>
-            <a:pPr indent="0" marL="0">
-              <a:buNone/>
-            </a:pPr>
-            <a:endParaRPr lang="en-US" sz="1600" dirty="0"/>
-          </a:p>
-          <a:p>
-            <a:pPr indent="0" marL="0">
-              <a:buNone/>
+            <a:pPr marL="342900" indent="-342900">
+              <a:spcAft>
+                <a:spcPts val="1000"/>
+              </a:spcAft>
+              <a:buSzPct val="100000"/>
+              <a:buChar char="•"/>
             </a:pPr>
             <a:r>
               <a:rPr lang="en-US" sz="1600" dirty="0">
                 <a:solidFill>
-                  <a:srgbClr val="363636"/>
+                  <a:srgbClr val="CADCFC"/>
                 </a:solidFill>
                 <a:latin typeface="Calibri" pitchFamily="34" charset="0"/>
                 <a:ea typeface="Calibri" pitchFamily="34" charset="-122"/>
                 <a:cs typeface="Calibri" pitchFamily="34" charset="-120"/>
               </a:rPr>
-              <a:t>Key points will be covered in class.</a:t>
+              <a:t>The Moon reflects sunlight — it doesn't make its own light</a:t>
+            </a:r>
+            <a:endParaRPr lang="en-US" sz="1600" dirty="0"/>
+          </a:p>
+          <a:p>
+            <a:pPr marL="342900" indent="-342900">
+              <a:spcAft>
+                <a:spcPts val="1000"/>
+              </a:spcAft>
+              <a:buSzPct val="100000"/>
+              <a:buChar char="•"/>
+            </a:pPr>
+            <a:r>
+              <a:rPr lang="en-US" sz="1600" dirty="0">
+                <a:solidFill>
+                  <a:srgbClr val="CADCFC"/>
+                </a:solidFill>
+                <a:latin typeface="Calibri" pitchFamily="34" charset="0"/>
+                <a:ea typeface="Calibri" pitchFamily="34" charset="-122"/>
+                <a:cs typeface="Calibri" pitchFamily="34" charset="-120"/>
+              </a:rPr>
+              <a:t>Moon phases caused by changing angle of sunlight</a:t>
+            </a:r>
+            <a:endParaRPr lang="en-US" sz="1600" dirty="0"/>
+          </a:p>
+          <a:p>
+            <a:pPr marL="342900" indent="-342900">
+              <a:spcAft>
+                <a:spcPts val="1000"/>
+              </a:spcAft>
+              <a:buSzPct val="100000"/>
+              <a:buChar char="•"/>
+            </a:pPr>
+            <a:r>
+              <a:rPr lang="en-US" sz="1600" dirty="0">
+                <a:solidFill>
+                  <a:srgbClr val="CADCFC"/>
+                </a:solidFill>
+                <a:latin typeface="Calibri" pitchFamily="34" charset="0"/>
+                <a:ea typeface="Calibri" pitchFamily="34" charset="-122"/>
+                <a:cs typeface="Calibri" pitchFamily="34" charset="-120"/>
+              </a:rPr>
+              <a:t>Sun = star, Earth = planet, Moon = natural satellite</a:t>
             </a:r>
             <a:endParaRPr lang="en-US" sz="1600" dirty="0"/>
           </a:p>
@@ -1922,8 +1992,8 @@
         </p:nvSpPr>
         <p:spPr>
           <a:xfrm>
-            <a:off x="7772400" y="4663440"/>
-            <a:ext cx="1097280" cy="365760"/>
+            <a:off x="548640" y="4572000"/>
+            <a:ext cx="3657600" cy="274320"/>
           </a:xfrm>
           <a:prstGeom prst="rect">
             <a:avLst/>
@@ -1935,389 +2005,16 @@
           <a:bodyPr wrap="square" rtlCol="0" anchor="ctr"/>
           <a:lstStyle/>
           <a:p>
-            <a:pPr algn="r" indent="0" marL="0">
-              <a:buNone/>
-            </a:pPr>
-            <a:r>
-              <a:rPr lang="en-US" sz="1000" dirty="0">
-                <a:solidFill>
-                  <a:srgbClr val="999999"/>
-                </a:solidFill>
-                <a:latin typeface="Calibri" pitchFamily="34" charset="0"/>
-                <a:ea typeface="Calibri" pitchFamily="34" charset="-122"/>
-                <a:cs typeface="Calibri" pitchFamily="34" charset="-120"/>
-              </a:rPr>
-              <a:t>4 / 6</a:t>
-            </a:r>
-            <a:endParaRPr lang="en-US" sz="1000" dirty="0"/>
-          </a:p>
-        </p:txBody>
-      </p:sp>
-    </p:spTree>
-  </p:cSld>
-  <p:clrMapOvr>
-    <a:masterClrMapping/>
-  </p:clrMapOvr>
-</p:sld>
-</file>
-
-<file path=ppt/slides/slide5.xml><?xml version="1.0" encoding="utf-8"?>
-<p:sld xmlns:a="http://schemas.openxmlformats.org/drawingml/2006/main" xmlns:r="http://schemas.openxmlformats.org/officeDocument/2006/relationships" xmlns:p="http://schemas.openxmlformats.org/presentationml/2006/main">
-  <p:cSld name="Slide 5">
-    <p:spTree>
-      <p:nvGrpSpPr>
-        <p:cNvPr id="1" name=""/>
-        <p:cNvGrpSpPr/>
-        <p:nvPr/>
-      </p:nvGrpSpPr>
-      <p:grpSpPr>
-        <a:xfrm>
-          <a:off x="0" y="0"/>
-          <a:ext cx="0" cy="0"/>
-          <a:chOff x="0" y="0"/>
-          <a:chExt cx="0" cy="0"/>
-        </a:xfrm>
-      </p:grpSpPr>
-      <p:sp>
-        <p:nvSpPr>
-          <p:cNvPr id="2" name="Shape 0"/>
-          <p:cNvSpPr/>
-          <p:nvPr/>
-        </p:nvSpPr>
-        <p:spPr>
-          <a:xfrm>
-            <a:off x="0" y="0"/>
-            <a:ext cx="9144000" cy="548640"/>
-          </a:xfrm>
-          <a:prstGeom prst="rect">
-            <a:avLst/>
-          </a:prstGeom>
-          <a:solidFill>
-            <a:srgbClr val="1E3A5F"/>
-          </a:solidFill>
-          <a:ln/>
-        </p:spPr>
-      </p:sp>
-      <p:sp>
-        <p:nvSpPr>
-          <p:cNvPr id="3" name="Text 1"/>
-          <p:cNvSpPr/>
-          <p:nvPr/>
-        </p:nvSpPr>
-        <p:spPr>
-          <a:xfrm>
-            <a:off x="457200" y="45720"/>
-            <a:ext cx="8229600" cy="457200"/>
-          </a:xfrm>
-          <a:prstGeom prst="rect">
-            <a:avLst/>
-          </a:prstGeom>
-          <a:noFill/>
-          <a:ln/>
-        </p:spPr>
-        <p:txBody>
-          <a:bodyPr wrap="square" rtlCol="0" anchor="ctr"/>
-          <a:lstStyle/>
-          <a:p>
             <a:pPr indent="0" marL="0">
               <a:buNone/>
             </a:pPr>
             <a:r>
-              <a:rPr lang="en-US" sz="1800" b="1" dirty="0">
-                <a:solidFill>
-                  <a:srgbClr val="FFFFFF"/>
-                </a:solidFill>
-                <a:latin typeface="Calibri" pitchFamily="34" charset="0"/>
-                <a:ea typeface="Calibri" pitchFamily="34" charset="-122"/>
-                <a:cs typeface="Calibri" pitchFamily="34" charset="-120"/>
-              </a:rPr>
-              <a:t>Eclipses (solar &amp; lunar)</a:t>
-            </a:r>
-            <a:endParaRPr lang="en-US" sz="1800" dirty="0"/>
-          </a:p>
-        </p:txBody>
-      </p:sp>
-      <p:sp>
-        <p:nvSpPr>
-          <p:cNvPr id="4" name="Text 2"/>
-          <p:cNvSpPr/>
-          <p:nvPr/>
-        </p:nvSpPr>
-        <p:spPr>
-          <a:xfrm>
-            <a:off x="731520" y="1097280"/>
-            <a:ext cx="7680960" cy="3200400"/>
-          </a:xfrm>
-          <a:prstGeom prst="rect">
-            <a:avLst/>
-          </a:prstGeom>
-          <a:noFill/>
-          <a:ln/>
-        </p:spPr>
-        <p:txBody>
-          <a:bodyPr wrap="square" rtlCol="0" anchor="ctr"/>
-          <a:lstStyle/>
-          <a:p>
-            <a:pPr indent="0" marL="0">
-              <a:buNone/>
-            </a:pPr>
-            <a:r>
-              <a:rPr lang="en-US" sz="1600" dirty="0">
-                <a:solidFill>
-                  <a:srgbClr val="363636"/>
-                </a:solidFill>
-                <a:latin typeface="Calibri" pitchFamily="34" charset="0"/>
-                <a:ea typeface="Calibri" pitchFamily="34" charset="-122"/>
-                <a:cs typeface="Calibri" pitchFamily="34" charset="-120"/>
-              </a:rPr>
-              <a:t>Content for: Eclipses (solar &amp; lunar)</a:t>
-            </a:r>
-            <a:endParaRPr lang="en-US" sz="1600" dirty="0"/>
-          </a:p>
-          <a:p>
-            <a:pPr indent="0" marL="0">
-              <a:buNone/>
-            </a:pPr>
-            <a:endParaRPr lang="en-US" sz="1600" dirty="0"/>
-          </a:p>
-          <a:p>
-            <a:pPr indent="0" marL="0">
-              <a:buNone/>
-            </a:pPr>
-            <a:r>
-              <a:rPr lang="en-US" sz="1600" dirty="0">
-                <a:solidFill>
-                  <a:srgbClr val="363636"/>
-                </a:solidFill>
-                <a:latin typeface="Calibri" pitchFamily="34" charset="0"/>
-                <a:ea typeface="Calibri" pitchFamily="34" charset="-122"/>
-                <a:cs typeface="Calibri" pitchFamily="34" charset="-120"/>
-              </a:rPr>
-              <a:t>Key points will be covered in class.</a:t>
-            </a:r>
-            <a:endParaRPr lang="en-US" sz="1600" dirty="0"/>
-          </a:p>
-        </p:txBody>
-      </p:sp>
-      <p:sp>
-        <p:nvSpPr>
-          <p:cNvPr id="5" name="Text 3"/>
-          <p:cNvSpPr/>
-          <p:nvPr/>
-        </p:nvSpPr>
-        <p:spPr>
-          <a:xfrm>
-            <a:off x="7772400" y="4663440"/>
-            <a:ext cx="1097280" cy="365760"/>
-          </a:xfrm>
-          <a:prstGeom prst="rect">
-            <a:avLst/>
-          </a:prstGeom>
-          <a:noFill/>
-          <a:ln/>
-        </p:spPr>
-        <p:txBody>
-          <a:bodyPr wrap="square" rtlCol="0" anchor="ctr"/>
-          <a:lstStyle/>
-          <a:p>
-            <a:pPr algn="r" indent="0" marL="0">
-              <a:buNone/>
-            </a:pPr>
-            <a:r>
               <a:rPr lang="en-US" sz="1000" dirty="0">
                 <a:solidFill>
-                  <a:srgbClr val="999999"/>
+                  <a:srgbClr val="6B6660"/>
                 </a:solidFill>
-                <a:latin typeface="Calibri" pitchFamily="34" charset="0"/>
-                <a:ea typeface="Calibri" pitchFamily="34" charset="-122"/>
-                <a:cs typeface="Calibri" pitchFamily="34" charset="-120"/>
               </a:rPr>
-              <a:t>5 / 6</a:t>
-            </a:r>
-            <a:endParaRPr lang="en-US" sz="1000" dirty="0"/>
-          </a:p>
-        </p:txBody>
-      </p:sp>
-    </p:spTree>
-  </p:cSld>
-  <p:clrMapOvr>
-    <a:masterClrMapping/>
-  </p:clrMapOvr>
-</p:sld>
-</file>
-
-<file path=ppt/slides/slide6.xml><?xml version="1.0" encoding="utf-8"?>
-<p:sld xmlns:a="http://schemas.openxmlformats.org/drawingml/2006/main" xmlns:r="http://schemas.openxmlformats.org/officeDocument/2006/relationships" xmlns:p="http://schemas.openxmlformats.org/presentationml/2006/main">
-  <p:cSld name="Slide 6">
-    <p:spTree>
-      <p:nvGrpSpPr>
-        <p:cNvPr id="1" name=""/>
-        <p:cNvGrpSpPr/>
-        <p:nvPr/>
-      </p:nvGrpSpPr>
-      <p:grpSpPr>
-        <a:xfrm>
-          <a:off x="0" y="0"/>
-          <a:ext cx="0" cy="0"/>
-          <a:chOff x="0" y="0"/>
-          <a:chExt cx="0" cy="0"/>
-        </a:xfrm>
-      </p:grpSpPr>
-      <p:sp>
-        <p:nvSpPr>
-          <p:cNvPr id="2" name="Shape 0"/>
-          <p:cNvSpPr/>
-          <p:nvPr/>
-        </p:nvSpPr>
-        <p:spPr>
-          <a:xfrm>
-            <a:off x="0" y="0"/>
-            <a:ext cx="9144000" cy="548640"/>
-          </a:xfrm>
-          <a:prstGeom prst="rect">
-            <a:avLst/>
-          </a:prstGeom>
-          <a:solidFill>
-            <a:srgbClr val="1E3A5F"/>
-          </a:solidFill>
-          <a:ln/>
-        </p:spPr>
-      </p:sp>
-      <p:sp>
-        <p:nvSpPr>
-          <p:cNvPr id="3" name="Text 1"/>
-          <p:cNvSpPr/>
-          <p:nvPr/>
-        </p:nvSpPr>
-        <p:spPr>
-          <a:xfrm>
-            <a:off x="457200" y="45720"/>
-            <a:ext cx="8229600" cy="457200"/>
-          </a:xfrm>
-          <a:prstGeom prst="rect">
-            <a:avLst/>
-          </a:prstGeom>
-          <a:noFill/>
-          <a:ln/>
-        </p:spPr>
-        <p:txBody>
-          <a:bodyPr wrap="square" rtlCol="0" anchor="ctr"/>
-          <a:lstStyle/>
-          <a:p>
-            <a:pPr indent="0" marL="0">
-              <a:buNone/>
-            </a:pPr>
-            <a:r>
-              <a:rPr lang="en-US" sz="1800" b="1" dirty="0">
-                <a:solidFill>
-                  <a:srgbClr val="FFFFFF"/>
-                </a:solidFill>
-                <a:latin typeface="Calibri" pitchFamily="34" charset="0"/>
-                <a:ea typeface="Calibri" pitchFamily="34" charset="-122"/>
-                <a:cs typeface="Calibri" pitchFamily="34" charset="-120"/>
-              </a:rPr>
-              <a:t>Tides</a:t>
-            </a:r>
-            <a:endParaRPr lang="en-US" sz="1800" dirty="0"/>
-          </a:p>
-        </p:txBody>
-      </p:sp>
-      <p:sp>
-        <p:nvSpPr>
-          <p:cNvPr id="4" name="Text 2"/>
-          <p:cNvSpPr/>
-          <p:nvPr/>
-        </p:nvSpPr>
-        <p:spPr>
-          <a:xfrm>
-            <a:off x="731520" y="1097280"/>
-            <a:ext cx="7680960" cy="3200400"/>
-          </a:xfrm>
-          <a:prstGeom prst="rect">
-            <a:avLst/>
-          </a:prstGeom>
-          <a:noFill/>
-          <a:ln/>
-        </p:spPr>
-        <p:txBody>
-          <a:bodyPr wrap="square" rtlCol="0" anchor="ctr"/>
-          <a:lstStyle/>
-          <a:p>
-            <a:pPr indent="0" marL="0">
-              <a:buNone/>
-            </a:pPr>
-            <a:r>
-              <a:rPr lang="en-US" sz="1600" dirty="0">
-                <a:solidFill>
-                  <a:srgbClr val="363636"/>
-                </a:solidFill>
-                <a:latin typeface="Calibri" pitchFamily="34" charset="0"/>
-                <a:ea typeface="Calibri" pitchFamily="34" charset="-122"/>
-                <a:cs typeface="Calibri" pitchFamily="34" charset="-120"/>
-              </a:rPr>
-              <a:t>Content for: Tides</a:t>
-            </a:r>
-            <a:endParaRPr lang="en-US" sz="1600" dirty="0"/>
-          </a:p>
-          <a:p>
-            <a:pPr indent="0" marL="0">
-              <a:buNone/>
-            </a:pPr>
-            <a:endParaRPr lang="en-US" sz="1600" dirty="0"/>
-          </a:p>
-          <a:p>
-            <a:pPr indent="0" marL="0">
-              <a:buNone/>
-            </a:pPr>
-            <a:r>
-              <a:rPr lang="en-US" sz="1600" dirty="0">
-                <a:solidFill>
-                  <a:srgbClr val="363636"/>
-                </a:solidFill>
-                <a:latin typeface="Calibri" pitchFamily="34" charset="0"/>
-                <a:ea typeface="Calibri" pitchFamily="34" charset="-122"/>
-                <a:cs typeface="Calibri" pitchFamily="34" charset="-120"/>
-              </a:rPr>
-              <a:t>Key points will be covered in class.</a:t>
-            </a:r>
-            <a:endParaRPr lang="en-US" sz="1600" dirty="0"/>
-          </a:p>
-        </p:txBody>
-      </p:sp>
-      <p:sp>
-        <p:nvSpPr>
-          <p:cNvPr id="5" name="Text 3"/>
-          <p:cNvSpPr/>
-          <p:nvPr/>
-        </p:nvSpPr>
-        <p:spPr>
-          <a:xfrm>
-            <a:off x="7772400" y="4663440"/>
-            <a:ext cx="1097280" cy="365760"/>
-          </a:xfrm>
-          <a:prstGeom prst="rect">
-            <a:avLst/>
-          </a:prstGeom>
-          <a:noFill/>
-          <a:ln/>
-        </p:spPr>
-        <p:txBody>
-          <a:bodyPr wrap="square" rtlCol="0" anchor="ctr"/>
-          <a:lstStyle/>
-          <a:p>
-            <a:pPr algn="r" indent="0" marL="0">
-              <a:buNone/>
-            </a:pPr>
-            <a:r>
-              <a:rPr lang="en-US" sz="1000" dirty="0">
-                <a:solidFill>
-                  <a:srgbClr val="999999"/>
-                </a:solidFill>
-                <a:latin typeface="Calibri" pitchFamily="34" charset="0"/>
-                <a:ea typeface="Calibri" pitchFamily="34" charset="-122"/>
-                <a:cs typeface="Calibri" pitchFamily="34" charset="-120"/>
-              </a:rPr>
-              <a:t>6 / 6</a:t>
+              <a:t>mrzocchi.com</a:t>
             </a:r>
             <a:endParaRPr lang="en-US" sz="1000" dirty="0"/>
           </a:p>

--- a/static/ppts/G6_Sci_T5_Earth_Sun_Moon.pptx
+++ b/static/ppts/G6_Sci_T5_Earth_Sun_Moon.pptx
@@ -9,9 +9,10 @@
     <p:sldId id="257" r:id="rId3"/>
     <p:sldId id="258" r:id="rId4"/>
     <p:sldId id="259" r:id="rId5"/>
+    <p:sldId id="260" r:id="rId6"/>
   </p:sldIdLst>
   <p:notesMasterIdLst>
-    <p:notesMasterId r:id="rId6"/>
+    <p:notesMasterId r:id="rId7"/>
   </p:notesMasterIdLst>
   <p:sldSz cx="9144000" cy="5143500"/>
   <p:notesSz cx="5143500" cy="9144000"/>
@@ -811,6 +812,94 @@
 </p:notes>
 </file>
 
+<file path=ppt/notesSlides/notesSlide5.xml><?xml version="1.0" encoding="utf-8"?>
+<p:notes xmlns:a="http://schemas.openxmlformats.org/drawingml/2006/main" xmlns:r="http://schemas.openxmlformats.org/officeDocument/2006/relationships" xmlns:p="http://schemas.openxmlformats.org/presentationml/2006/main">
+  <p:cSld>
+    <p:spTree>
+      <p:nvGrpSpPr>
+        <p:cNvPr id="1" name=""/>
+        <p:cNvGrpSpPr/>
+        <p:nvPr/>
+      </p:nvGrpSpPr>
+      <p:grpSpPr>
+        <a:xfrm>
+          <a:off x="0" y="0"/>
+          <a:ext cx="0" cy="0"/>
+          <a:chOff x="0" y="0"/>
+          <a:chExt cx="0" cy="0"/>
+        </a:xfrm>
+      </p:grpSpPr>
+      <p:sp>
+        <p:nvSpPr>
+          <p:cNvPr id="2" name="Slide Image Placeholder 1"/>
+          <p:cNvSpPr>
+            <a:spLocks noGrp="1" noRot="1" noChangeAspect="1"/>
+          </p:cNvSpPr>
+          <p:nvPr>
+            <p:ph type="sldImg"/>
+          </p:nvPr>
+        </p:nvSpPr>
+        <p:spPr/>
+      </p:sp>
+      <p:sp>
+        <p:nvSpPr>
+          <p:cNvPr id="3" name="Notes Placeholder 2"/>
+          <p:cNvSpPr>
+            <a:spLocks noGrp="1"/>
+          </p:cNvSpPr>
+          <p:nvPr>
+            <p:ph type="body" idx="1"/>
+          </p:nvPr>
+        </p:nvSpPr>
+        <p:spPr/>
+        <p:txBody>
+          <a:bodyPr/>
+          <a:lstStyle/>
+          <a:p>
+            <a:r>
+              <a:rPr lang="en-US" dirty="0"/>
+              <a:t/>
+            </a:r>
+            <a:endParaRPr lang="en-US" dirty="0"/>
+          </a:p>
+        </p:txBody>
+      </p:sp>
+      <p:sp>
+        <p:nvSpPr>
+          <p:cNvPr id="4" name="Slide Number Placeholder 3"/>
+          <p:cNvSpPr>
+            <a:spLocks noGrp="1"/>
+          </p:cNvSpPr>
+          <p:nvPr>
+            <p:ph type="sldNum" sz="quarter" idx="10"/>
+          </p:nvPr>
+        </p:nvSpPr>
+        <p:spPr/>
+        <p:txBody>
+          <a:bodyPr/>
+          <a:lstStyle/>
+          <a:p>
+            <a:fld id="{F7021451-1387-4CA6-816F-3879F97B5CBC}" type="slidenum">
+              <a:rPr lang="en-US"/>
+              <a:t>5</a:t>
+            </a:fld>
+            <a:endParaRPr lang="en-US"/>
+          </a:p>
+        </p:txBody>
+      </p:sp>
+    </p:spTree>
+    <p:extLst>
+      <p:ext uri="{BB962C8B-B14F-4D97-AF65-F5344CB8AC3E}">
+        <p14:creationId xmlns:p14="http://schemas.microsoft.com/office/powerpoint/2010/main" val="1024086991"/>
+      </p:ext>
+    </p:extLst>
+  </p:cSld>
+  <p:clrMapOvr>
+    <a:masterClrMapping/>
+  </p:clrMapOvr>
+</p:notes>
+</file>
+
 <file path=ppt/slideLayouts/slideLayout1.xml><?xml version="1.0" encoding="utf-8"?>
 <p:sldLayout xmlns:a="http://schemas.openxmlformats.org/drawingml/2006/main" xmlns:r="http://schemas.openxmlformats.org/officeDocument/2006/relationships" xmlns:p="http://schemas.openxmlformats.org/presentationml/2006/main" preserve="1">
   <p:cSld name="DEFAULT">
@@ -1170,7 +1259,7 @@
         </p:nvSpPr>
         <p:spPr>
           <a:xfrm>
-            <a:off x="731520" y="1280160"/>
+            <a:off x="731520" y="1097280"/>
             <a:ext cx="7772400" cy="1371600"/>
           </a:xfrm>
           <a:prstGeom prst="rect">
@@ -1187,7 +1276,7 @@
               <a:buNone/>
             </a:pPr>
             <a:r>
-              <a:rPr lang="en-US" sz="3600" b="1" dirty="0">
+              <a:rPr lang="en-US" sz="4000" b="1" dirty="0">
                 <a:solidFill>
                   <a:srgbClr val="FFFFFF"/>
                 </a:solidFill>
@@ -1197,7 +1286,7 @@
               </a:rPr>
               <a:t>Earth, Sun &amp; Moon</a:t>
             </a:r>
-            <a:endParaRPr lang="en-US" sz="3600" dirty="0"/>
+            <a:endParaRPr lang="en-US" sz="4000" dirty="0"/>
           </a:p>
         </p:txBody>
       </p:sp>
@@ -1209,7 +1298,7 @@
         </p:nvSpPr>
         <p:spPr>
           <a:xfrm>
-            <a:off x="731520" y="2743200"/>
+            <a:off x="731520" y="2560320"/>
             <a:ext cx="7772400" cy="548640"/>
           </a:xfrm>
           <a:prstGeom prst="rect">
@@ -1228,13 +1317,13 @@
             <a:r>
               <a:rPr lang="en-US" sz="1600" dirty="0">
                 <a:solidFill>
-                  <a:srgbClr val="9B9690"/>
+                  <a:srgbClr val="E9C46A"/>
                 </a:solidFill>
                 <a:latin typeface="Calibri" pitchFamily="34" charset="0"/>
                 <a:ea typeface="Calibri" pitchFamily="34" charset="-122"/>
                 <a:cs typeface="Calibri" pitchFamily="34" charset="-120"/>
               </a:rPr>
-              <a:t>G6 Science · Space Science</a:t>
+              <a:t>Grade 6 Science · Mr Zocchi</a:t>
             </a:r>
             <a:endParaRPr lang="en-US" sz="1600" dirty="0"/>
           </a:p>
@@ -1242,14 +1331,36 @@
       </p:sp>
       <p:sp>
         <p:nvSpPr>
-          <p:cNvPr id="5" name="Text 3"/>
-          <p:cNvSpPr/>
-          <p:nvPr/>
-        </p:nvSpPr>
-        <p:spPr>
-          <a:xfrm>
-            <a:off x="731520" y="4389120"/>
-            <a:ext cx="7772400" cy="457200"/>
+          <p:cNvPr id="5" name="Shape 3"/>
+          <p:cNvSpPr/>
+          <p:nvPr/>
+        </p:nvSpPr>
+        <p:spPr>
+          <a:xfrm>
+            <a:off x="731520" y="3474720"/>
+            <a:ext cx="2011680" cy="411480"/>
+          </a:xfrm>
+          <a:prstGeom prst="roundRect">
+            <a:avLst>
+              <a:gd name="adj" fmla="val 17778"/>
+            </a:avLst>
+          </a:prstGeom>
+          <a:solidFill>
+            <a:srgbClr val="2A9D8F"/>
+          </a:solidFill>
+          <a:ln/>
+        </p:spPr>
+      </p:sp>
+      <p:sp>
+        <p:nvSpPr>
+          <p:cNvPr id="6" name="Text 4"/>
+          <p:cNvSpPr/>
+          <p:nvPr/>
+        </p:nvSpPr>
+        <p:spPr>
+          <a:xfrm>
+            <a:off x="731520" y="3474720"/>
+            <a:ext cx="2011680" cy="411480"/>
           </a:xfrm>
           <a:prstGeom prst="rect">
             <a:avLst/>
@@ -1261,21 +1372,21 @@
           <a:bodyPr wrap="square" rtlCol="0" anchor="ctr"/>
           <a:lstStyle/>
           <a:p>
-            <a:pPr indent="0" marL="0">
+            <a:pPr algn="ctr" indent="0" marL="0">
               <a:buNone/>
             </a:pPr>
             <a:r>
-              <a:rPr lang="en-US" sz="1000" dirty="0">
-                <a:solidFill>
-                  <a:srgbClr val="6B6660"/>
+              <a:rPr lang="en-US" sz="1200" b="1" dirty="0">
+                <a:solidFill>
+                  <a:srgbClr val="FFFFFF"/>
                 </a:solidFill>
                 <a:latin typeface="Calibri" pitchFamily="34" charset="0"/>
                 <a:ea typeface="Calibri" pitchFamily="34" charset="-122"/>
                 <a:cs typeface="Calibri" pitchFamily="34" charset="-120"/>
               </a:rPr>
-              <a:t>Mr Zocchi · mrzocchi.com</a:t>
-            </a:r>
-            <a:endParaRPr lang="en-US" sz="1000" dirty="0"/>
+              <a:t>Term 5 · Space Science</a:t>
+            </a:r>
+            <a:endParaRPr lang="en-US" sz="1200" dirty="0"/>
           </a:p>
         </p:txBody>
       </p:sp>
@@ -1293,7 +1404,7 @@
     <p:bg>
       <p:bgPr>
         <a:solidFill>
-          <a:srgbClr val="FFFFFF"/>
+          <a:srgbClr val="FAF8F5"/>
         </a:solidFill>
       </p:bgPr>
     </p:bg>
@@ -1339,8 +1450,8 @@
         </p:nvSpPr>
         <p:spPr>
           <a:xfrm>
-            <a:off x="548640" y="274320"/>
-            <a:ext cx="8046720" cy="640080"/>
+            <a:off x="7772400" y="4709160"/>
+            <a:ext cx="1097280" cy="320040"/>
           </a:xfrm>
           <a:prstGeom prst="rect">
             <a:avLst/>
@@ -1349,14 +1460,105 @@
           <a:ln/>
         </p:spPr>
         <p:txBody>
-          <a:bodyPr wrap="square" lIns="0" tIns="0" rIns="0" bIns="0" rtlCol="0" anchor="ctr"/>
+          <a:bodyPr wrap="square" rtlCol="0" anchor="ctr"/>
+          <a:lstStyle/>
+          <a:p>
+            <a:pPr algn="r" indent="0" marL="0">
+              <a:buNone/>
+            </a:pPr>
+            <a:r>
+              <a:rPr lang="en-US" sz="900" dirty="0">
+                <a:solidFill>
+                  <a:srgbClr val="6B6660"/>
+                </a:solidFill>
+                <a:latin typeface="Calibri" pitchFamily="34" charset="0"/>
+                <a:ea typeface="Calibri" pitchFamily="34" charset="-122"/>
+                <a:cs typeface="Calibri" pitchFamily="34" charset="-120"/>
+              </a:rPr>
+              <a:t>2 / 5</a:t>
+            </a:r>
+            <a:endParaRPr lang="en-US" sz="900" dirty="0"/>
+          </a:p>
+        </p:txBody>
+      </p:sp>
+      <p:sp>
+        <p:nvSpPr>
+          <p:cNvPr id="4" name="Shape 2"/>
+          <p:cNvSpPr/>
+          <p:nvPr/>
+        </p:nvSpPr>
+        <p:spPr>
+          <a:xfrm>
+            <a:off x="1371600" y="914400"/>
+            <a:ext cx="6400800" cy="3200400"/>
+          </a:xfrm>
+          <a:prstGeom prst="rect">
+            <a:avLst/>
+          </a:prstGeom>
+          <a:solidFill>
+            <a:srgbClr val="FFFFFF"/>
+          </a:solidFill>
+          <a:ln w="12700">
+            <a:solidFill>
+              <a:srgbClr val="E5E2DC"/>
+            </a:solidFill>
+            <a:prstDash val="solid"/>
+          </a:ln>
+          <a:effectLst>
+            <a:outerShdw sx="100000" sy="100000" kx="0" ky="0" algn="bl" rotWithShape="0" blurRad="50800" dist="25400" dir="8100000">
+              <a:srgbClr val="000000">
+                <a:alpha val="10000"/>
+              </a:srgbClr>
+            </a:outerShdw>
+          </a:effectLst>
+        </p:spPr>
+      </p:sp>
+      <p:sp>
+        <p:nvSpPr>
+          <p:cNvPr id="5" name="Shape 3"/>
+          <p:cNvSpPr/>
+          <p:nvPr/>
+        </p:nvSpPr>
+        <p:spPr>
+          <a:xfrm>
+            <a:off x="1371600" y="914400"/>
+            <a:ext cx="91440" cy="3200400"/>
+          </a:xfrm>
+          <a:prstGeom prst="rect">
+            <a:avLst/>
+          </a:prstGeom>
+          <a:solidFill>
+            <a:srgbClr val="2A9D8F"/>
+          </a:solidFill>
+          <a:ln/>
+        </p:spPr>
+      </p:sp>
+      <p:sp>
+        <p:nvSpPr>
+          <p:cNvPr id="6" name="Text 4"/>
+          <p:cNvSpPr/>
+          <p:nvPr/>
+        </p:nvSpPr>
+        <p:spPr>
+          <a:xfrm>
+            <a:off x="1828800" y="1097280"/>
+            <a:ext cx="5669280" cy="640080"/>
+          </a:xfrm>
+          <a:prstGeom prst="rect">
+            <a:avLst/>
+          </a:prstGeom>
+          <a:noFill/>
+          <a:ln/>
+        </p:spPr>
+        <p:txBody>
+          <a:bodyPr wrap="square" rtlCol="0" anchor="ctr"/>
           <a:lstStyle/>
           <a:p>
             <a:pPr indent="0" marL="0">
               <a:buNone/>
             </a:pPr>
             <a:r>
-              <a:rPr lang="en-US" sz="2600" b="1" dirty="0">
+              <a:rPr lang="en-US" sz="2400" b="1" dirty="0">
                 <a:solidFill>
                   <a:srgbClr val="1B2A4A"/>
                 </a:solidFill>
@@ -1364,22 +1566,22 @@
                 <a:ea typeface="Georgia" pitchFamily="34" charset="-122"/>
                 <a:cs typeface="Georgia" pitchFamily="34" charset="-120"/>
               </a:rPr>
-              <a:t>The Earth-Sun-Moon System</a:t>
-            </a:r>
-            <a:endParaRPr lang="en-US" sz="2600" dirty="0"/>
-          </a:p>
-        </p:txBody>
-      </p:sp>
-      <p:sp>
-        <p:nvSpPr>
-          <p:cNvPr id="4" name="Text 2"/>
-          <p:cNvSpPr/>
-          <p:nvPr/>
-        </p:nvSpPr>
-        <p:spPr>
-          <a:xfrm>
-            <a:off x="548640" y="1097280"/>
-            <a:ext cx="8046720" cy="3474720"/>
+              <a:t>Our Place in Space</a:t>
+            </a:r>
+            <a:endParaRPr lang="en-US" sz="2400" dirty="0"/>
+          </a:p>
+        </p:txBody>
+      </p:sp>
+      <p:sp>
+        <p:nvSpPr>
+          <p:cNvPr id="7" name="Text 5"/>
+          <p:cNvSpPr/>
+          <p:nvPr/>
+        </p:nvSpPr>
+        <p:spPr>
+          <a:xfrm>
+            <a:off x="1828800" y="1828800"/>
+            <a:ext cx="5669280" cy="2011680"/>
           </a:xfrm>
           <a:prstGeom prst="rect">
             <a:avLst/>
@@ -1391,12 +1593,11 @@
           <a:bodyPr wrap="square" rtlCol="0" anchor="t"/>
           <a:lstStyle/>
           <a:p>
-            <a:pPr marL="342900" indent="-342900">
-              <a:spcAft>
-                <a:spcPts val="800"/>
-              </a:spcAft>
-              <a:buSzPct val="100000"/>
-              <a:buChar char="•"/>
+            <a:pPr indent="0" marL="0">
+              <a:lnSpc>
+                <a:spcPct val="130000"/>
+              </a:lnSpc>
+              <a:buNone/>
             </a:pPr>
             <a:r>
               <a:rPr lang="en-US" sz="1500" dirty="0">
@@ -1407,129 +1608,9 @@
                 <a:ea typeface="Calibri" pitchFamily="34" charset="-122"/>
                 <a:cs typeface="Calibri" pitchFamily="34" charset="-120"/>
               </a:rPr>
-              <a:t>Earth orbits the Sun (takes 365.25 days = 1 year)</a:t>
+              <a:t>Earth orbits the Sun (one orbit = one year = 365.25 days). The Moon orbits Earth (one orbit = ~27.3 days). The Sun is a star — a massive ball of hydrogen and helium undergoing nuclear fusion. It provides the light and heat that makes life possible on Earth.</a:t>
             </a:r>
             <a:endParaRPr lang="en-US" sz="1500" dirty="0"/>
-          </a:p>
-          <a:p>
-            <a:pPr marL="342900" indent="-342900">
-              <a:spcAft>
-                <a:spcPts val="800"/>
-              </a:spcAft>
-              <a:buSzPct val="100000"/>
-              <a:buChar char="•"/>
-            </a:pPr>
-            <a:r>
-              <a:rPr lang="en-US" sz="1500" dirty="0">
-                <a:solidFill>
-                  <a:srgbClr val="3D3A36"/>
-                </a:solidFill>
-                <a:latin typeface="Calibri" pitchFamily="34" charset="0"/>
-                <a:ea typeface="Calibri" pitchFamily="34" charset="-122"/>
-                <a:cs typeface="Calibri" pitchFamily="34" charset="-120"/>
-              </a:rPr>
-              <a:t>The Moon orbits Earth (takes ~28 days = 1 lunar month)</a:t>
-            </a:r>
-            <a:endParaRPr lang="en-US" sz="1500" dirty="0"/>
-          </a:p>
-          <a:p>
-            <a:pPr marL="342900" indent="-342900">
-              <a:spcAft>
-                <a:spcPts val="800"/>
-              </a:spcAft>
-              <a:buSzPct val="100000"/>
-              <a:buChar char="•"/>
-            </a:pPr>
-            <a:r>
-              <a:rPr lang="en-US" sz="1500" dirty="0">
-                <a:solidFill>
-                  <a:srgbClr val="3D3A36"/>
-                </a:solidFill>
-                <a:latin typeface="Calibri" pitchFamily="34" charset="0"/>
-                <a:ea typeface="Calibri" pitchFamily="34" charset="-122"/>
-                <a:cs typeface="Calibri" pitchFamily="34" charset="-120"/>
-              </a:rPr>
-              <a:t>Earth spins on its axis (takes 24 hours = 1 day)</a:t>
-            </a:r>
-            <a:endParaRPr lang="en-US" sz="1500" dirty="0"/>
-          </a:p>
-          <a:p>
-            <a:pPr marL="342900" indent="-342900">
-              <a:spcAft>
-                <a:spcPts val="800"/>
-              </a:spcAft>
-              <a:buSzPct val="100000"/>
-              <a:buChar char="•"/>
-            </a:pPr>
-            <a:r>
-              <a:rPr lang="en-US" sz="1500" dirty="0">
-                <a:solidFill>
-                  <a:srgbClr val="3D3A36"/>
-                </a:solidFill>
-                <a:latin typeface="Calibri" pitchFamily="34" charset="0"/>
-                <a:ea typeface="Calibri" pitchFamily="34" charset="-122"/>
-                <a:cs typeface="Calibri" pitchFamily="34" charset="-120"/>
-              </a:rPr>
-              <a:t>The Sun is a star; the Moon is a natural satellite</a:t>
-            </a:r>
-            <a:endParaRPr lang="en-US" sz="1500" dirty="0"/>
-          </a:p>
-          <a:p>
-            <a:pPr marL="342900" indent="-342900">
-              <a:spcAft>
-                <a:spcPts val="800"/>
-              </a:spcAft>
-              <a:buSzPct val="100000"/>
-              <a:buChar char="•"/>
-            </a:pPr>
-            <a:r>
-              <a:rPr lang="en-US" sz="1500" dirty="0">
-                <a:solidFill>
-                  <a:srgbClr val="3D3A36"/>
-                </a:solidFill>
-                <a:latin typeface="Calibri" pitchFamily="34" charset="0"/>
-                <a:ea typeface="Calibri" pitchFamily="34" charset="-122"/>
-                <a:cs typeface="Calibri" pitchFamily="34" charset="-120"/>
-              </a:rPr>
-              <a:t>The Moon does NOT produce its own light — it reflects sunlight</a:t>
-            </a:r>
-            <a:endParaRPr lang="en-US" sz="1500" dirty="0"/>
-          </a:p>
-        </p:txBody>
-      </p:sp>
-      <p:sp>
-        <p:nvSpPr>
-          <p:cNvPr id="5" name="Text 3"/>
-          <p:cNvSpPr/>
-          <p:nvPr/>
-        </p:nvSpPr>
-        <p:spPr>
-          <a:xfrm>
-            <a:off x="548640" y="4800600"/>
-            <a:ext cx="3657600" cy="274320"/>
-          </a:xfrm>
-          <a:prstGeom prst="rect">
-            <a:avLst/>
-          </a:prstGeom>
-          <a:noFill/>
-          <a:ln/>
-        </p:spPr>
-        <p:txBody>
-          <a:bodyPr wrap="square" rtlCol="0" anchor="ctr"/>
-          <a:lstStyle/>
-          <a:p>
-            <a:pPr indent="0" marL="0">
-              <a:buNone/>
-            </a:pPr>
-            <a:r>
-              <a:rPr lang="en-US" sz="800" dirty="0">
-                <a:solidFill>
-                  <a:srgbClr val="9B9690"/>
-                </a:solidFill>
-              </a:rPr>
-              <a:t>mrzocchi.com</a:t>
-            </a:r>
-            <a:endParaRPr lang="en-US" sz="800" dirty="0"/>
           </a:p>
         </p:txBody>
       </p:sp>
@@ -1547,7 +1628,7 @@
     <p:bg>
       <p:bgPr>
         <a:solidFill>
-          <a:srgbClr val="FFFFFF"/>
+          <a:srgbClr val="FAF8F5"/>
         </a:solidFill>
       </p:bgPr>
     </p:bg>
@@ -1593,8 +1674,8 @@
         </p:nvSpPr>
         <p:spPr>
           <a:xfrm>
-            <a:off x="548640" y="274320"/>
-            <a:ext cx="8046720" cy="640080"/>
+            <a:off x="7772400" y="4709160"/>
+            <a:ext cx="1097280" cy="320040"/>
           </a:xfrm>
           <a:prstGeom prst="rect">
             <a:avLst/>
@@ -1603,7 +1684,46 @@
           <a:ln/>
         </p:spPr>
         <p:txBody>
-          <a:bodyPr wrap="square" lIns="0" tIns="0" rIns="0" bIns="0" rtlCol="0" anchor="ctr"/>
+          <a:bodyPr wrap="square" rtlCol="0" anchor="ctr"/>
+          <a:lstStyle/>
+          <a:p>
+            <a:pPr algn="r" indent="0" marL="0">
+              <a:buNone/>
+            </a:pPr>
+            <a:r>
+              <a:rPr lang="en-US" sz="900" dirty="0">
+                <a:solidFill>
+                  <a:srgbClr val="6B6660"/>
+                </a:solidFill>
+                <a:latin typeface="Calibri" pitchFamily="34" charset="0"/>
+                <a:ea typeface="Calibri" pitchFamily="34" charset="-122"/>
+                <a:cs typeface="Calibri" pitchFamily="34" charset="-120"/>
+              </a:rPr>
+              <a:t>3 / 5</a:t>
+            </a:r>
+            <a:endParaRPr lang="en-US" sz="900" dirty="0"/>
+          </a:p>
+        </p:txBody>
+      </p:sp>
+      <p:sp>
+        <p:nvSpPr>
+          <p:cNvPr id="4" name="Text 2"/>
+          <p:cNvSpPr/>
+          <p:nvPr/>
+        </p:nvSpPr>
+        <p:spPr>
+          <a:xfrm>
+            <a:off x="457200" y="274320"/>
+            <a:ext cx="8229600" cy="640080"/>
+          </a:xfrm>
+          <a:prstGeom prst="rect">
+            <a:avLst/>
+          </a:prstGeom>
+          <a:noFill/>
+          <a:ln/>
+        </p:spPr>
+        <p:txBody>
+          <a:bodyPr wrap="square" rtlCol="0" anchor="ctr"/>
           <a:lstStyle/>
           <a:p>
             <a:pPr indent="0" marL="0">
@@ -1618,7 +1738,7 @@
                 <a:ea typeface="Georgia" pitchFamily="34" charset="-122"/>
                 <a:cs typeface="Georgia" pitchFamily="34" charset="-120"/>
               </a:rPr>
-              <a:t>The Moon</a:t>
+              <a:t>Earth's Orbit</a:t>
             </a:r>
             <a:endParaRPr lang="en-US" sz="2600" dirty="0"/>
           </a:p>
@@ -1626,14 +1746,14 @@
       </p:sp>
       <p:sp>
         <p:nvSpPr>
-          <p:cNvPr id="4" name="Text 2"/>
-          <p:cNvSpPr/>
-          <p:nvPr/>
-        </p:nvSpPr>
-        <p:spPr>
-          <a:xfrm>
-            <a:off x="548640" y="1097280"/>
-            <a:ext cx="8046720" cy="3474720"/>
+          <p:cNvPr id="5" name="Text 3"/>
+          <p:cNvSpPr/>
+          <p:nvPr/>
+        </p:nvSpPr>
+        <p:spPr>
+          <a:xfrm>
+            <a:off x="457200" y="1188720"/>
+            <a:ext cx="3840480" cy="3474720"/>
           </a:xfrm>
           <a:prstGeom prst="rect">
             <a:avLst/>
@@ -1647,13 +1767,13 @@
           <a:p>
             <a:pPr marL="342900" indent="-342900">
               <a:spcAft>
-                <a:spcPts val="800"/>
+                <a:spcPts val="600"/>
               </a:spcAft>
               <a:buSzPct val="100000"/>
               <a:buChar char="•"/>
             </a:pPr>
             <a:r>
-              <a:rPr lang="en-US" sz="1500" dirty="0">
+              <a:rPr lang="en-US" sz="1400" dirty="0">
                 <a:solidFill>
                   <a:srgbClr val="3D3A36"/>
                 </a:solidFill>
@@ -1661,20 +1781,20 @@
                 <a:ea typeface="Calibri" pitchFamily="34" charset="-122"/>
                 <a:cs typeface="Calibri" pitchFamily="34" charset="-120"/>
               </a:rPr>
-              <a:t>Diameter about 1/4 of Earth's</a:t>
-            </a:r>
-            <a:endParaRPr lang="en-US" sz="1500" dirty="0"/>
+              <a:t>Earth orbits the Sun in an elliptical (slightly oval) path</a:t>
+            </a:r>
+            <a:endParaRPr lang="en-US" sz="1400" dirty="0"/>
           </a:p>
           <a:p>
             <a:pPr marL="342900" indent="-342900">
               <a:spcAft>
-                <a:spcPts val="800"/>
+                <a:spcPts val="600"/>
               </a:spcAft>
               <a:buSzPct val="100000"/>
               <a:buChar char="•"/>
             </a:pPr>
             <a:r>
-              <a:rPr lang="en-US" sz="1500" dirty="0">
+              <a:rPr lang="en-US" sz="1400" dirty="0">
                 <a:solidFill>
                   <a:srgbClr val="3D3A36"/>
                 </a:solidFill>
@@ -1682,20 +1802,20 @@
                 <a:ea typeface="Calibri" pitchFamily="34" charset="-122"/>
                 <a:cs typeface="Calibri" pitchFamily="34" charset="-120"/>
               </a:rPr>
-              <a:t>No atmosphere — no weather, no sound</a:t>
-            </a:r>
-            <a:endParaRPr lang="en-US" sz="1500" dirty="0"/>
+              <a:t>Distance: ~150 million km from the Sun</a:t>
+            </a:r>
+            <a:endParaRPr lang="en-US" sz="1400" dirty="0"/>
           </a:p>
           <a:p>
             <a:pPr marL="342900" indent="-342900">
               <a:spcAft>
-                <a:spcPts val="800"/>
+                <a:spcPts val="600"/>
               </a:spcAft>
               <a:buSzPct val="100000"/>
               <a:buChar char="•"/>
             </a:pPr>
             <a:r>
-              <a:rPr lang="en-US" sz="1500" dirty="0">
+              <a:rPr lang="en-US" sz="1400" dirty="0">
                 <a:solidFill>
                   <a:srgbClr val="3D3A36"/>
                 </a:solidFill>
@@ -1703,20 +1823,20 @@
                 <a:ea typeface="Calibri" pitchFamily="34" charset="-122"/>
                 <a:cs typeface="Calibri" pitchFamily="34" charset="-120"/>
               </a:rPr>
-              <a:t>Gravity is 1/6 of Earth's</a:t>
-            </a:r>
-            <a:endParaRPr lang="en-US" sz="1500" dirty="0"/>
+              <a:t>One orbit = 365.25 days (the extra 0.25 gives us a leap year every 4 years)</a:t>
+            </a:r>
+            <a:endParaRPr lang="en-US" sz="1400" dirty="0"/>
           </a:p>
           <a:p>
             <a:pPr marL="342900" indent="-342900">
               <a:spcAft>
-                <a:spcPts val="800"/>
+                <a:spcPts val="600"/>
               </a:spcAft>
               <a:buSzPct val="100000"/>
               <a:buChar char="•"/>
             </a:pPr>
             <a:r>
-              <a:rPr lang="en-US" sz="1500" dirty="0">
+              <a:rPr lang="en-US" sz="1400" dirty="0">
                 <a:solidFill>
                   <a:srgbClr val="3D3A36"/>
                 </a:solidFill>
@@ -1724,20 +1844,20 @@
                 <a:ea typeface="Calibri" pitchFamily="34" charset="-122"/>
                 <a:cs typeface="Calibri" pitchFamily="34" charset="-120"/>
               </a:rPr>
-              <a:t>We see phases because of how sunlight hits the Moon as it orbits</a:t>
-            </a:r>
-            <a:endParaRPr lang="en-US" sz="1500" dirty="0"/>
+              <a:t>Earth also rotates on its axis once every 24 hours</a:t>
+            </a:r>
+            <a:endParaRPr lang="en-US" sz="1400" dirty="0"/>
           </a:p>
           <a:p>
             <a:pPr marL="342900" indent="-342900">
               <a:spcAft>
-                <a:spcPts val="800"/>
+                <a:spcPts val="600"/>
               </a:spcAft>
               <a:buSzPct val="100000"/>
               <a:buChar char="•"/>
             </a:pPr>
             <a:r>
-              <a:rPr lang="en-US" sz="1500" dirty="0">
+              <a:rPr lang="en-US" sz="1400" dirty="0">
                 <a:solidFill>
                   <a:srgbClr val="3D3A36"/>
                 </a:solidFill>
@@ -1745,22 +1865,74 @@
                 <a:ea typeface="Calibri" pitchFamily="34" charset="-122"/>
                 <a:cs typeface="Calibri" pitchFamily="34" charset="-120"/>
               </a:rPr>
-              <a:t>New Moon → Crescent → Quarter → Gibbous → Full Moon (and back)</a:t>
-            </a:r>
-            <a:endParaRPr lang="en-US" sz="1500" dirty="0"/>
-          </a:p>
-        </p:txBody>
-      </p:sp>
-      <p:sp>
-        <p:nvSpPr>
-          <p:cNvPr id="5" name="Text 3"/>
-          <p:cNvSpPr/>
-          <p:nvPr/>
-        </p:nvSpPr>
-        <p:spPr>
-          <a:xfrm>
-            <a:off x="548640" y="4800600"/>
-            <a:ext cx="3657600" cy="274320"/>
+              <a:t>The axis is tilted at 23.5° — this causes the seasons</a:t>
+            </a:r>
+            <a:endParaRPr lang="en-US" sz="1400" dirty="0"/>
+          </a:p>
+        </p:txBody>
+      </p:sp>
+      <p:sp>
+        <p:nvSpPr>
+          <p:cNvPr id="6" name="Shape 4"/>
+          <p:cNvSpPr/>
+          <p:nvPr/>
+        </p:nvSpPr>
+        <p:spPr>
+          <a:xfrm>
+            <a:off x="4846320" y="1188720"/>
+            <a:ext cx="3840480" cy="3474720"/>
+          </a:xfrm>
+          <a:prstGeom prst="rect">
+            <a:avLst/>
+          </a:prstGeom>
+          <a:solidFill>
+            <a:srgbClr val="FFFFFF"/>
+          </a:solidFill>
+          <a:ln w="12700">
+            <a:solidFill>
+              <a:srgbClr val="E5E2DC"/>
+            </a:solidFill>
+            <a:prstDash val="solid"/>
+          </a:ln>
+          <a:effectLst>
+            <a:outerShdw sx="100000" sy="100000" kx="0" ky="0" algn="bl" rotWithShape="0" blurRad="50800" dist="25400" dir="8100000">
+              <a:srgbClr val="000000">
+                <a:alpha val="10000"/>
+              </a:srgbClr>
+            </a:outerShdw>
+          </a:effectLst>
+        </p:spPr>
+      </p:sp>
+      <p:sp>
+        <p:nvSpPr>
+          <p:cNvPr id="7" name="Shape 5"/>
+          <p:cNvSpPr/>
+          <p:nvPr/>
+        </p:nvSpPr>
+        <p:spPr>
+          <a:xfrm>
+            <a:off x="4846320" y="1188720"/>
+            <a:ext cx="3840480" cy="54864"/>
+          </a:xfrm>
+          <a:prstGeom prst="rect">
+            <a:avLst/>
+          </a:prstGeom>
+          <a:solidFill>
+            <a:srgbClr val="2A9D8F"/>
+          </a:solidFill>
+          <a:ln/>
+        </p:spPr>
+      </p:sp>
+      <p:sp>
+        <p:nvSpPr>
+          <p:cNvPr id="8" name="Text 6"/>
+          <p:cNvSpPr/>
+          <p:nvPr/>
+        </p:nvSpPr>
+        <p:spPr>
+          <a:xfrm>
+            <a:off x="5120640" y="1371600"/>
+            <a:ext cx="3291840" cy="3108960"/>
           </a:xfrm>
           <a:prstGeom prst="rect">
             <a:avLst/>
@@ -1769,21 +1941,136 @@
           <a:ln/>
         </p:spPr>
         <p:txBody>
-          <a:bodyPr wrap="square" rtlCol="0" anchor="ctr"/>
+          <a:bodyPr wrap="square" rtlCol="0" anchor="t"/>
           <a:lstStyle/>
           <a:p>
             <a:pPr indent="0" marL="0">
+              <a:spcAft>
+                <a:spcPts val="400"/>
+              </a:spcAft>
               <a:buNone/>
             </a:pPr>
             <a:r>
-              <a:rPr lang="en-US" sz="800" dirty="0">
-                <a:solidFill>
-                  <a:srgbClr val="9B9690"/>
-                </a:solidFill>
-              </a:rPr>
-              <a:t>mrzocchi.com</a:t>
-            </a:r>
-            <a:endParaRPr lang="en-US" sz="800" dirty="0"/>
+              <a:rPr lang="en-US" sz="1600" b="1" dirty="0">
+                <a:solidFill>
+                  <a:srgbClr val="1B2A4A"/>
+                </a:solidFill>
+                <a:latin typeface="Calibri" pitchFamily="34" charset="0"/>
+                <a:ea typeface="Calibri" pitchFamily="34" charset="-122"/>
+                <a:cs typeface="Calibri" pitchFamily="34" charset="-120"/>
+              </a:rPr>
+              <a:t>The Moon</a:t>
+            </a:r>
+            <a:endParaRPr lang="en-US" sz="1600" dirty="0"/>
+          </a:p>
+          <a:p>
+            <a:pPr indent="0" marL="0">
+              <a:spcAft>
+                <a:spcPts val="400"/>
+              </a:spcAft>
+              <a:buNone/>
+            </a:pPr>
+            <a:endParaRPr lang="en-US" sz="1600" dirty="0"/>
+          </a:p>
+          <a:p>
+            <a:pPr indent="0" marL="0">
+              <a:spcAft>
+                <a:spcPts val="400"/>
+              </a:spcAft>
+              <a:buNone/>
+            </a:pPr>
+            <a:r>
+              <a:rPr lang="en-US" sz="1300" dirty="0">
+                <a:solidFill>
+                  <a:srgbClr val="3D3A36"/>
+                </a:solidFill>
+                <a:latin typeface="Calibri" pitchFamily="34" charset="0"/>
+                <a:ea typeface="Calibri" pitchFamily="34" charset="-122"/>
+                <a:cs typeface="Calibri" pitchFamily="34" charset="-120"/>
+              </a:rPr>
+              <a:t>The Moon is Earth's only natural satellite</a:t>
+            </a:r>
+            <a:endParaRPr lang="en-US" sz="1600" dirty="0"/>
+          </a:p>
+          <a:p>
+            <a:pPr indent="0" marL="0">
+              <a:spcAft>
+                <a:spcPts val="400"/>
+              </a:spcAft>
+              <a:buNone/>
+            </a:pPr>
+            <a:r>
+              <a:rPr lang="en-US" sz="1300" dirty="0">
+                <a:solidFill>
+                  <a:srgbClr val="3D3A36"/>
+                </a:solidFill>
+                <a:latin typeface="Calibri" pitchFamily="34" charset="0"/>
+                <a:ea typeface="Calibri" pitchFamily="34" charset="-122"/>
+                <a:cs typeface="Calibri" pitchFamily="34" charset="-120"/>
+              </a:rPr>
+              <a:t>Diameter: ~3,474 km (about ¼ of Earth's)</a:t>
+            </a:r>
+            <a:endParaRPr lang="en-US" sz="1600" dirty="0"/>
+          </a:p>
+          <a:p>
+            <a:pPr indent="0" marL="0">
+              <a:spcAft>
+                <a:spcPts val="400"/>
+              </a:spcAft>
+              <a:buNone/>
+            </a:pPr>
+            <a:r>
+              <a:rPr lang="en-US" sz="1300" dirty="0">
+                <a:solidFill>
+                  <a:srgbClr val="3D3A36"/>
+                </a:solidFill>
+                <a:latin typeface="Calibri" pitchFamily="34" charset="0"/>
+                <a:ea typeface="Calibri" pitchFamily="34" charset="-122"/>
+                <a:cs typeface="Calibri" pitchFamily="34" charset="-120"/>
+              </a:rPr>
+              <a:t>No atmosphere, no weather, no liquid water</a:t>
+            </a:r>
+            <a:endParaRPr lang="en-US" sz="1600" dirty="0"/>
+          </a:p>
+          <a:p>
+            <a:pPr indent="0" marL="0">
+              <a:spcAft>
+                <a:spcPts val="400"/>
+              </a:spcAft>
+              <a:buNone/>
+            </a:pPr>
+            <a:r>
+              <a:rPr lang="en-US" sz="1300" dirty="0">
+                <a:solidFill>
+                  <a:srgbClr val="3D3A36"/>
+                </a:solidFill>
+                <a:latin typeface="Calibri" pitchFamily="34" charset="0"/>
+                <a:ea typeface="Calibri" pitchFamily="34" charset="-122"/>
+                <a:cs typeface="Calibri" pitchFamily="34" charset="-120"/>
+              </a:rPr>
+              <a:t>Surface: craters from asteroid impacts, 'seas' (dark flat areas of solidified lava)</a:t>
+            </a:r>
+            <a:endParaRPr lang="en-US" sz="1600" dirty="0"/>
+          </a:p>
+          <a:p>
+            <a:pPr indent="0" marL="0">
+              <a:spcAft>
+                <a:spcPts val="400"/>
+              </a:spcAft>
+              <a:buNone/>
+            </a:pPr>
+            <a:r>
+              <a:rPr lang="en-US" sz="1300" dirty="0">
+                <a:solidFill>
+                  <a:srgbClr val="3D3A36"/>
+                </a:solidFill>
+                <a:latin typeface="Calibri" pitchFamily="34" charset="0"/>
+                <a:ea typeface="Calibri" pitchFamily="34" charset="-122"/>
+                <a:cs typeface="Calibri" pitchFamily="34" charset="-120"/>
+              </a:rPr>
+              <a:t>The Moon's gravity causes tides on Earth</a:t>
+            </a:r>
+            <a:endParaRPr lang="en-US" sz="1600" dirty="0"/>
           </a:p>
         </p:txBody>
       </p:sp>
@@ -1798,6 +2085,656 @@
 <file path=ppt/slides/slide4.xml><?xml version="1.0" encoding="utf-8"?>
 <p:sld xmlns:a="http://schemas.openxmlformats.org/drawingml/2006/main" xmlns:r="http://schemas.openxmlformats.org/officeDocument/2006/relationships" xmlns:p="http://schemas.openxmlformats.org/presentationml/2006/main">
   <p:cSld name="Slide 4">
+    <p:bg>
+      <p:bgPr>
+        <a:solidFill>
+          <a:srgbClr val="FAF8F5"/>
+        </a:solidFill>
+      </p:bgPr>
+    </p:bg>
+    <p:spTree>
+      <p:nvGrpSpPr>
+        <p:cNvPr id="1" name=""/>
+        <p:cNvGrpSpPr/>
+        <p:nvPr/>
+      </p:nvGrpSpPr>
+      <p:grpSpPr>
+        <a:xfrm>
+          <a:off x="0" y="0"/>
+          <a:ext cx="0" cy="0"/>
+          <a:chOff x="0" y="0"/>
+          <a:chExt cx="0" cy="0"/>
+        </a:xfrm>
+      </p:grpSpPr>
+      <p:sp>
+        <p:nvSpPr>
+          <p:cNvPr id="2" name="Shape 0"/>
+          <p:cNvSpPr/>
+          <p:nvPr/>
+        </p:nvSpPr>
+        <p:spPr>
+          <a:xfrm>
+            <a:off x="0" y="0"/>
+            <a:ext cx="9144000" cy="54864"/>
+          </a:xfrm>
+          <a:prstGeom prst="rect">
+            <a:avLst/>
+          </a:prstGeom>
+          <a:solidFill>
+            <a:srgbClr val="2A9D8F"/>
+          </a:solidFill>
+          <a:ln/>
+        </p:spPr>
+      </p:sp>
+      <p:sp>
+        <p:nvSpPr>
+          <p:cNvPr id="3" name="Text 1"/>
+          <p:cNvSpPr/>
+          <p:nvPr/>
+        </p:nvSpPr>
+        <p:spPr>
+          <a:xfrm>
+            <a:off x="7772400" y="4709160"/>
+            <a:ext cx="1097280" cy="320040"/>
+          </a:xfrm>
+          <a:prstGeom prst="rect">
+            <a:avLst/>
+          </a:prstGeom>
+          <a:noFill/>
+          <a:ln/>
+        </p:spPr>
+        <p:txBody>
+          <a:bodyPr wrap="square" rtlCol="0" anchor="ctr"/>
+          <a:lstStyle/>
+          <a:p>
+            <a:pPr algn="r" indent="0" marL="0">
+              <a:buNone/>
+            </a:pPr>
+            <a:r>
+              <a:rPr lang="en-US" sz="900" dirty="0">
+                <a:solidFill>
+                  <a:srgbClr val="6B6660"/>
+                </a:solidFill>
+                <a:latin typeface="Calibri" pitchFamily="34" charset="0"/>
+                <a:ea typeface="Calibri" pitchFamily="34" charset="-122"/>
+                <a:cs typeface="Calibri" pitchFamily="34" charset="-120"/>
+              </a:rPr>
+              <a:t>4 / 5</a:t>
+            </a:r>
+            <a:endParaRPr lang="en-US" sz="900" dirty="0"/>
+          </a:p>
+        </p:txBody>
+      </p:sp>
+      <p:sp>
+        <p:nvSpPr>
+          <p:cNvPr id="4" name="Text 2"/>
+          <p:cNvSpPr/>
+          <p:nvPr/>
+        </p:nvSpPr>
+        <p:spPr>
+          <a:xfrm>
+            <a:off x="457200" y="274320"/>
+            <a:ext cx="8229600" cy="640080"/>
+          </a:xfrm>
+          <a:prstGeom prst="rect">
+            <a:avLst/>
+          </a:prstGeom>
+          <a:noFill/>
+          <a:ln/>
+        </p:spPr>
+        <p:txBody>
+          <a:bodyPr wrap="square" rtlCol="0" anchor="ctr"/>
+          <a:lstStyle/>
+          <a:p>
+            <a:pPr indent="0" marL="0">
+              <a:buNone/>
+            </a:pPr>
+            <a:r>
+              <a:rPr lang="en-US" sz="2600" b="1" dirty="0">
+                <a:solidFill>
+                  <a:srgbClr val="1B2A4A"/>
+                </a:solidFill>
+                <a:latin typeface="Georgia" pitchFamily="34" charset="0"/>
+                <a:ea typeface="Georgia" pitchFamily="34" charset="-122"/>
+                <a:cs typeface="Georgia" pitchFamily="34" charset="-120"/>
+              </a:rPr>
+              <a:t>Moon Phases</a:t>
+            </a:r>
+            <a:endParaRPr lang="en-US" sz="2600" dirty="0"/>
+          </a:p>
+        </p:txBody>
+      </p:sp>
+      <p:sp>
+        <p:nvSpPr>
+          <p:cNvPr id="5" name="Shape 3"/>
+          <p:cNvSpPr/>
+          <p:nvPr/>
+        </p:nvSpPr>
+        <p:spPr>
+          <a:xfrm>
+            <a:off x="457200" y="1188720"/>
+            <a:ext cx="2560320" cy="1828800"/>
+          </a:xfrm>
+          <a:prstGeom prst="rect">
+            <a:avLst/>
+          </a:prstGeom>
+          <a:solidFill>
+            <a:srgbClr val="FFFFFF"/>
+          </a:solidFill>
+          <a:ln w="12700">
+            <a:solidFill>
+              <a:srgbClr val="E5E2DC"/>
+            </a:solidFill>
+            <a:prstDash val="solid"/>
+          </a:ln>
+          <a:effectLst>
+            <a:outerShdw sx="100000" sy="100000" kx="0" ky="0" algn="bl" rotWithShape="0" blurRad="50800" dist="25400" dir="8100000">
+              <a:srgbClr val="000000">
+                <a:alpha val="10000"/>
+              </a:srgbClr>
+            </a:outerShdw>
+          </a:effectLst>
+        </p:spPr>
+      </p:sp>
+      <p:sp>
+        <p:nvSpPr>
+          <p:cNvPr id="6" name="Shape 4"/>
+          <p:cNvSpPr/>
+          <p:nvPr/>
+        </p:nvSpPr>
+        <p:spPr>
+          <a:xfrm>
+            <a:off x="457200" y="1188720"/>
+            <a:ext cx="2560320" cy="54864"/>
+          </a:xfrm>
+          <a:prstGeom prst="rect">
+            <a:avLst/>
+          </a:prstGeom>
+          <a:solidFill>
+            <a:srgbClr val="2A9D8F"/>
+          </a:solidFill>
+          <a:ln/>
+        </p:spPr>
+      </p:sp>
+      <p:sp>
+        <p:nvSpPr>
+          <p:cNvPr id="7" name="Text 5"/>
+          <p:cNvSpPr/>
+          <p:nvPr/>
+        </p:nvSpPr>
+        <p:spPr>
+          <a:xfrm>
+            <a:off x="594360" y="1325880"/>
+            <a:ext cx="2286000" cy="365760"/>
+          </a:xfrm>
+          <a:prstGeom prst="rect">
+            <a:avLst/>
+          </a:prstGeom>
+          <a:noFill/>
+          <a:ln/>
+        </p:spPr>
+        <p:txBody>
+          <a:bodyPr wrap="square" rtlCol="0" anchor="ctr"/>
+          <a:lstStyle/>
+          <a:p>
+            <a:pPr indent="0" marL="0">
+              <a:buNone/>
+            </a:pPr>
+            <a:r>
+              <a:rPr lang="en-US" sz="1400" b="1" dirty="0">
+                <a:solidFill>
+                  <a:srgbClr val="1B2A4A"/>
+                </a:solidFill>
+                <a:latin typeface="Calibri" pitchFamily="34" charset="0"/>
+                <a:ea typeface="Calibri" pitchFamily="34" charset="-122"/>
+                <a:cs typeface="Calibri" pitchFamily="34" charset="-120"/>
+              </a:rPr>
+              <a:t>New Moon</a:t>
+            </a:r>
+            <a:endParaRPr lang="en-US" sz="1400" dirty="0"/>
+          </a:p>
+        </p:txBody>
+      </p:sp>
+      <p:sp>
+        <p:nvSpPr>
+          <p:cNvPr id="8" name="Text 6"/>
+          <p:cNvSpPr/>
+          <p:nvPr/>
+        </p:nvSpPr>
+        <p:spPr>
+          <a:xfrm>
+            <a:off x="594360" y="1737360"/>
+            <a:ext cx="2286000" cy="1097280"/>
+          </a:xfrm>
+          <a:prstGeom prst="rect">
+            <a:avLst/>
+          </a:prstGeom>
+          <a:noFill/>
+          <a:ln/>
+        </p:spPr>
+        <p:txBody>
+          <a:bodyPr wrap="square" rtlCol="0" anchor="t"/>
+          <a:lstStyle/>
+          <a:p>
+            <a:pPr indent="0" marL="0">
+              <a:buNone/>
+            </a:pPr>
+            <a:r>
+              <a:rPr lang="en-US" sz="1100" dirty="0">
+                <a:solidFill>
+                  <a:srgbClr val="3D3A36"/>
+                </a:solidFill>
+                <a:latin typeface="Calibri" pitchFamily="34" charset="0"/>
+                <a:ea typeface="Calibri" pitchFamily="34" charset="-122"/>
+                <a:cs typeface="Calibri" pitchFamily="34" charset="-120"/>
+              </a:rPr>
+              <a:t>Moon between Earth and Sun. Dark side faces us. Cannot see it.</a:t>
+            </a:r>
+            <a:endParaRPr lang="en-US" sz="1100" dirty="0"/>
+          </a:p>
+        </p:txBody>
+      </p:sp>
+      <p:sp>
+        <p:nvSpPr>
+          <p:cNvPr id="9" name="Shape 7"/>
+          <p:cNvSpPr/>
+          <p:nvPr/>
+        </p:nvSpPr>
+        <p:spPr>
+          <a:xfrm>
+            <a:off x="3291840" y="1188720"/>
+            <a:ext cx="2560320" cy="1828800"/>
+          </a:xfrm>
+          <a:prstGeom prst="rect">
+            <a:avLst/>
+          </a:prstGeom>
+          <a:solidFill>
+            <a:srgbClr val="FFFFFF"/>
+          </a:solidFill>
+          <a:ln w="12700">
+            <a:solidFill>
+              <a:srgbClr val="E5E2DC"/>
+            </a:solidFill>
+            <a:prstDash val="solid"/>
+          </a:ln>
+          <a:effectLst>
+            <a:outerShdw sx="100000" sy="100000" kx="0" ky="0" algn="bl" rotWithShape="0" blurRad="50800" dist="25400" dir="8100000">
+              <a:srgbClr val="000000">
+                <a:alpha val="10000"/>
+              </a:srgbClr>
+            </a:outerShdw>
+          </a:effectLst>
+        </p:spPr>
+      </p:sp>
+      <p:sp>
+        <p:nvSpPr>
+          <p:cNvPr id="10" name="Shape 8"/>
+          <p:cNvSpPr/>
+          <p:nvPr/>
+        </p:nvSpPr>
+        <p:spPr>
+          <a:xfrm>
+            <a:off x="3291840" y="1188720"/>
+            <a:ext cx="2560320" cy="54864"/>
+          </a:xfrm>
+          <a:prstGeom prst="rect">
+            <a:avLst/>
+          </a:prstGeom>
+          <a:solidFill>
+            <a:srgbClr val="2A9D8F"/>
+          </a:solidFill>
+          <a:ln/>
+        </p:spPr>
+      </p:sp>
+      <p:sp>
+        <p:nvSpPr>
+          <p:cNvPr id="11" name="Text 9"/>
+          <p:cNvSpPr/>
+          <p:nvPr/>
+        </p:nvSpPr>
+        <p:spPr>
+          <a:xfrm>
+            <a:off x="3429000" y="1325880"/>
+            <a:ext cx="2286000" cy="365760"/>
+          </a:xfrm>
+          <a:prstGeom prst="rect">
+            <a:avLst/>
+          </a:prstGeom>
+          <a:noFill/>
+          <a:ln/>
+        </p:spPr>
+        <p:txBody>
+          <a:bodyPr wrap="square" rtlCol="0" anchor="ctr"/>
+          <a:lstStyle/>
+          <a:p>
+            <a:pPr indent="0" marL="0">
+              <a:buNone/>
+            </a:pPr>
+            <a:r>
+              <a:rPr lang="en-US" sz="1400" b="1" dirty="0">
+                <a:solidFill>
+                  <a:srgbClr val="1B2A4A"/>
+                </a:solidFill>
+                <a:latin typeface="Calibri" pitchFamily="34" charset="0"/>
+                <a:ea typeface="Calibri" pitchFamily="34" charset="-122"/>
+                <a:cs typeface="Calibri" pitchFamily="34" charset="-120"/>
+              </a:rPr>
+              <a:t>First Quarter</a:t>
+            </a:r>
+            <a:endParaRPr lang="en-US" sz="1400" dirty="0"/>
+          </a:p>
+        </p:txBody>
+      </p:sp>
+      <p:sp>
+        <p:nvSpPr>
+          <p:cNvPr id="12" name="Text 10"/>
+          <p:cNvSpPr/>
+          <p:nvPr/>
+        </p:nvSpPr>
+        <p:spPr>
+          <a:xfrm>
+            <a:off x="3429000" y="1737360"/>
+            <a:ext cx="2286000" cy="1097280"/>
+          </a:xfrm>
+          <a:prstGeom prst="rect">
+            <a:avLst/>
+          </a:prstGeom>
+          <a:noFill/>
+          <a:ln/>
+        </p:spPr>
+        <p:txBody>
+          <a:bodyPr wrap="square" rtlCol="0" anchor="t"/>
+          <a:lstStyle/>
+          <a:p>
+            <a:pPr indent="0" marL="0">
+              <a:buNone/>
+            </a:pPr>
+            <a:r>
+              <a:rPr lang="en-US" sz="1100" dirty="0">
+                <a:solidFill>
+                  <a:srgbClr val="3D3A36"/>
+                </a:solidFill>
+                <a:latin typeface="Calibri" pitchFamily="34" charset="0"/>
+                <a:ea typeface="Calibri" pitchFamily="34" charset="-122"/>
+                <a:cs typeface="Calibri" pitchFamily="34" charset="-120"/>
+              </a:rPr>
+              <a:t>Half the Moon is lit (right half). Growing = 'waxing'.</a:t>
+            </a:r>
+            <a:endParaRPr lang="en-US" sz="1100" dirty="0"/>
+          </a:p>
+        </p:txBody>
+      </p:sp>
+      <p:sp>
+        <p:nvSpPr>
+          <p:cNvPr id="13" name="Shape 11"/>
+          <p:cNvSpPr/>
+          <p:nvPr/>
+        </p:nvSpPr>
+        <p:spPr>
+          <a:xfrm>
+            <a:off x="6126480" y="1188720"/>
+            <a:ext cx="2560320" cy="1828800"/>
+          </a:xfrm>
+          <a:prstGeom prst="rect">
+            <a:avLst/>
+          </a:prstGeom>
+          <a:solidFill>
+            <a:srgbClr val="FFFFFF"/>
+          </a:solidFill>
+          <a:ln w="12700">
+            <a:solidFill>
+              <a:srgbClr val="E5E2DC"/>
+            </a:solidFill>
+            <a:prstDash val="solid"/>
+          </a:ln>
+          <a:effectLst>
+            <a:outerShdw sx="100000" sy="100000" kx="0" ky="0" algn="bl" rotWithShape="0" blurRad="50800" dist="25400" dir="8100000">
+              <a:srgbClr val="000000">
+                <a:alpha val="10000"/>
+              </a:srgbClr>
+            </a:outerShdw>
+          </a:effectLst>
+        </p:spPr>
+      </p:sp>
+      <p:sp>
+        <p:nvSpPr>
+          <p:cNvPr id="14" name="Shape 12"/>
+          <p:cNvSpPr/>
+          <p:nvPr/>
+        </p:nvSpPr>
+        <p:spPr>
+          <a:xfrm>
+            <a:off x="6126480" y="1188720"/>
+            <a:ext cx="2560320" cy="54864"/>
+          </a:xfrm>
+          <a:prstGeom prst="rect">
+            <a:avLst/>
+          </a:prstGeom>
+          <a:solidFill>
+            <a:srgbClr val="2A9D8F"/>
+          </a:solidFill>
+          <a:ln/>
+        </p:spPr>
+      </p:sp>
+      <p:sp>
+        <p:nvSpPr>
+          <p:cNvPr id="15" name="Text 13"/>
+          <p:cNvSpPr/>
+          <p:nvPr/>
+        </p:nvSpPr>
+        <p:spPr>
+          <a:xfrm>
+            <a:off x="6263640" y="1325880"/>
+            <a:ext cx="2286000" cy="365760"/>
+          </a:xfrm>
+          <a:prstGeom prst="rect">
+            <a:avLst/>
+          </a:prstGeom>
+          <a:noFill/>
+          <a:ln/>
+        </p:spPr>
+        <p:txBody>
+          <a:bodyPr wrap="square" rtlCol="0" anchor="ctr"/>
+          <a:lstStyle/>
+          <a:p>
+            <a:pPr indent="0" marL="0">
+              <a:buNone/>
+            </a:pPr>
+            <a:r>
+              <a:rPr lang="en-US" sz="1400" b="1" dirty="0">
+                <a:solidFill>
+                  <a:srgbClr val="1B2A4A"/>
+                </a:solidFill>
+                <a:latin typeface="Calibri" pitchFamily="34" charset="0"/>
+                <a:ea typeface="Calibri" pitchFamily="34" charset="-122"/>
+                <a:cs typeface="Calibri" pitchFamily="34" charset="-120"/>
+              </a:rPr>
+              <a:t>Full Moon</a:t>
+            </a:r>
+            <a:endParaRPr lang="en-US" sz="1400" dirty="0"/>
+          </a:p>
+        </p:txBody>
+      </p:sp>
+      <p:sp>
+        <p:nvSpPr>
+          <p:cNvPr id="16" name="Text 14"/>
+          <p:cNvSpPr/>
+          <p:nvPr/>
+        </p:nvSpPr>
+        <p:spPr>
+          <a:xfrm>
+            <a:off x="6263640" y="1737360"/>
+            <a:ext cx="2286000" cy="1097280"/>
+          </a:xfrm>
+          <a:prstGeom prst="rect">
+            <a:avLst/>
+          </a:prstGeom>
+          <a:noFill/>
+          <a:ln/>
+        </p:spPr>
+        <p:txBody>
+          <a:bodyPr wrap="square" rtlCol="0" anchor="t"/>
+          <a:lstStyle/>
+          <a:p>
+            <a:pPr indent="0" marL="0">
+              <a:buNone/>
+            </a:pPr>
+            <a:r>
+              <a:rPr lang="en-US" sz="1100" dirty="0">
+                <a:solidFill>
+                  <a:srgbClr val="3D3A36"/>
+                </a:solidFill>
+                <a:latin typeface="Calibri" pitchFamily="34" charset="0"/>
+                <a:ea typeface="Calibri" pitchFamily="34" charset="-122"/>
+                <a:cs typeface="Calibri" pitchFamily="34" charset="-120"/>
+              </a:rPr>
+              <a:t>Earth between Sun and Moon. Entire face lit. Brightest phase.</a:t>
+            </a:r>
+            <a:endParaRPr lang="en-US" sz="1100" dirty="0"/>
+          </a:p>
+        </p:txBody>
+      </p:sp>
+      <p:sp>
+        <p:nvSpPr>
+          <p:cNvPr id="17" name="Shape 15"/>
+          <p:cNvSpPr/>
+          <p:nvPr/>
+        </p:nvSpPr>
+        <p:spPr>
+          <a:xfrm>
+            <a:off x="457200" y="3200400"/>
+            <a:ext cx="2560320" cy="1828800"/>
+          </a:xfrm>
+          <a:prstGeom prst="rect">
+            <a:avLst/>
+          </a:prstGeom>
+          <a:solidFill>
+            <a:srgbClr val="FFFFFF"/>
+          </a:solidFill>
+          <a:ln w="12700">
+            <a:solidFill>
+              <a:srgbClr val="E5E2DC"/>
+            </a:solidFill>
+            <a:prstDash val="solid"/>
+          </a:ln>
+          <a:effectLst>
+            <a:outerShdw sx="100000" sy="100000" kx="0" ky="0" algn="bl" rotWithShape="0" blurRad="50800" dist="25400" dir="8100000">
+              <a:srgbClr val="000000">
+                <a:alpha val="10000"/>
+              </a:srgbClr>
+            </a:outerShdw>
+          </a:effectLst>
+        </p:spPr>
+      </p:sp>
+      <p:sp>
+        <p:nvSpPr>
+          <p:cNvPr id="18" name="Shape 16"/>
+          <p:cNvSpPr/>
+          <p:nvPr/>
+        </p:nvSpPr>
+        <p:spPr>
+          <a:xfrm>
+            <a:off x="457200" y="3200400"/>
+            <a:ext cx="2560320" cy="54864"/>
+          </a:xfrm>
+          <a:prstGeom prst="rect">
+            <a:avLst/>
+          </a:prstGeom>
+          <a:solidFill>
+            <a:srgbClr val="2A9D8F"/>
+          </a:solidFill>
+          <a:ln/>
+        </p:spPr>
+      </p:sp>
+      <p:sp>
+        <p:nvSpPr>
+          <p:cNvPr id="19" name="Text 17"/>
+          <p:cNvSpPr/>
+          <p:nvPr/>
+        </p:nvSpPr>
+        <p:spPr>
+          <a:xfrm>
+            <a:off x="594360" y="3337560"/>
+            <a:ext cx="2286000" cy="365760"/>
+          </a:xfrm>
+          <a:prstGeom prst="rect">
+            <a:avLst/>
+          </a:prstGeom>
+          <a:noFill/>
+          <a:ln/>
+        </p:spPr>
+        <p:txBody>
+          <a:bodyPr wrap="square" rtlCol="0" anchor="ctr"/>
+          <a:lstStyle/>
+          <a:p>
+            <a:pPr indent="0" marL="0">
+              <a:buNone/>
+            </a:pPr>
+            <a:r>
+              <a:rPr lang="en-US" sz="1400" b="1" dirty="0">
+                <a:solidFill>
+                  <a:srgbClr val="1B2A4A"/>
+                </a:solidFill>
+                <a:latin typeface="Calibri" pitchFamily="34" charset="0"/>
+                <a:ea typeface="Calibri" pitchFamily="34" charset="-122"/>
+                <a:cs typeface="Calibri" pitchFamily="34" charset="-120"/>
+              </a:rPr>
+              <a:t>Last Quarter</a:t>
+            </a:r>
+            <a:endParaRPr lang="en-US" sz="1400" dirty="0"/>
+          </a:p>
+        </p:txBody>
+      </p:sp>
+      <p:sp>
+        <p:nvSpPr>
+          <p:cNvPr id="20" name="Text 18"/>
+          <p:cNvSpPr/>
+          <p:nvPr/>
+        </p:nvSpPr>
+        <p:spPr>
+          <a:xfrm>
+            <a:off x="594360" y="3749040"/>
+            <a:ext cx="2286000" cy="1097280"/>
+          </a:xfrm>
+          <a:prstGeom prst="rect">
+            <a:avLst/>
+          </a:prstGeom>
+          <a:noFill/>
+          <a:ln/>
+        </p:spPr>
+        <p:txBody>
+          <a:bodyPr wrap="square" rtlCol="0" anchor="t"/>
+          <a:lstStyle/>
+          <a:p>
+            <a:pPr indent="0" marL="0">
+              <a:buNone/>
+            </a:pPr>
+            <a:r>
+              <a:rPr lang="en-US" sz="1100" dirty="0">
+                <a:solidFill>
+                  <a:srgbClr val="3D3A36"/>
+                </a:solidFill>
+                <a:latin typeface="Calibri" pitchFamily="34" charset="0"/>
+                <a:ea typeface="Calibri" pitchFamily="34" charset="-122"/>
+                <a:cs typeface="Calibri" pitchFamily="34" charset="-120"/>
+              </a:rPr>
+              <a:t>Half lit (left half). Shrinking = 'waning'. Cycle takes ~29.5 days.</a:t>
+            </a:r>
+            <a:endParaRPr lang="en-US" sz="1100" dirty="0"/>
+          </a:p>
+        </p:txBody>
+      </p:sp>
+    </p:spTree>
+  </p:cSld>
+  <p:clrMapOvr>
+    <a:masterClrMapping/>
+  </p:clrMapOvr>
+</p:sld>
+</file>
+
+<file path=ppt/slides/slide5.xml><?xml version="1.0" encoding="utf-8"?>
+<p:sld xmlns:a="http://schemas.openxmlformats.org/drawingml/2006/main" xmlns:r="http://schemas.openxmlformats.org/officeDocument/2006/relationships" xmlns:p="http://schemas.openxmlformats.org/presentationml/2006/main">
+  <p:cSld name="Slide 5">
     <p:bg>
       <p:bgPr>
         <a:solidFill>
@@ -1828,13 +2765,13 @@
         <p:spPr>
           <a:xfrm>
             <a:off x="0" y="0"/>
-            <a:ext cx="9144000" cy="54864"/>
-          </a:xfrm>
-          <a:prstGeom prst="rect">
-            <a:avLst/>
-          </a:prstGeom>
-          <a:solidFill>
-            <a:srgbClr val="2A9D8F"/>
+            <a:ext cx="109728" cy="5143500"/>
+          </a:xfrm>
+          <a:prstGeom prst="rect">
+            <a:avLst/>
+          </a:prstGeom>
+          <a:solidFill>
+            <a:srgbClr val="E9C46A"/>
           </a:solidFill>
           <a:ln/>
         </p:spPr>
@@ -1847,8 +2784,8 @@
         </p:nvSpPr>
         <p:spPr>
           <a:xfrm>
-            <a:off x="548640" y="457200"/>
-            <a:ext cx="8046720" cy="640080"/>
+            <a:off x="731520" y="457200"/>
+            <a:ext cx="7772400" cy="731520"/>
           </a:xfrm>
           <a:prstGeom prst="rect">
             <a:avLst/>
@@ -1864,7 +2801,7 @@
               <a:buNone/>
             </a:pPr>
             <a:r>
-              <a:rPr lang="en-US" sz="2800" b="1" dirty="0">
+              <a:rPr lang="en-US" sz="3200" b="1" dirty="0">
                 <a:solidFill>
                   <a:srgbClr val="FFFFFF"/>
                 </a:solidFill>
@@ -1874,7 +2811,7 @@
               </a:rPr>
               <a:t>Key Takeaways</a:t>
             </a:r>
-            <a:endParaRPr lang="en-US" sz="2800" dirty="0"/>
+            <a:endParaRPr lang="en-US" sz="3200" dirty="0"/>
           </a:p>
         </p:txBody>
       </p:sp>
@@ -1886,8 +2823,8 @@
         </p:nvSpPr>
         <p:spPr>
           <a:xfrm>
-            <a:off x="731520" y="1371600"/>
-            <a:ext cx="7680960" cy="3200400"/>
+            <a:off x="731520" y="1463040"/>
+            <a:ext cx="7772400" cy="3200400"/>
           </a:xfrm>
           <a:prstGeom prst="rect">
             <a:avLst/>
@@ -1907,7 +2844,7 @@
               <a:buChar char="•"/>
             </a:pPr>
             <a:r>
-              <a:rPr lang="en-US" sz="1600" dirty="0">
+              <a:rPr lang="en-US" sz="1500" dirty="0">
                 <a:solidFill>
                   <a:srgbClr val="CADCFC"/>
                 </a:solidFill>
@@ -1915,9 +2852,9 @@
                 <a:ea typeface="Calibri" pitchFamily="34" charset="-122"/>
                 <a:cs typeface="Calibri" pitchFamily="34" charset="-120"/>
               </a:rPr>
-              <a:t>Earth orbits Sun (1 year), Moon orbits Earth (~28 days), Earth spins (1 day)</a:t>
-            </a:r>
-            <a:endParaRPr lang="en-US" sz="1600" dirty="0"/>
+              <a:t>Earth orbits Sun in 365.25 days; rotates in 24 hours</a:t>
+            </a:r>
+            <a:endParaRPr lang="en-US" sz="1500" dirty="0"/>
           </a:p>
           <a:p>
             <a:pPr marL="342900" indent="-342900">
@@ -1928,7 +2865,7 @@
               <a:buChar char="•"/>
             </a:pPr>
             <a:r>
-              <a:rPr lang="en-US" sz="1600" dirty="0">
+              <a:rPr lang="en-US" sz="1500" dirty="0">
                 <a:solidFill>
                   <a:srgbClr val="CADCFC"/>
                 </a:solidFill>
@@ -1936,9 +2873,9 @@
                 <a:ea typeface="Calibri" pitchFamily="34" charset="-122"/>
                 <a:cs typeface="Calibri" pitchFamily="34" charset="-120"/>
               </a:rPr>
-              <a:t>The Moon reflects sunlight — it doesn't make its own light</a:t>
-            </a:r>
-            <a:endParaRPr lang="en-US" sz="1600" dirty="0"/>
+              <a:t>Axis tilted 23.5° — causes seasons</a:t>
+            </a:r>
+            <a:endParaRPr lang="en-US" sz="1500" dirty="0"/>
           </a:p>
           <a:p>
             <a:pPr marL="342900" indent="-342900">
@@ -1949,7 +2886,7 @@
               <a:buChar char="•"/>
             </a:pPr>
             <a:r>
-              <a:rPr lang="en-US" sz="1600" dirty="0">
+              <a:rPr lang="en-US" sz="1500" dirty="0">
                 <a:solidFill>
                   <a:srgbClr val="CADCFC"/>
                 </a:solidFill>
@@ -1957,9 +2894,9 @@
                 <a:ea typeface="Calibri" pitchFamily="34" charset="-122"/>
                 <a:cs typeface="Calibri" pitchFamily="34" charset="-120"/>
               </a:rPr>
-              <a:t>Moon phases caused by changing angle of sunlight</a:t>
-            </a:r>
-            <a:endParaRPr lang="en-US" sz="1600" dirty="0"/>
+              <a:t>Moon orbits Earth in ~27.3 days; phases cycle in ~29.5 days</a:t>
+            </a:r>
+            <a:endParaRPr lang="en-US" sz="1500" dirty="0"/>
           </a:p>
           <a:p>
             <a:pPr marL="342900" indent="-342900">
@@ -1970,7 +2907,7 @@
               <a:buChar char="•"/>
             </a:pPr>
             <a:r>
-              <a:rPr lang="en-US" sz="1600" dirty="0">
+              <a:rPr lang="en-US" sz="1500" dirty="0">
                 <a:solidFill>
                   <a:srgbClr val="CADCFC"/>
                 </a:solidFill>
@@ -1978,9 +2915,30 @@
                 <a:ea typeface="Calibri" pitchFamily="34" charset="-122"/>
                 <a:cs typeface="Calibri" pitchFamily="34" charset="-120"/>
               </a:rPr>
-              <a:t>Sun = star, Earth = planet, Moon = natural satellite</a:t>
-            </a:r>
-            <a:endParaRPr lang="en-US" sz="1600" dirty="0"/>
+              <a:t>Moon phases: new → first quarter → full → last quarter</a:t>
+            </a:r>
+            <a:endParaRPr lang="en-US" sz="1500" dirty="0"/>
+          </a:p>
+          <a:p>
+            <a:pPr marL="342900" indent="-342900">
+              <a:spcAft>
+                <a:spcPts val="1000"/>
+              </a:spcAft>
+              <a:buSzPct val="100000"/>
+              <a:buChar char="•"/>
+            </a:pPr>
+            <a:r>
+              <a:rPr lang="en-US" sz="1500" dirty="0">
+                <a:solidFill>
+                  <a:srgbClr val="CADCFC"/>
+                </a:solidFill>
+                <a:latin typeface="Calibri" pitchFamily="34" charset="0"/>
+                <a:ea typeface="Calibri" pitchFamily="34" charset="-122"/>
+                <a:cs typeface="Calibri" pitchFamily="34" charset="-120"/>
+              </a:rPr>
+              <a:t>Moon's gravity causes tides; Sun provides light and heat</a:t>
+            </a:r>
+            <a:endParaRPr lang="en-US" sz="1500" dirty="0"/>
           </a:p>
         </p:txBody>
       </p:sp>
@@ -1992,8 +2950,8 @@
         </p:nvSpPr>
         <p:spPr>
           <a:xfrm>
-            <a:off x="548640" y="4572000"/>
-            <a:ext cx="3657600" cy="274320"/>
+            <a:off x="731520" y="4572000"/>
+            <a:ext cx="7772400" cy="365760"/>
           </a:xfrm>
           <a:prstGeom prst="rect">
             <a:avLst/>
@@ -2009,14 +2967,17 @@
               <a:buNone/>
             </a:pPr>
             <a:r>
-              <a:rPr lang="en-US" sz="1000" dirty="0">
-                <a:solidFill>
-                  <a:srgbClr val="6B6660"/>
-                </a:solidFill>
+              <a:rPr lang="en-US" sz="1100" dirty="0">
+                <a:solidFill>
+                  <a:srgbClr val="E9C46A"/>
+                </a:solidFill>
+                <a:latin typeface="Calibri" pitchFamily="34" charset="0"/>
+                <a:ea typeface="Calibri" pitchFamily="34" charset="-122"/>
+                <a:cs typeface="Calibri" pitchFamily="34" charset="-120"/>
               </a:rPr>
               <a:t>mrzocchi.com</a:t>
             </a:r>
-            <a:endParaRPr lang="en-US" sz="1000" dirty="0"/>
+            <a:endParaRPr lang="en-US" sz="1100" dirty="0"/>
           </a:p>
         </p:txBody>
       </p:sp>

--- a/static/ppts/G6_Sci_T5_Earth_Sun_Moon.pptx
+++ b/static/ppts/G6_Sci_T5_Earth_Sun_Moon.pptx
@@ -10,9 +10,12 @@
     <p:sldId id="258" r:id="rId4"/>
     <p:sldId id="259" r:id="rId5"/>
     <p:sldId id="260" r:id="rId6"/>
+    <p:sldId id="261" r:id="rId7"/>
+    <p:sldId id="262" r:id="rId8"/>
+    <p:sldId id="263" r:id="rId9"/>
   </p:sldIdLst>
   <p:notesMasterIdLst>
-    <p:notesMasterId r:id="rId7"/>
+    <p:notesMasterId r:id="rId10"/>
   </p:notesMasterIdLst>
   <p:sldSz cx="9144000" cy="5143500"/>
   <p:notesSz cx="5143500" cy="9144000"/>
@@ -900,6 +903,270 @@
 </p:notes>
 </file>
 
+<file path=ppt/notesSlides/notesSlide6.xml><?xml version="1.0" encoding="utf-8"?>
+<p:notes xmlns:a="http://schemas.openxmlformats.org/drawingml/2006/main" xmlns:r="http://schemas.openxmlformats.org/officeDocument/2006/relationships" xmlns:p="http://schemas.openxmlformats.org/presentationml/2006/main">
+  <p:cSld>
+    <p:spTree>
+      <p:nvGrpSpPr>
+        <p:cNvPr id="1" name=""/>
+        <p:cNvGrpSpPr/>
+        <p:nvPr/>
+      </p:nvGrpSpPr>
+      <p:grpSpPr>
+        <a:xfrm>
+          <a:off x="0" y="0"/>
+          <a:ext cx="0" cy="0"/>
+          <a:chOff x="0" y="0"/>
+          <a:chExt cx="0" cy="0"/>
+        </a:xfrm>
+      </p:grpSpPr>
+      <p:sp>
+        <p:nvSpPr>
+          <p:cNvPr id="2" name="Slide Image Placeholder 1"/>
+          <p:cNvSpPr>
+            <a:spLocks noGrp="1" noRot="1" noChangeAspect="1"/>
+          </p:cNvSpPr>
+          <p:nvPr>
+            <p:ph type="sldImg"/>
+          </p:nvPr>
+        </p:nvSpPr>
+        <p:spPr/>
+      </p:sp>
+      <p:sp>
+        <p:nvSpPr>
+          <p:cNvPr id="3" name="Notes Placeholder 2"/>
+          <p:cNvSpPr>
+            <a:spLocks noGrp="1"/>
+          </p:cNvSpPr>
+          <p:nvPr>
+            <p:ph type="body" idx="1"/>
+          </p:nvPr>
+        </p:nvSpPr>
+        <p:spPr/>
+        <p:txBody>
+          <a:bodyPr/>
+          <a:lstStyle/>
+          <a:p>
+            <a:r>
+              <a:rPr lang="en-US" dirty="0"/>
+              <a:t/>
+            </a:r>
+            <a:endParaRPr lang="en-US" dirty="0"/>
+          </a:p>
+        </p:txBody>
+      </p:sp>
+      <p:sp>
+        <p:nvSpPr>
+          <p:cNvPr id="4" name="Slide Number Placeholder 3"/>
+          <p:cNvSpPr>
+            <a:spLocks noGrp="1"/>
+          </p:cNvSpPr>
+          <p:nvPr>
+            <p:ph type="sldNum" sz="quarter" idx="10"/>
+          </p:nvPr>
+        </p:nvSpPr>
+        <p:spPr/>
+        <p:txBody>
+          <a:bodyPr/>
+          <a:lstStyle/>
+          <a:p>
+            <a:fld id="{F7021451-1387-4CA6-816F-3879F97B5CBC}" type="slidenum">
+              <a:rPr lang="en-US"/>
+              <a:t>6</a:t>
+            </a:fld>
+            <a:endParaRPr lang="en-US"/>
+          </a:p>
+        </p:txBody>
+      </p:sp>
+    </p:spTree>
+    <p:extLst>
+      <p:ext uri="{BB962C8B-B14F-4D97-AF65-F5344CB8AC3E}">
+        <p14:creationId xmlns:p14="http://schemas.microsoft.com/office/powerpoint/2010/main" val="1024086991"/>
+      </p:ext>
+    </p:extLst>
+  </p:cSld>
+  <p:clrMapOvr>
+    <a:masterClrMapping/>
+  </p:clrMapOvr>
+</p:notes>
+</file>
+
+<file path=ppt/notesSlides/notesSlide7.xml><?xml version="1.0" encoding="utf-8"?>
+<p:notes xmlns:a="http://schemas.openxmlformats.org/drawingml/2006/main" xmlns:r="http://schemas.openxmlformats.org/officeDocument/2006/relationships" xmlns:p="http://schemas.openxmlformats.org/presentationml/2006/main">
+  <p:cSld>
+    <p:spTree>
+      <p:nvGrpSpPr>
+        <p:cNvPr id="1" name=""/>
+        <p:cNvGrpSpPr/>
+        <p:nvPr/>
+      </p:nvGrpSpPr>
+      <p:grpSpPr>
+        <a:xfrm>
+          <a:off x="0" y="0"/>
+          <a:ext cx="0" cy="0"/>
+          <a:chOff x="0" y="0"/>
+          <a:chExt cx="0" cy="0"/>
+        </a:xfrm>
+      </p:grpSpPr>
+      <p:sp>
+        <p:nvSpPr>
+          <p:cNvPr id="2" name="Slide Image Placeholder 1"/>
+          <p:cNvSpPr>
+            <a:spLocks noGrp="1" noRot="1" noChangeAspect="1"/>
+          </p:cNvSpPr>
+          <p:nvPr>
+            <p:ph type="sldImg"/>
+          </p:nvPr>
+        </p:nvSpPr>
+        <p:spPr/>
+      </p:sp>
+      <p:sp>
+        <p:nvSpPr>
+          <p:cNvPr id="3" name="Notes Placeholder 2"/>
+          <p:cNvSpPr>
+            <a:spLocks noGrp="1"/>
+          </p:cNvSpPr>
+          <p:nvPr>
+            <p:ph type="body" idx="1"/>
+          </p:nvPr>
+        </p:nvSpPr>
+        <p:spPr/>
+        <p:txBody>
+          <a:bodyPr/>
+          <a:lstStyle/>
+          <a:p>
+            <a:r>
+              <a:rPr lang="en-US" dirty="0"/>
+              <a:t/>
+            </a:r>
+            <a:endParaRPr lang="en-US" dirty="0"/>
+          </a:p>
+        </p:txBody>
+      </p:sp>
+      <p:sp>
+        <p:nvSpPr>
+          <p:cNvPr id="4" name="Slide Number Placeholder 3"/>
+          <p:cNvSpPr>
+            <a:spLocks noGrp="1"/>
+          </p:cNvSpPr>
+          <p:nvPr>
+            <p:ph type="sldNum" sz="quarter" idx="10"/>
+          </p:nvPr>
+        </p:nvSpPr>
+        <p:spPr/>
+        <p:txBody>
+          <a:bodyPr/>
+          <a:lstStyle/>
+          <a:p>
+            <a:fld id="{F7021451-1387-4CA6-816F-3879F97B5CBC}" type="slidenum">
+              <a:rPr lang="en-US"/>
+              <a:t>7</a:t>
+            </a:fld>
+            <a:endParaRPr lang="en-US"/>
+          </a:p>
+        </p:txBody>
+      </p:sp>
+    </p:spTree>
+    <p:extLst>
+      <p:ext uri="{BB962C8B-B14F-4D97-AF65-F5344CB8AC3E}">
+        <p14:creationId xmlns:p14="http://schemas.microsoft.com/office/powerpoint/2010/main" val="1024086991"/>
+      </p:ext>
+    </p:extLst>
+  </p:cSld>
+  <p:clrMapOvr>
+    <a:masterClrMapping/>
+  </p:clrMapOvr>
+</p:notes>
+</file>
+
+<file path=ppt/notesSlides/notesSlide8.xml><?xml version="1.0" encoding="utf-8"?>
+<p:notes xmlns:a="http://schemas.openxmlformats.org/drawingml/2006/main" xmlns:r="http://schemas.openxmlformats.org/officeDocument/2006/relationships" xmlns:p="http://schemas.openxmlformats.org/presentationml/2006/main">
+  <p:cSld>
+    <p:spTree>
+      <p:nvGrpSpPr>
+        <p:cNvPr id="1" name=""/>
+        <p:cNvGrpSpPr/>
+        <p:nvPr/>
+      </p:nvGrpSpPr>
+      <p:grpSpPr>
+        <a:xfrm>
+          <a:off x="0" y="0"/>
+          <a:ext cx="0" cy="0"/>
+          <a:chOff x="0" y="0"/>
+          <a:chExt cx="0" cy="0"/>
+        </a:xfrm>
+      </p:grpSpPr>
+      <p:sp>
+        <p:nvSpPr>
+          <p:cNvPr id="2" name="Slide Image Placeholder 1"/>
+          <p:cNvSpPr>
+            <a:spLocks noGrp="1" noRot="1" noChangeAspect="1"/>
+          </p:cNvSpPr>
+          <p:nvPr>
+            <p:ph type="sldImg"/>
+          </p:nvPr>
+        </p:nvSpPr>
+        <p:spPr/>
+      </p:sp>
+      <p:sp>
+        <p:nvSpPr>
+          <p:cNvPr id="3" name="Notes Placeholder 2"/>
+          <p:cNvSpPr>
+            <a:spLocks noGrp="1"/>
+          </p:cNvSpPr>
+          <p:nvPr>
+            <p:ph type="body" idx="1"/>
+          </p:nvPr>
+        </p:nvSpPr>
+        <p:spPr/>
+        <p:txBody>
+          <a:bodyPr/>
+          <a:lstStyle/>
+          <a:p>
+            <a:r>
+              <a:rPr lang="en-US" dirty="0"/>
+              <a:t/>
+            </a:r>
+            <a:endParaRPr lang="en-US" dirty="0"/>
+          </a:p>
+        </p:txBody>
+      </p:sp>
+      <p:sp>
+        <p:nvSpPr>
+          <p:cNvPr id="4" name="Slide Number Placeholder 3"/>
+          <p:cNvSpPr>
+            <a:spLocks noGrp="1"/>
+          </p:cNvSpPr>
+          <p:nvPr>
+            <p:ph type="sldNum" sz="quarter" idx="10"/>
+          </p:nvPr>
+        </p:nvSpPr>
+        <p:spPr/>
+        <p:txBody>
+          <a:bodyPr/>
+          <a:lstStyle/>
+          <a:p>
+            <a:fld id="{F7021451-1387-4CA6-816F-3879F97B5CBC}" type="slidenum">
+              <a:rPr lang="en-US"/>
+              <a:t>8</a:t>
+            </a:fld>
+            <a:endParaRPr lang="en-US"/>
+          </a:p>
+        </p:txBody>
+      </p:sp>
+    </p:spTree>
+    <p:extLst>
+      <p:ext uri="{BB962C8B-B14F-4D97-AF65-F5344CB8AC3E}">
+        <p14:creationId xmlns:p14="http://schemas.microsoft.com/office/powerpoint/2010/main" val="1024086991"/>
+      </p:ext>
+    </p:extLst>
+  </p:cSld>
+  <p:clrMapOvr>
+    <a:masterClrMapping/>
+  </p:clrMapOvr>
+</p:notes>
+</file>
+
 <file path=ppt/slideLayouts/slideLayout1.xml><?xml version="1.0" encoding="utf-8"?>
 <p:sldLayout xmlns:a="http://schemas.openxmlformats.org/drawingml/2006/main" xmlns:r="http://schemas.openxmlformats.org/officeDocument/2006/relationships" xmlns:p="http://schemas.openxmlformats.org/presentationml/2006/main" preserve="1">
   <p:cSld name="DEFAULT">
@@ -1210,13 +1477,6 @@
 <file path=ppt/slides/slide1.xml><?xml version="1.0" encoding="utf-8"?>
 <p:sld xmlns:a="http://schemas.openxmlformats.org/drawingml/2006/main" xmlns:r="http://schemas.openxmlformats.org/officeDocument/2006/relationships" xmlns:p="http://schemas.openxmlformats.org/presentationml/2006/main">
   <p:cSld name="Slide 1">
-    <p:bg>
-      <p:bgPr>
-        <a:solidFill>
-          <a:srgbClr val="1B2A4A"/>
-        </a:solidFill>
-      </p:bgPr>
-    </p:bg>
     <p:spTree>
       <p:nvGrpSpPr>
         <p:cNvPr id="1" name=""/>
@@ -1240,7 +1500,27 @@
         <p:spPr>
           <a:xfrm>
             <a:off x="0" y="0"/>
-            <a:ext cx="109728" cy="5143500"/>
+            <a:ext cx="9144000" cy="5143500"/>
+          </a:xfrm>
+          <a:prstGeom prst="rect">
+            <a:avLst/>
+          </a:prstGeom>
+          <a:solidFill>
+            <a:srgbClr val="1B2A4A"/>
+          </a:solidFill>
+          <a:ln/>
+        </p:spPr>
+      </p:sp>
+      <p:sp>
+        <p:nvSpPr>
+          <p:cNvPr id="3" name="Shape 1"/>
+          <p:cNvSpPr/>
+          <p:nvPr/>
+        </p:nvSpPr>
+        <p:spPr>
+          <a:xfrm>
+            <a:off x="0" y="4777740"/>
+            <a:ext cx="9144000" cy="365760"/>
           </a:xfrm>
           <a:prstGeom prst="rect">
             <a:avLst/>
@@ -1253,14 +1533,36 @@
       </p:sp>
       <p:sp>
         <p:nvSpPr>
-          <p:cNvPr id="3" name="Text 1"/>
-          <p:cNvSpPr/>
-          <p:nvPr/>
-        </p:nvSpPr>
-        <p:spPr>
-          <a:xfrm>
-            <a:off x="731520" y="1097280"/>
-            <a:ext cx="7772400" cy="1371600"/>
+          <p:cNvPr id="4" name="Shape 2"/>
+          <p:cNvSpPr/>
+          <p:nvPr/>
+        </p:nvSpPr>
+        <p:spPr>
+          <a:xfrm>
+            <a:off x="6858000" y="-1371600"/>
+            <a:ext cx="4572000" cy="4572000"/>
+          </a:xfrm>
+          <a:prstGeom prst="ellipse">
+            <a:avLst/>
+          </a:prstGeom>
+          <a:solidFill>
+            <a:srgbClr val="2A9D8F">
+              <a:alpha val="12000"/>
+            </a:srgbClr>
+          </a:solidFill>
+          <a:ln/>
+        </p:spPr>
+      </p:sp>
+      <p:sp>
+        <p:nvSpPr>
+          <p:cNvPr id="5" name="Text 3"/>
+          <p:cNvSpPr/>
+          <p:nvPr/>
+        </p:nvSpPr>
+        <p:spPr>
+          <a:xfrm>
+            <a:off x="731520" y="914400"/>
+            <a:ext cx="7680960" cy="457200"/>
           </a:xfrm>
           <a:prstGeom prst="rect">
             <a:avLst/>
@@ -1276,7 +1578,46 @@
               <a:buNone/>
             </a:pPr>
             <a:r>
-              <a:rPr lang="en-US" sz="4000" b="1" dirty="0">
+              <a:rPr lang="en-US" sz="1300" b="1" spc="500" kern="0" dirty="0">
+                <a:solidFill>
+                  <a:srgbClr val="2A9D8F"/>
+                </a:solidFill>
+                <a:latin typeface="Calibri" pitchFamily="34" charset="0"/>
+                <a:ea typeface="Calibri" pitchFamily="34" charset="-122"/>
+                <a:cs typeface="Calibri" pitchFamily="34" charset="-120"/>
+              </a:rPr>
+              <a:t>GRADE 6 SCIENCE</a:t>
+            </a:r>
+            <a:endParaRPr lang="en-US" sz="1300" dirty="0"/>
+          </a:p>
+        </p:txBody>
+      </p:sp>
+      <p:sp>
+        <p:nvSpPr>
+          <p:cNvPr id="6" name="Text 4"/>
+          <p:cNvSpPr/>
+          <p:nvPr/>
+        </p:nvSpPr>
+        <p:spPr>
+          <a:xfrm>
+            <a:off x="731520" y="1463040"/>
+            <a:ext cx="6858000" cy="1645920"/>
+          </a:xfrm>
+          <a:prstGeom prst="rect">
+            <a:avLst/>
+          </a:prstGeom>
+          <a:noFill/>
+          <a:ln/>
+        </p:spPr>
+        <p:txBody>
+          <a:bodyPr wrap="square" rtlCol="0" anchor="t"/>
+          <a:lstStyle/>
+          <a:p>
+            <a:pPr indent="0" marL="0">
+              <a:buNone/>
+            </a:pPr>
+            <a:r>
+              <a:rPr lang="en-US" sz="3800" b="1" dirty="0">
                 <a:solidFill>
                   <a:srgbClr val="FFFFFF"/>
                 </a:solidFill>
@@ -1286,20 +1627,20 @@
               </a:rPr>
               <a:t>Earth, Sun &amp; Moon</a:t>
             </a:r>
-            <a:endParaRPr lang="en-US" sz="4000" dirty="0"/>
-          </a:p>
-        </p:txBody>
-      </p:sp>
-      <p:sp>
-        <p:nvSpPr>
-          <p:cNvPr id="4" name="Text 2"/>
-          <p:cNvSpPr/>
-          <p:nvPr/>
-        </p:nvSpPr>
-        <p:spPr>
-          <a:xfrm>
-            <a:off x="731520" y="2560320"/>
-            <a:ext cx="7772400" cy="548640"/>
+            <a:endParaRPr lang="en-US" sz="3800" dirty="0"/>
+          </a:p>
+        </p:txBody>
+      </p:sp>
+      <p:sp>
+        <p:nvSpPr>
+          <p:cNvPr id="7" name="Text 5"/>
+          <p:cNvSpPr/>
+          <p:nvPr/>
+        </p:nvSpPr>
+        <p:spPr>
+          <a:xfrm>
+            <a:off x="731520" y="3200400"/>
+            <a:ext cx="6400800" cy="548640"/>
           </a:xfrm>
           <a:prstGeom prst="rect">
             <a:avLst/>
@@ -1315,15 +1656,15 @@
               <a:buNone/>
             </a:pPr>
             <a:r>
-              <a:rPr lang="en-US" sz="1600" dirty="0">
-                <a:solidFill>
-                  <a:srgbClr val="E9C46A"/>
+              <a:rPr lang="en-US" sz="1600" i="1" dirty="0">
+                <a:solidFill>
+                  <a:srgbClr val="9B9690"/>
                 </a:solidFill>
                 <a:latin typeface="Calibri" pitchFamily="34" charset="0"/>
                 <a:ea typeface="Calibri" pitchFamily="34" charset="-122"/>
                 <a:cs typeface="Calibri" pitchFamily="34" charset="-120"/>
               </a:rPr>
-              <a:t>Grade 6 Science · Mr Zocchi</a:t>
+              <a:t>How they interact and affect life on Earth</a:t>
             </a:r>
             <a:endParaRPr lang="en-US" sz="1600" dirty="0"/>
           </a:p>
@@ -1331,36 +1672,14 @@
       </p:sp>
       <p:sp>
         <p:nvSpPr>
-          <p:cNvPr id="5" name="Shape 3"/>
-          <p:cNvSpPr/>
-          <p:nvPr/>
-        </p:nvSpPr>
-        <p:spPr>
-          <a:xfrm>
-            <a:off x="731520" y="3474720"/>
-            <a:ext cx="2011680" cy="411480"/>
-          </a:xfrm>
-          <a:prstGeom prst="roundRect">
-            <a:avLst>
-              <a:gd name="adj" fmla="val 17778"/>
-            </a:avLst>
-          </a:prstGeom>
-          <a:solidFill>
-            <a:srgbClr val="2A9D8F"/>
-          </a:solidFill>
-          <a:ln/>
-        </p:spPr>
-      </p:sp>
-      <p:sp>
-        <p:nvSpPr>
-          <p:cNvPr id="6" name="Text 4"/>
-          <p:cNvSpPr/>
-          <p:nvPr/>
-        </p:nvSpPr>
-        <p:spPr>
-          <a:xfrm>
-            <a:off x="731520" y="3474720"/>
-            <a:ext cx="2011680" cy="411480"/>
+          <p:cNvPr id="8" name="Text 6"/>
+          <p:cNvSpPr/>
+          <p:nvPr/>
+        </p:nvSpPr>
+        <p:spPr>
+          <a:xfrm>
+            <a:off x="731520" y="4297680"/>
+            <a:ext cx="2743200" cy="365760"/>
           </a:xfrm>
           <a:prstGeom prst="rect">
             <a:avLst/>
@@ -1372,21 +1691,21 @@
           <a:bodyPr wrap="square" rtlCol="0" anchor="ctr"/>
           <a:lstStyle/>
           <a:p>
-            <a:pPr algn="ctr" indent="0" marL="0">
+            <a:pPr indent="0" marL="0">
               <a:buNone/>
             </a:pPr>
             <a:r>
-              <a:rPr lang="en-US" sz="1200" b="1" dirty="0">
-                <a:solidFill>
-                  <a:srgbClr val="FFFFFF"/>
+              <a:rPr lang="en-US" sz="1100" dirty="0">
+                <a:solidFill>
+                  <a:srgbClr val="9B9690"/>
                 </a:solidFill>
                 <a:latin typeface="Calibri" pitchFamily="34" charset="0"/>
                 <a:ea typeface="Calibri" pitchFamily="34" charset="-122"/>
                 <a:cs typeface="Calibri" pitchFamily="34" charset="-120"/>
               </a:rPr>
-              <a:t>Term 5 · Space Science</a:t>
-            </a:r>
-            <a:endParaRPr lang="en-US" sz="1200" dirty="0"/>
+              <a:t>mrzocchi.com</a:t>
+            </a:r>
+            <a:endParaRPr lang="en-US" sz="1100" dirty="0"/>
           </a:p>
         </p:txBody>
       </p:sp>
@@ -1431,7 +1750,47 @@
         <p:spPr>
           <a:xfrm>
             <a:off x="0" y="0"/>
-            <a:ext cx="9144000" cy="54864"/>
+            <a:ext cx="9144000" cy="822960"/>
+          </a:xfrm>
+          <a:prstGeom prst="rect">
+            <a:avLst/>
+          </a:prstGeom>
+          <a:solidFill>
+            <a:srgbClr val="FFFFFF"/>
+          </a:solidFill>
+          <a:ln/>
+        </p:spPr>
+      </p:sp>
+      <p:sp>
+        <p:nvSpPr>
+          <p:cNvPr id="3" name="Shape 1"/>
+          <p:cNvSpPr/>
+          <p:nvPr/>
+        </p:nvSpPr>
+        <p:spPr>
+          <a:xfrm>
+            <a:off x="0" y="804672"/>
+            <a:ext cx="9144000" cy="27432"/>
+          </a:xfrm>
+          <a:prstGeom prst="rect">
+            <a:avLst/>
+          </a:prstGeom>
+          <a:solidFill>
+            <a:srgbClr val="E5E2DC"/>
+          </a:solidFill>
+          <a:ln/>
+        </p:spPr>
+      </p:sp>
+      <p:sp>
+        <p:nvSpPr>
+          <p:cNvPr id="4" name="Shape 2"/>
+          <p:cNvSpPr/>
+          <p:nvPr/>
+        </p:nvSpPr>
+        <p:spPr>
+          <a:xfrm>
+            <a:off x="548640" y="201168"/>
+            <a:ext cx="54864" cy="420624"/>
           </a:xfrm>
           <a:prstGeom prst="rect">
             <a:avLst/>
@@ -1444,14 +1803,14 @@
       </p:sp>
       <p:sp>
         <p:nvSpPr>
-          <p:cNvPr id="3" name="Text 1"/>
-          <p:cNvSpPr/>
-          <p:nvPr/>
-        </p:nvSpPr>
-        <p:spPr>
-          <a:xfrm>
-            <a:off x="7772400" y="4709160"/>
-            <a:ext cx="1097280" cy="320040"/>
+          <p:cNvPr id="5" name="Text 3"/>
+          <p:cNvSpPr/>
+          <p:nvPr/>
+        </p:nvSpPr>
+        <p:spPr>
+          <a:xfrm>
+            <a:off x="777240" y="137160"/>
+            <a:ext cx="7772400" cy="548640"/>
           </a:xfrm>
           <a:prstGeom prst="rect">
             <a:avLst/>
@@ -1460,37 +1819,37 @@
           <a:ln/>
         </p:spPr>
         <p:txBody>
-          <a:bodyPr wrap="square" rtlCol="0" anchor="ctr"/>
-          <a:lstStyle/>
-          <a:p>
-            <a:pPr algn="r" indent="0" marL="0">
+          <a:bodyPr wrap="square" lIns="0" tIns="0" rIns="0" bIns="0" rtlCol="0" anchor="ctr"/>
+          <a:lstStyle/>
+          <a:p>
+            <a:pPr indent="0" marL="0">
               <a:buNone/>
             </a:pPr>
             <a:r>
-              <a:rPr lang="en-US" sz="900" dirty="0">
-                <a:solidFill>
-                  <a:srgbClr val="6B6660"/>
-                </a:solidFill>
-                <a:latin typeface="Calibri" pitchFamily="34" charset="0"/>
-                <a:ea typeface="Calibri" pitchFamily="34" charset="-122"/>
-                <a:cs typeface="Calibri" pitchFamily="34" charset="-120"/>
-              </a:rPr>
-              <a:t>2 / 5</a:t>
-            </a:r>
-            <a:endParaRPr lang="en-US" sz="900" dirty="0"/>
-          </a:p>
-        </p:txBody>
-      </p:sp>
-      <p:sp>
-        <p:nvSpPr>
-          <p:cNvPr id="4" name="Shape 2"/>
-          <p:cNvSpPr/>
-          <p:nvPr/>
-        </p:nvSpPr>
-        <p:spPr>
-          <a:xfrm>
-            <a:off x="1371600" y="914400"/>
-            <a:ext cx="6400800" cy="3200400"/>
+              <a:rPr lang="en-US" sz="2000" b="1" dirty="0">
+                <a:solidFill>
+                  <a:srgbClr val="1B2A4A"/>
+                </a:solidFill>
+                <a:latin typeface="Georgia" pitchFamily="34" charset="0"/>
+                <a:ea typeface="Georgia" pitchFamily="34" charset="-122"/>
+                <a:cs typeface="Georgia" pitchFamily="34" charset="-120"/>
+              </a:rPr>
+              <a:t>Key Vocabulary</a:t>
+            </a:r>
+            <a:endParaRPr lang="en-US" sz="2000" dirty="0"/>
+          </a:p>
+        </p:txBody>
+      </p:sp>
+      <p:sp>
+        <p:nvSpPr>
+          <p:cNvPr id="6" name="Shape 4"/>
+          <p:cNvSpPr/>
+          <p:nvPr/>
+        </p:nvSpPr>
+        <p:spPr>
+          <a:xfrm>
+            <a:off x="731520" y="1051560"/>
+            <a:ext cx="3657600" cy="658368"/>
           </a:xfrm>
           <a:prstGeom prst="rect">
             <a:avLst/>
@@ -1498,12 +1857,7 @@
           <a:solidFill>
             <a:srgbClr val="FFFFFF"/>
           </a:solidFill>
-          <a:ln w="12700">
-            <a:solidFill>
-              <a:srgbClr val="E5E2DC"/>
-            </a:solidFill>
-            <a:prstDash val="solid"/>
-          </a:ln>
+          <a:ln/>
           <a:effectLst>
             <a:outerShdw sx="100000" sy="100000" kx="0" ky="0" algn="bl" rotWithShape="0" blurRad="50800" dist="25400" dir="8100000">
               <a:srgbClr val="000000">
@@ -1515,14 +1869,14 @@
       </p:sp>
       <p:sp>
         <p:nvSpPr>
-          <p:cNvPr id="5" name="Shape 3"/>
-          <p:cNvSpPr/>
-          <p:nvPr/>
-        </p:nvSpPr>
-        <p:spPr>
-          <a:xfrm>
-            <a:off x="1371600" y="914400"/>
-            <a:ext cx="91440" cy="3200400"/>
+          <p:cNvPr id="7" name="Shape 5"/>
+          <p:cNvSpPr/>
+          <p:nvPr/>
+        </p:nvSpPr>
+        <p:spPr>
+          <a:xfrm>
+            <a:off x="731520" y="1051560"/>
+            <a:ext cx="54864" cy="658368"/>
           </a:xfrm>
           <a:prstGeom prst="rect">
             <a:avLst/>
@@ -1535,14 +1889,14 @@
       </p:sp>
       <p:sp>
         <p:nvSpPr>
-          <p:cNvPr id="6" name="Text 4"/>
-          <p:cNvSpPr/>
-          <p:nvPr/>
-        </p:nvSpPr>
-        <p:spPr>
-          <a:xfrm>
-            <a:off x="1828800" y="1097280"/>
-            <a:ext cx="5669280" cy="640080"/>
+          <p:cNvPr id="8" name="Text 6"/>
+          <p:cNvSpPr/>
+          <p:nvPr/>
+        </p:nvSpPr>
+        <p:spPr>
+          <a:xfrm>
+            <a:off x="914400" y="1051560"/>
+            <a:ext cx="1463040" cy="658368"/>
           </a:xfrm>
           <a:prstGeom prst="rect">
             <a:avLst/>
@@ -1551,14 +1905,14 @@
           <a:ln/>
         </p:spPr>
         <p:txBody>
-          <a:bodyPr wrap="square" rtlCol="0" anchor="ctr"/>
+          <a:bodyPr wrap="square" lIns="0" tIns="0" rIns="0" bIns="0" rtlCol="0" anchor="ctr"/>
           <a:lstStyle/>
           <a:p>
             <a:pPr indent="0" marL="0">
               <a:buNone/>
             </a:pPr>
             <a:r>
-              <a:rPr lang="en-US" sz="2400" b="1" dirty="0">
+              <a:rPr lang="en-US" sz="1300" b="1" dirty="0">
                 <a:solidFill>
                   <a:srgbClr val="1B2A4A"/>
                 </a:solidFill>
@@ -1566,22 +1920,22 @@
                 <a:ea typeface="Georgia" pitchFamily="34" charset="-122"/>
                 <a:cs typeface="Georgia" pitchFamily="34" charset="-120"/>
               </a:rPr>
-              <a:t>Our Place in Space</a:t>
-            </a:r>
-            <a:endParaRPr lang="en-US" sz="2400" dirty="0"/>
-          </a:p>
-        </p:txBody>
-      </p:sp>
-      <p:sp>
-        <p:nvSpPr>
-          <p:cNvPr id="7" name="Text 5"/>
-          <p:cNvSpPr/>
-          <p:nvPr/>
-        </p:nvSpPr>
-        <p:spPr>
-          <a:xfrm>
-            <a:off x="1828800" y="1828800"/>
-            <a:ext cx="5669280" cy="2011680"/>
+              <a:t>Rotation</a:t>
+            </a:r>
+            <a:endParaRPr lang="en-US" sz="1300" dirty="0"/>
+          </a:p>
+        </p:txBody>
+      </p:sp>
+      <p:sp>
+        <p:nvSpPr>
+          <p:cNvPr id="9" name="Text 7"/>
+          <p:cNvSpPr/>
+          <p:nvPr/>
+        </p:nvSpPr>
+        <p:spPr>
+          <a:xfrm>
+            <a:off x="2377440" y="1051560"/>
+            <a:ext cx="1920240" cy="658368"/>
           </a:xfrm>
           <a:prstGeom prst="rect">
             <a:avLst/>
@@ -1590,27 +1944,649 @@
           <a:ln/>
         </p:spPr>
         <p:txBody>
-          <a:bodyPr wrap="square" rtlCol="0" anchor="t"/>
+          <a:bodyPr wrap="square" lIns="0" tIns="0" rIns="0" bIns="0" rtlCol="0" anchor="ctr"/>
           <a:lstStyle/>
           <a:p>
             <a:pPr indent="0" marL="0">
-              <a:lnSpc>
-                <a:spcPct val="130000"/>
-              </a:lnSpc>
               <a:buNone/>
             </a:pPr>
             <a:r>
-              <a:rPr lang="en-US" sz="1500" dirty="0">
-                <a:solidFill>
-                  <a:srgbClr val="3D3A36"/>
+              <a:rPr lang="en-US" sz="1100" dirty="0">
+                <a:solidFill>
+                  <a:srgbClr val="6B6660"/>
                 </a:solidFill>
                 <a:latin typeface="Calibri" pitchFamily="34" charset="0"/>
                 <a:ea typeface="Calibri" pitchFamily="34" charset="-122"/>
                 <a:cs typeface="Calibri" pitchFamily="34" charset="-120"/>
               </a:rPr>
-              <a:t>Earth orbits the Sun (one orbit = one year = 365.25 days). The Moon orbits Earth (one orbit = ~27.3 days). The Sun is a star — a massive ball of hydrogen and helium undergoing nuclear fusion. It provides the light and heat that makes life possible on Earth.</a:t>
-            </a:r>
-            <a:endParaRPr lang="en-US" sz="1500" dirty="0"/>
+              <a:t>Spinning on its own axis</a:t>
+            </a:r>
+            <a:endParaRPr lang="en-US" sz="1100" dirty="0"/>
+          </a:p>
+        </p:txBody>
+      </p:sp>
+      <p:sp>
+        <p:nvSpPr>
+          <p:cNvPr id="10" name="Shape 8"/>
+          <p:cNvSpPr/>
+          <p:nvPr/>
+        </p:nvSpPr>
+        <p:spPr>
+          <a:xfrm>
+            <a:off x="4754880" y="1051560"/>
+            <a:ext cx="3657600" cy="658368"/>
+          </a:xfrm>
+          <a:prstGeom prst="rect">
+            <a:avLst/>
+          </a:prstGeom>
+          <a:solidFill>
+            <a:srgbClr val="FFFFFF"/>
+          </a:solidFill>
+          <a:ln/>
+          <a:effectLst>
+            <a:outerShdw sx="100000" sy="100000" kx="0" ky="0" algn="bl" rotWithShape="0" blurRad="50800" dist="25400" dir="8100000">
+              <a:srgbClr val="000000">
+                <a:alpha val="10000"/>
+              </a:srgbClr>
+            </a:outerShdw>
+          </a:effectLst>
+        </p:spPr>
+      </p:sp>
+      <p:sp>
+        <p:nvSpPr>
+          <p:cNvPr id="11" name="Shape 9"/>
+          <p:cNvSpPr/>
+          <p:nvPr/>
+        </p:nvSpPr>
+        <p:spPr>
+          <a:xfrm>
+            <a:off x="4754880" y="1051560"/>
+            <a:ext cx="54864" cy="658368"/>
+          </a:xfrm>
+          <a:prstGeom prst="rect">
+            <a:avLst/>
+          </a:prstGeom>
+          <a:solidFill>
+            <a:srgbClr val="2A9D8F"/>
+          </a:solidFill>
+          <a:ln/>
+        </p:spPr>
+      </p:sp>
+      <p:sp>
+        <p:nvSpPr>
+          <p:cNvPr id="12" name="Text 10"/>
+          <p:cNvSpPr/>
+          <p:nvPr/>
+        </p:nvSpPr>
+        <p:spPr>
+          <a:xfrm>
+            <a:off x="4937760" y="1051560"/>
+            <a:ext cx="1463040" cy="658368"/>
+          </a:xfrm>
+          <a:prstGeom prst="rect">
+            <a:avLst/>
+          </a:prstGeom>
+          <a:noFill/>
+          <a:ln/>
+        </p:spPr>
+        <p:txBody>
+          <a:bodyPr wrap="square" lIns="0" tIns="0" rIns="0" bIns="0" rtlCol="0" anchor="ctr"/>
+          <a:lstStyle/>
+          <a:p>
+            <a:pPr indent="0" marL="0">
+              <a:buNone/>
+            </a:pPr>
+            <a:r>
+              <a:rPr lang="en-US" sz="1300" b="1" dirty="0">
+                <a:solidFill>
+                  <a:srgbClr val="1B2A4A"/>
+                </a:solidFill>
+                <a:latin typeface="Georgia" pitchFamily="34" charset="0"/>
+                <a:ea typeface="Georgia" pitchFamily="34" charset="-122"/>
+                <a:cs typeface="Georgia" pitchFamily="34" charset="-120"/>
+              </a:rPr>
+              <a:t>Revolution</a:t>
+            </a:r>
+            <a:endParaRPr lang="en-US" sz="1300" dirty="0"/>
+          </a:p>
+        </p:txBody>
+      </p:sp>
+      <p:sp>
+        <p:nvSpPr>
+          <p:cNvPr id="13" name="Text 11"/>
+          <p:cNvSpPr/>
+          <p:nvPr/>
+        </p:nvSpPr>
+        <p:spPr>
+          <a:xfrm>
+            <a:off x="6400800" y="1051560"/>
+            <a:ext cx="1920240" cy="658368"/>
+          </a:xfrm>
+          <a:prstGeom prst="rect">
+            <a:avLst/>
+          </a:prstGeom>
+          <a:noFill/>
+          <a:ln/>
+        </p:spPr>
+        <p:txBody>
+          <a:bodyPr wrap="square" lIns="0" tIns="0" rIns="0" bIns="0" rtlCol="0" anchor="ctr"/>
+          <a:lstStyle/>
+          <a:p>
+            <a:pPr indent="0" marL="0">
+              <a:buNone/>
+            </a:pPr>
+            <a:r>
+              <a:rPr lang="en-US" sz="1100" dirty="0">
+                <a:solidFill>
+                  <a:srgbClr val="6B6660"/>
+                </a:solidFill>
+                <a:latin typeface="Calibri" pitchFamily="34" charset="0"/>
+                <a:ea typeface="Calibri" pitchFamily="34" charset="-122"/>
+                <a:cs typeface="Calibri" pitchFamily="34" charset="-120"/>
+              </a:rPr>
+              <a:t>Orbiting around another object</a:t>
+            </a:r>
+            <a:endParaRPr lang="en-US" sz="1100" dirty="0"/>
+          </a:p>
+        </p:txBody>
+      </p:sp>
+      <p:sp>
+        <p:nvSpPr>
+          <p:cNvPr id="14" name="Shape 12"/>
+          <p:cNvSpPr/>
+          <p:nvPr/>
+        </p:nvSpPr>
+        <p:spPr>
+          <a:xfrm>
+            <a:off x="731520" y="1819656"/>
+            <a:ext cx="3657600" cy="658368"/>
+          </a:xfrm>
+          <a:prstGeom prst="rect">
+            <a:avLst/>
+          </a:prstGeom>
+          <a:solidFill>
+            <a:srgbClr val="FFFFFF"/>
+          </a:solidFill>
+          <a:ln/>
+          <a:effectLst>
+            <a:outerShdw sx="100000" sy="100000" kx="0" ky="0" algn="bl" rotWithShape="0" blurRad="50800" dist="25400" dir="8100000">
+              <a:srgbClr val="000000">
+                <a:alpha val="10000"/>
+              </a:srgbClr>
+            </a:outerShdw>
+          </a:effectLst>
+        </p:spPr>
+      </p:sp>
+      <p:sp>
+        <p:nvSpPr>
+          <p:cNvPr id="15" name="Shape 13"/>
+          <p:cNvSpPr/>
+          <p:nvPr/>
+        </p:nvSpPr>
+        <p:spPr>
+          <a:xfrm>
+            <a:off x="731520" y="1819656"/>
+            <a:ext cx="54864" cy="658368"/>
+          </a:xfrm>
+          <a:prstGeom prst="rect">
+            <a:avLst/>
+          </a:prstGeom>
+          <a:solidFill>
+            <a:srgbClr val="2A9D8F"/>
+          </a:solidFill>
+          <a:ln/>
+        </p:spPr>
+      </p:sp>
+      <p:sp>
+        <p:nvSpPr>
+          <p:cNvPr id="16" name="Text 14"/>
+          <p:cNvSpPr/>
+          <p:nvPr/>
+        </p:nvSpPr>
+        <p:spPr>
+          <a:xfrm>
+            <a:off x="914400" y="1819656"/>
+            <a:ext cx="1463040" cy="658368"/>
+          </a:xfrm>
+          <a:prstGeom prst="rect">
+            <a:avLst/>
+          </a:prstGeom>
+          <a:noFill/>
+          <a:ln/>
+        </p:spPr>
+        <p:txBody>
+          <a:bodyPr wrap="square" lIns="0" tIns="0" rIns="0" bIns="0" rtlCol="0" anchor="ctr"/>
+          <a:lstStyle/>
+          <a:p>
+            <a:pPr indent="0" marL="0">
+              <a:buNone/>
+            </a:pPr>
+            <a:r>
+              <a:rPr lang="en-US" sz="1300" b="1" dirty="0">
+                <a:solidFill>
+                  <a:srgbClr val="1B2A4A"/>
+                </a:solidFill>
+                <a:latin typeface="Georgia" pitchFamily="34" charset="0"/>
+                <a:ea typeface="Georgia" pitchFamily="34" charset="-122"/>
+                <a:cs typeface="Georgia" pitchFamily="34" charset="-120"/>
+              </a:rPr>
+              <a:t>Axis</a:t>
+            </a:r>
+            <a:endParaRPr lang="en-US" sz="1300" dirty="0"/>
+          </a:p>
+        </p:txBody>
+      </p:sp>
+      <p:sp>
+        <p:nvSpPr>
+          <p:cNvPr id="17" name="Text 15"/>
+          <p:cNvSpPr/>
+          <p:nvPr/>
+        </p:nvSpPr>
+        <p:spPr>
+          <a:xfrm>
+            <a:off x="2377440" y="1819656"/>
+            <a:ext cx="1920240" cy="658368"/>
+          </a:xfrm>
+          <a:prstGeom prst="rect">
+            <a:avLst/>
+          </a:prstGeom>
+          <a:noFill/>
+          <a:ln/>
+        </p:spPr>
+        <p:txBody>
+          <a:bodyPr wrap="square" lIns="0" tIns="0" rIns="0" bIns="0" rtlCol="0" anchor="ctr"/>
+          <a:lstStyle/>
+          <a:p>
+            <a:pPr indent="0" marL="0">
+              <a:buNone/>
+            </a:pPr>
+            <a:r>
+              <a:rPr lang="en-US" sz="1100" dirty="0">
+                <a:solidFill>
+                  <a:srgbClr val="6B6660"/>
+                </a:solidFill>
+                <a:latin typeface="Calibri" pitchFamily="34" charset="0"/>
+                <a:ea typeface="Calibri" pitchFamily="34" charset="-122"/>
+                <a:cs typeface="Calibri" pitchFamily="34" charset="-120"/>
+              </a:rPr>
+              <a:t>Imaginary line Earth spins around</a:t>
+            </a:r>
+            <a:endParaRPr lang="en-US" sz="1100" dirty="0"/>
+          </a:p>
+        </p:txBody>
+      </p:sp>
+      <p:sp>
+        <p:nvSpPr>
+          <p:cNvPr id="18" name="Shape 16"/>
+          <p:cNvSpPr/>
+          <p:nvPr/>
+        </p:nvSpPr>
+        <p:spPr>
+          <a:xfrm>
+            <a:off x="4754880" y="1819656"/>
+            <a:ext cx="3657600" cy="658368"/>
+          </a:xfrm>
+          <a:prstGeom prst="rect">
+            <a:avLst/>
+          </a:prstGeom>
+          <a:solidFill>
+            <a:srgbClr val="FFFFFF"/>
+          </a:solidFill>
+          <a:ln/>
+          <a:effectLst>
+            <a:outerShdw sx="100000" sy="100000" kx="0" ky="0" algn="bl" rotWithShape="0" blurRad="50800" dist="25400" dir="8100000">
+              <a:srgbClr val="000000">
+                <a:alpha val="10000"/>
+              </a:srgbClr>
+            </a:outerShdw>
+          </a:effectLst>
+        </p:spPr>
+      </p:sp>
+      <p:sp>
+        <p:nvSpPr>
+          <p:cNvPr id="19" name="Shape 17"/>
+          <p:cNvSpPr/>
+          <p:nvPr/>
+        </p:nvSpPr>
+        <p:spPr>
+          <a:xfrm>
+            <a:off x="4754880" y="1819656"/>
+            <a:ext cx="54864" cy="658368"/>
+          </a:xfrm>
+          <a:prstGeom prst="rect">
+            <a:avLst/>
+          </a:prstGeom>
+          <a:solidFill>
+            <a:srgbClr val="2A9D8F"/>
+          </a:solidFill>
+          <a:ln/>
+        </p:spPr>
+      </p:sp>
+      <p:sp>
+        <p:nvSpPr>
+          <p:cNvPr id="20" name="Text 18"/>
+          <p:cNvSpPr/>
+          <p:nvPr/>
+        </p:nvSpPr>
+        <p:spPr>
+          <a:xfrm>
+            <a:off x="4937760" y="1819656"/>
+            <a:ext cx="1463040" cy="658368"/>
+          </a:xfrm>
+          <a:prstGeom prst="rect">
+            <a:avLst/>
+          </a:prstGeom>
+          <a:noFill/>
+          <a:ln/>
+        </p:spPr>
+        <p:txBody>
+          <a:bodyPr wrap="square" lIns="0" tIns="0" rIns="0" bIns="0" rtlCol="0" anchor="ctr"/>
+          <a:lstStyle/>
+          <a:p>
+            <a:pPr indent="0" marL="0">
+              <a:buNone/>
+            </a:pPr>
+            <a:r>
+              <a:rPr lang="en-US" sz="1300" b="1" dirty="0">
+                <a:solidFill>
+                  <a:srgbClr val="1B2A4A"/>
+                </a:solidFill>
+                <a:latin typeface="Georgia" pitchFamily="34" charset="0"/>
+                <a:ea typeface="Georgia" pitchFamily="34" charset="-122"/>
+                <a:cs typeface="Georgia" pitchFamily="34" charset="-120"/>
+              </a:rPr>
+              <a:t>Eclipse</a:t>
+            </a:r>
+            <a:endParaRPr lang="en-US" sz="1300" dirty="0"/>
+          </a:p>
+        </p:txBody>
+      </p:sp>
+      <p:sp>
+        <p:nvSpPr>
+          <p:cNvPr id="21" name="Text 19"/>
+          <p:cNvSpPr/>
+          <p:nvPr/>
+        </p:nvSpPr>
+        <p:spPr>
+          <a:xfrm>
+            <a:off x="6400800" y="1819656"/>
+            <a:ext cx="1920240" cy="658368"/>
+          </a:xfrm>
+          <a:prstGeom prst="rect">
+            <a:avLst/>
+          </a:prstGeom>
+          <a:noFill/>
+          <a:ln/>
+        </p:spPr>
+        <p:txBody>
+          <a:bodyPr wrap="square" lIns="0" tIns="0" rIns="0" bIns="0" rtlCol="0" anchor="ctr"/>
+          <a:lstStyle/>
+          <a:p>
+            <a:pPr indent="0" marL="0">
+              <a:buNone/>
+            </a:pPr>
+            <a:r>
+              <a:rPr lang="en-US" sz="1100" dirty="0">
+                <a:solidFill>
+                  <a:srgbClr val="6B6660"/>
+                </a:solidFill>
+                <a:latin typeface="Calibri" pitchFamily="34" charset="0"/>
+                <a:ea typeface="Calibri" pitchFamily="34" charset="-122"/>
+                <a:cs typeface="Calibri" pitchFamily="34" charset="-120"/>
+              </a:rPr>
+              <a:t>When one body blocks light from another</a:t>
+            </a:r>
+            <a:endParaRPr lang="en-US" sz="1100" dirty="0"/>
+          </a:p>
+        </p:txBody>
+      </p:sp>
+      <p:sp>
+        <p:nvSpPr>
+          <p:cNvPr id="22" name="Shape 20"/>
+          <p:cNvSpPr/>
+          <p:nvPr/>
+        </p:nvSpPr>
+        <p:spPr>
+          <a:xfrm>
+            <a:off x="731520" y="2587752"/>
+            <a:ext cx="3657600" cy="658368"/>
+          </a:xfrm>
+          <a:prstGeom prst="rect">
+            <a:avLst/>
+          </a:prstGeom>
+          <a:solidFill>
+            <a:srgbClr val="FFFFFF"/>
+          </a:solidFill>
+          <a:ln/>
+          <a:effectLst>
+            <a:outerShdw sx="100000" sy="100000" kx="0" ky="0" algn="bl" rotWithShape="0" blurRad="50800" dist="25400" dir="8100000">
+              <a:srgbClr val="000000">
+                <a:alpha val="10000"/>
+              </a:srgbClr>
+            </a:outerShdw>
+          </a:effectLst>
+        </p:spPr>
+      </p:sp>
+      <p:sp>
+        <p:nvSpPr>
+          <p:cNvPr id="23" name="Shape 21"/>
+          <p:cNvSpPr/>
+          <p:nvPr/>
+        </p:nvSpPr>
+        <p:spPr>
+          <a:xfrm>
+            <a:off x="731520" y="2587752"/>
+            <a:ext cx="54864" cy="658368"/>
+          </a:xfrm>
+          <a:prstGeom prst="rect">
+            <a:avLst/>
+          </a:prstGeom>
+          <a:solidFill>
+            <a:srgbClr val="2A9D8F"/>
+          </a:solidFill>
+          <a:ln/>
+        </p:spPr>
+      </p:sp>
+      <p:sp>
+        <p:nvSpPr>
+          <p:cNvPr id="24" name="Text 22"/>
+          <p:cNvSpPr/>
+          <p:nvPr/>
+        </p:nvSpPr>
+        <p:spPr>
+          <a:xfrm>
+            <a:off x="914400" y="2587752"/>
+            <a:ext cx="1463040" cy="658368"/>
+          </a:xfrm>
+          <a:prstGeom prst="rect">
+            <a:avLst/>
+          </a:prstGeom>
+          <a:noFill/>
+          <a:ln/>
+        </p:spPr>
+        <p:txBody>
+          <a:bodyPr wrap="square" lIns="0" tIns="0" rIns="0" bIns="0" rtlCol="0" anchor="ctr"/>
+          <a:lstStyle/>
+          <a:p>
+            <a:pPr indent="0" marL="0">
+              <a:buNone/>
+            </a:pPr>
+            <a:r>
+              <a:rPr lang="en-US" sz="1300" b="1" dirty="0">
+                <a:solidFill>
+                  <a:srgbClr val="1B2A4A"/>
+                </a:solidFill>
+                <a:latin typeface="Georgia" pitchFamily="34" charset="0"/>
+                <a:ea typeface="Georgia" pitchFamily="34" charset="-122"/>
+                <a:cs typeface="Georgia" pitchFamily="34" charset="-120"/>
+              </a:rPr>
+              <a:t>Lunar</a:t>
+            </a:r>
+            <a:endParaRPr lang="en-US" sz="1300" dirty="0"/>
+          </a:p>
+        </p:txBody>
+      </p:sp>
+      <p:sp>
+        <p:nvSpPr>
+          <p:cNvPr id="25" name="Text 23"/>
+          <p:cNvSpPr/>
+          <p:nvPr/>
+        </p:nvSpPr>
+        <p:spPr>
+          <a:xfrm>
+            <a:off x="2377440" y="2587752"/>
+            <a:ext cx="1920240" cy="658368"/>
+          </a:xfrm>
+          <a:prstGeom prst="rect">
+            <a:avLst/>
+          </a:prstGeom>
+          <a:noFill/>
+          <a:ln/>
+        </p:spPr>
+        <p:txBody>
+          <a:bodyPr wrap="square" lIns="0" tIns="0" rIns="0" bIns="0" rtlCol="0" anchor="ctr"/>
+          <a:lstStyle/>
+          <a:p>
+            <a:pPr indent="0" marL="0">
+              <a:buNone/>
+            </a:pPr>
+            <a:r>
+              <a:rPr lang="en-US" sz="1100" dirty="0">
+                <a:solidFill>
+                  <a:srgbClr val="6B6660"/>
+                </a:solidFill>
+                <a:latin typeface="Calibri" pitchFamily="34" charset="0"/>
+                <a:ea typeface="Calibri" pitchFamily="34" charset="-122"/>
+                <a:cs typeface="Calibri" pitchFamily="34" charset="-120"/>
+              </a:rPr>
+              <a:t>Related to the Moon</a:t>
+            </a:r>
+            <a:endParaRPr lang="en-US" sz="1100" dirty="0"/>
+          </a:p>
+        </p:txBody>
+      </p:sp>
+      <p:sp>
+        <p:nvSpPr>
+          <p:cNvPr id="26" name="Shape 24"/>
+          <p:cNvSpPr/>
+          <p:nvPr/>
+        </p:nvSpPr>
+        <p:spPr>
+          <a:xfrm>
+            <a:off x="4754880" y="2587752"/>
+            <a:ext cx="3657600" cy="658368"/>
+          </a:xfrm>
+          <a:prstGeom prst="rect">
+            <a:avLst/>
+          </a:prstGeom>
+          <a:solidFill>
+            <a:srgbClr val="FFFFFF"/>
+          </a:solidFill>
+          <a:ln/>
+          <a:effectLst>
+            <a:outerShdw sx="100000" sy="100000" kx="0" ky="0" algn="bl" rotWithShape="0" blurRad="50800" dist="25400" dir="8100000">
+              <a:srgbClr val="000000">
+                <a:alpha val="10000"/>
+              </a:srgbClr>
+            </a:outerShdw>
+          </a:effectLst>
+        </p:spPr>
+      </p:sp>
+      <p:sp>
+        <p:nvSpPr>
+          <p:cNvPr id="27" name="Shape 25"/>
+          <p:cNvSpPr/>
+          <p:nvPr/>
+        </p:nvSpPr>
+        <p:spPr>
+          <a:xfrm>
+            <a:off x="4754880" y="2587752"/>
+            <a:ext cx="54864" cy="658368"/>
+          </a:xfrm>
+          <a:prstGeom prst="rect">
+            <a:avLst/>
+          </a:prstGeom>
+          <a:solidFill>
+            <a:srgbClr val="2A9D8F"/>
+          </a:solidFill>
+          <a:ln/>
+        </p:spPr>
+      </p:sp>
+      <p:sp>
+        <p:nvSpPr>
+          <p:cNvPr id="28" name="Text 26"/>
+          <p:cNvSpPr/>
+          <p:nvPr/>
+        </p:nvSpPr>
+        <p:spPr>
+          <a:xfrm>
+            <a:off x="4937760" y="2587752"/>
+            <a:ext cx="1463040" cy="658368"/>
+          </a:xfrm>
+          <a:prstGeom prst="rect">
+            <a:avLst/>
+          </a:prstGeom>
+          <a:noFill/>
+          <a:ln/>
+        </p:spPr>
+        <p:txBody>
+          <a:bodyPr wrap="square" lIns="0" tIns="0" rIns="0" bIns="0" rtlCol="0" anchor="ctr"/>
+          <a:lstStyle/>
+          <a:p>
+            <a:pPr indent="0" marL="0">
+              <a:buNone/>
+            </a:pPr>
+            <a:r>
+              <a:rPr lang="en-US" sz="1300" b="1" dirty="0">
+                <a:solidFill>
+                  <a:srgbClr val="1B2A4A"/>
+                </a:solidFill>
+                <a:latin typeface="Georgia" pitchFamily="34" charset="0"/>
+                <a:ea typeface="Georgia" pitchFamily="34" charset="-122"/>
+                <a:cs typeface="Georgia" pitchFamily="34" charset="-120"/>
+              </a:rPr>
+              <a:t>Tides</a:t>
+            </a:r>
+            <a:endParaRPr lang="en-US" sz="1300" dirty="0"/>
+          </a:p>
+        </p:txBody>
+      </p:sp>
+      <p:sp>
+        <p:nvSpPr>
+          <p:cNvPr id="29" name="Text 27"/>
+          <p:cNvSpPr/>
+          <p:nvPr/>
+        </p:nvSpPr>
+        <p:spPr>
+          <a:xfrm>
+            <a:off x="6400800" y="2587752"/>
+            <a:ext cx="1920240" cy="658368"/>
+          </a:xfrm>
+          <a:prstGeom prst="rect">
+            <a:avLst/>
+          </a:prstGeom>
+          <a:noFill/>
+          <a:ln/>
+        </p:spPr>
+        <p:txBody>
+          <a:bodyPr wrap="square" lIns="0" tIns="0" rIns="0" bIns="0" rtlCol="0" anchor="ctr"/>
+          <a:lstStyle/>
+          <a:p>
+            <a:pPr indent="0" marL="0">
+              <a:buNone/>
+            </a:pPr>
+            <a:r>
+              <a:rPr lang="en-US" sz="1100" dirty="0">
+                <a:solidFill>
+                  <a:srgbClr val="6B6660"/>
+                </a:solidFill>
+                <a:latin typeface="Calibri" pitchFamily="34" charset="0"/>
+                <a:ea typeface="Calibri" pitchFamily="34" charset="-122"/>
+                <a:cs typeface="Calibri" pitchFamily="34" charset="-120"/>
+              </a:rPr>
+              <a:t>Rise and fall of sea level (caused by Moon's gravity)</a:t>
+            </a:r>
+            <a:endParaRPr lang="en-US" sz="1100" dirty="0"/>
           </a:p>
         </p:txBody>
       </p:sp>
@@ -1655,7 +2631,47 @@
         <p:spPr>
           <a:xfrm>
             <a:off x="0" y="0"/>
-            <a:ext cx="9144000" cy="54864"/>
+            <a:ext cx="9144000" cy="822960"/>
+          </a:xfrm>
+          <a:prstGeom prst="rect">
+            <a:avLst/>
+          </a:prstGeom>
+          <a:solidFill>
+            <a:srgbClr val="FFFFFF"/>
+          </a:solidFill>
+          <a:ln/>
+        </p:spPr>
+      </p:sp>
+      <p:sp>
+        <p:nvSpPr>
+          <p:cNvPr id="3" name="Shape 1"/>
+          <p:cNvSpPr/>
+          <p:nvPr/>
+        </p:nvSpPr>
+        <p:spPr>
+          <a:xfrm>
+            <a:off x="0" y="804672"/>
+            <a:ext cx="9144000" cy="27432"/>
+          </a:xfrm>
+          <a:prstGeom prst="rect">
+            <a:avLst/>
+          </a:prstGeom>
+          <a:solidFill>
+            <a:srgbClr val="E5E2DC"/>
+          </a:solidFill>
+          <a:ln/>
+        </p:spPr>
+      </p:sp>
+      <p:sp>
+        <p:nvSpPr>
+          <p:cNvPr id="4" name="Shape 2"/>
+          <p:cNvSpPr/>
+          <p:nvPr/>
+        </p:nvSpPr>
+        <p:spPr>
+          <a:xfrm>
+            <a:off x="548640" y="201168"/>
+            <a:ext cx="54864" cy="420624"/>
           </a:xfrm>
           <a:prstGeom prst="rect">
             <a:avLst/>
@@ -1668,14 +2684,14 @@
       </p:sp>
       <p:sp>
         <p:nvSpPr>
-          <p:cNvPr id="3" name="Text 1"/>
-          <p:cNvSpPr/>
-          <p:nvPr/>
-        </p:nvSpPr>
-        <p:spPr>
-          <a:xfrm>
-            <a:off x="7772400" y="4709160"/>
-            <a:ext cx="1097280" cy="320040"/>
+          <p:cNvPr id="5" name="Text 3"/>
+          <p:cNvSpPr/>
+          <p:nvPr/>
+        </p:nvSpPr>
+        <p:spPr>
+          <a:xfrm>
+            <a:off x="777240" y="137160"/>
+            <a:ext cx="7772400" cy="548640"/>
           </a:xfrm>
           <a:prstGeom prst="rect">
             <a:avLst/>
@@ -1684,53 +2700,14 @@
           <a:ln/>
         </p:spPr>
         <p:txBody>
-          <a:bodyPr wrap="square" rtlCol="0" anchor="ctr"/>
-          <a:lstStyle/>
-          <a:p>
-            <a:pPr algn="r" indent="0" marL="0">
-              <a:buNone/>
-            </a:pPr>
-            <a:r>
-              <a:rPr lang="en-US" sz="900" dirty="0">
-                <a:solidFill>
-                  <a:srgbClr val="6B6660"/>
-                </a:solidFill>
-                <a:latin typeface="Calibri" pitchFamily="34" charset="0"/>
-                <a:ea typeface="Calibri" pitchFamily="34" charset="-122"/>
-                <a:cs typeface="Calibri" pitchFamily="34" charset="-120"/>
-              </a:rPr>
-              <a:t>3 / 5</a:t>
-            </a:r>
-            <a:endParaRPr lang="en-US" sz="900" dirty="0"/>
-          </a:p>
-        </p:txBody>
-      </p:sp>
-      <p:sp>
-        <p:nvSpPr>
-          <p:cNvPr id="4" name="Text 2"/>
-          <p:cNvSpPr/>
-          <p:nvPr/>
-        </p:nvSpPr>
-        <p:spPr>
-          <a:xfrm>
-            <a:off x="457200" y="274320"/>
-            <a:ext cx="8229600" cy="640080"/>
-          </a:xfrm>
-          <a:prstGeom prst="rect">
-            <a:avLst/>
-          </a:prstGeom>
-          <a:noFill/>
-          <a:ln/>
-        </p:spPr>
-        <p:txBody>
-          <a:bodyPr wrap="square" rtlCol="0" anchor="ctr"/>
+          <a:bodyPr wrap="square" lIns="0" tIns="0" rIns="0" bIns="0" rtlCol="0" anchor="ctr"/>
           <a:lstStyle/>
           <a:p>
             <a:pPr indent="0" marL="0">
               <a:buNone/>
             </a:pPr>
             <a:r>
-              <a:rPr lang="en-US" sz="2600" b="1" dirty="0">
+              <a:rPr lang="en-US" sz="2000" b="1" dirty="0">
                 <a:solidFill>
                   <a:srgbClr val="1B2A4A"/>
                 </a:solidFill>
@@ -1738,136 +2715,9 @@
                 <a:ea typeface="Georgia" pitchFamily="34" charset="-122"/>
                 <a:cs typeface="Georgia" pitchFamily="34" charset="-120"/>
               </a:rPr>
-              <a:t>Earth's Orbit</a:t>
-            </a:r>
-            <a:endParaRPr lang="en-US" sz="2600" dirty="0"/>
-          </a:p>
-        </p:txBody>
-      </p:sp>
-      <p:sp>
-        <p:nvSpPr>
-          <p:cNvPr id="5" name="Text 3"/>
-          <p:cNvSpPr/>
-          <p:nvPr/>
-        </p:nvSpPr>
-        <p:spPr>
-          <a:xfrm>
-            <a:off x="457200" y="1188720"/>
-            <a:ext cx="3840480" cy="3474720"/>
-          </a:xfrm>
-          <a:prstGeom prst="rect">
-            <a:avLst/>
-          </a:prstGeom>
-          <a:noFill/>
-          <a:ln/>
-        </p:spPr>
-        <p:txBody>
-          <a:bodyPr wrap="square" rtlCol="0" anchor="t"/>
-          <a:lstStyle/>
-          <a:p>
-            <a:pPr marL="342900" indent="-342900">
-              <a:spcAft>
-                <a:spcPts val="600"/>
-              </a:spcAft>
-              <a:buSzPct val="100000"/>
-              <a:buChar char="•"/>
-            </a:pPr>
-            <a:r>
-              <a:rPr lang="en-US" sz="1400" dirty="0">
-                <a:solidFill>
-                  <a:srgbClr val="3D3A36"/>
-                </a:solidFill>
-                <a:latin typeface="Calibri" pitchFamily="34" charset="0"/>
-                <a:ea typeface="Calibri" pitchFamily="34" charset="-122"/>
-                <a:cs typeface="Calibri" pitchFamily="34" charset="-120"/>
-              </a:rPr>
-              <a:t>Earth orbits the Sun in an elliptical (slightly oval) path</a:t>
-            </a:r>
-            <a:endParaRPr lang="en-US" sz="1400" dirty="0"/>
-          </a:p>
-          <a:p>
-            <a:pPr marL="342900" indent="-342900">
-              <a:spcAft>
-                <a:spcPts val="600"/>
-              </a:spcAft>
-              <a:buSzPct val="100000"/>
-              <a:buChar char="•"/>
-            </a:pPr>
-            <a:r>
-              <a:rPr lang="en-US" sz="1400" dirty="0">
-                <a:solidFill>
-                  <a:srgbClr val="3D3A36"/>
-                </a:solidFill>
-                <a:latin typeface="Calibri" pitchFamily="34" charset="0"/>
-                <a:ea typeface="Calibri" pitchFamily="34" charset="-122"/>
-                <a:cs typeface="Calibri" pitchFamily="34" charset="-120"/>
-              </a:rPr>
-              <a:t>Distance: ~150 million km from the Sun</a:t>
-            </a:r>
-            <a:endParaRPr lang="en-US" sz="1400" dirty="0"/>
-          </a:p>
-          <a:p>
-            <a:pPr marL="342900" indent="-342900">
-              <a:spcAft>
-                <a:spcPts val="600"/>
-              </a:spcAft>
-              <a:buSzPct val="100000"/>
-              <a:buChar char="•"/>
-            </a:pPr>
-            <a:r>
-              <a:rPr lang="en-US" sz="1400" dirty="0">
-                <a:solidFill>
-                  <a:srgbClr val="3D3A36"/>
-                </a:solidFill>
-                <a:latin typeface="Calibri" pitchFamily="34" charset="0"/>
-                <a:ea typeface="Calibri" pitchFamily="34" charset="-122"/>
-                <a:cs typeface="Calibri" pitchFamily="34" charset="-120"/>
-              </a:rPr>
-              <a:t>One orbit = 365.25 days (the extra 0.25 gives us a leap year every 4 years)</a:t>
-            </a:r>
-            <a:endParaRPr lang="en-US" sz="1400" dirty="0"/>
-          </a:p>
-          <a:p>
-            <a:pPr marL="342900" indent="-342900">
-              <a:spcAft>
-                <a:spcPts val="600"/>
-              </a:spcAft>
-              <a:buSzPct val="100000"/>
-              <a:buChar char="•"/>
-            </a:pPr>
-            <a:r>
-              <a:rPr lang="en-US" sz="1400" dirty="0">
-                <a:solidFill>
-                  <a:srgbClr val="3D3A36"/>
-                </a:solidFill>
-                <a:latin typeface="Calibri" pitchFamily="34" charset="0"/>
-                <a:ea typeface="Calibri" pitchFamily="34" charset="-122"/>
-                <a:cs typeface="Calibri" pitchFamily="34" charset="-120"/>
-              </a:rPr>
-              <a:t>Earth also rotates on its axis once every 24 hours</a:t>
-            </a:r>
-            <a:endParaRPr lang="en-US" sz="1400" dirty="0"/>
-          </a:p>
-          <a:p>
-            <a:pPr marL="342900" indent="-342900">
-              <a:spcAft>
-                <a:spcPts val="600"/>
-              </a:spcAft>
-              <a:buSzPct val="100000"/>
-              <a:buChar char="•"/>
-            </a:pPr>
-            <a:r>
-              <a:rPr lang="en-US" sz="1400" dirty="0">
-                <a:solidFill>
-                  <a:srgbClr val="3D3A36"/>
-                </a:solidFill>
-                <a:latin typeface="Calibri" pitchFamily="34" charset="0"/>
-                <a:ea typeface="Calibri" pitchFamily="34" charset="-122"/>
-                <a:cs typeface="Calibri" pitchFamily="34" charset="-120"/>
-              </a:rPr>
-              <a:t>The axis is tilted at 23.5° — this causes the seasons</a:t>
-            </a:r>
-            <a:endParaRPr lang="en-US" sz="1400" dirty="0"/>
+              <a:t>Key Facts</a:t>
+            </a:r>
+            <a:endParaRPr lang="en-US" sz="2000" dirty="0"/>
           </a:p>
         </p:txBody>
       </p:sp>
@@ -1879,8 +2729,8 @@
         </p:nvSpPr>
         <p:spPr>
           <a:xfrm>
-            <a:off x="4846320" y="1188720"/>
-            <a:ext cx="3840480" cy="3474720"/>
+            <a:off x="731520" y="1280160"/>
+            <a:ext cx="2377440" cy="2377440"/>
           </a:xfrm>
           <a:prstGeom prst="rect">
             <a:avLst/>
@@ -1888,12 +2738,7 @@
           <a:solidFill>
             <a:srgbClr val="FFFFFF"/>
           </a:solidFill>
-          <a:ln w="12700">
-            <a:solidFill>
-              <a:srgbClr val="E5E2DC"/>
-            </a:solidFill>
-            <a:prstDash val="solid"/>
-          </a:ln>
+          <a:ln/>
           <a:effectLst>
             <a:outerShdw sx="100000" sy="100000" kx="0" ky="0" algn="bl" rotWithShape="0" blurRad="50800" dist="25400" dir="8100000">
               <a:srgbClr val="000000">
@@ -1905,23 +2750,42 @@
       </p:sp>
       <p:sp>
         <p:nvSpPr>
-          <p:cNvPr id="7" name="Shape 5"/>
-          <p:cNvSpPr/>
-          <p:nvPr/>
-        </p:nvSpPr>
-        <p:spPr>
-          <a:xfrm>
-            <a:off x="4846320" y="1188720"/>
-            <a:ext cx="3840480" cy="54864"/>
-          </a:xfrm>
-          <a:prstGeom prst="rect">
-            <a:avLst/>
-          </a:prstGeom>
-          <a:solidFill>
-            <a:srgbClr val="2A9D8F"/>
-          </a:solidFill>
-          <a:ln/>
-        </p:spPr>
+          <p:cNvPr id="7" name="Text 5"/>
+          <p:cNvSpPr/>
+          <p:nvPr/>
+        </p:nvSpPr>
+        <p:spPr>
+          <a:xfrm>
+            <a:off x="731520" y="1463040"/>
+            <a:ext cx="2377440" cy="914400"/>
+          </a:xfrm>
+          <a:prstGeom prst="rect">
+            <a:avLst/>
+          </a:prstGeom>
+          <a:noFill/>
+          <a:ln/>
+        </p:spPr>
+        <p:txBody>
+          <a:bodyPr wrap="square" rtlCol="0" anchor="ctr"/>
+          <a:lstStyle/>
+          <a:p>
+            <a:pPr algn="ctr" indent="0" marL="0">
+              <a:buNone/>
+            </a:pPr>
+            <a:r>
+              <a:rPr lang="en-US" sz="3600" b="1" dirty="0">
+                <a:solidFill>
+                  <a:srgbClr val="2A9D8F"/>
+                </a:solidFill>
+                <a:latin typeface="Georgia" pitchFamily="34" charset="0"/>
+                <a:ea typeface="Georgia" pitchFamily="34" charset="-122"/>
+                <a:cs typeface="Georgia" pitchFamily="34" charset="-120"/>
+              </a:rPr>
+              <a:t>24h</a:t>
+            </a:r>
+            <a:endParaRPr lang="en-US" sz="3600" dirty="0"/>
+          </a:p>
+        </p:txBody>
       </p:sp>
       <p:sp>
         <p:nvSpPr>
@@ -1931,8 +2795,8 @@
         </p:nvSpPr>
         <p:spPr>
           <a:xfrm>
-            <a:off x="5120640" y="1371600"/>
-            <a:ext cx="3291840" cy="3108960"/>
+            <a:off x="731520" y="2423160"/>
+            <a:ext cx="2377440" cy="365760"/>
           </a:xfrm>
           <a:prstGeom prst="rect">
             <a:avLst/>
@@ -1941,136 +2805,351 @@
           <a:ln/>
         </p:spPr>
         <p:txBody>
-          <a:bodyPr wrap="square" rtlCol="0" anchor="t"/>
-          <a:lstStyle/>
-          <a:p>
-            <a:pPr indent="0" marL="0">
-              <a:spcAft>
-                <a:spcPts val="400"/>
-              </a:spcAft>
+          <a:bodyPr wrap="square" rtlCol="0" anchor="ctr"/>
+          <a:lstStyle/>
+          <a:p>
+            <a:pPr algn="ctr" indent="0" marL="0">
               <a:buNone/>
             </a:pPr>
             <a:r>
-              <a:rPr lang="en-US" sz="1600" b="1" dirty="0">
-                <a:solidFill>
-                  <a:srgbClr val="1B2A4A"/>
+              <a:rPr lang="en-US" sz="1200" b="1" dirty="0">
+                <a:solidFill>
+                  <a:srgbClr val="6B6660"/>
                 </a:solidFill>
                 <a:latin typeface="Calibri" pitchFamily="34" charset="0"/>
                 <a:ea typeface="Calibri" pitchFamily="34" charset="-122"/>
                 <a:cs typeface="Calibri" pitchFamily="34" charset="-120"/>
               </a:rPr>
-              <a:t>The Moon</a:t>
-            </a:r>
-            <a:endParaRPr lang="en-US" sz="1600" dirty="0"/>
-          </a:p>
-          <a:p>
-            <a:pPr indent="0" marL="0">
-              <a:spcAft>
-                <a:spcPts val="400"/>
-              </a:spcAft>
+              <a:t>EARTH ROTATION</a:t>
+            </a:r>
+            <a:endParaRPr lang="en-US" sz="1200" dirty="0"/>
+          </a:p>
+        </p:txBody>
+      </p:sp>
+      <p:sp>
+        <p:nvSpPr>
+          <p:cNvPr id="9" name="Text 7"/>
+          <p:cNvSpPr/>
+          <p:nvPr/>
+        </p:nvSpPr>
+        <p:spPr>
+          <a:xfrm>
+            <a:off x="822960" y="2834640"/>
+            <a:ext cx="2194560" cy="640080"/>
+          </a:xfrm>
+          <a:prstGeom prst="rect">
+            <a:avLst/>
+          </a:prstGeom>
+          <a:noFill/>
+          <a:ln/>
+        </p:spPr>
+        <p:txBody>
+          <a:bodyPr wrap="square" rtlCol="0" anchor="ctr"/>
+          <a:lstStyle/>
+          <a:p>
+            <a:pPr algn="ctr" indent="0" marL="0">
               <a:buNone/>
             </a:pPr>
-            <a:endParaRPr lang="en-US" sz="1600" dirty="0"/>
-          </a:p>
-          <a:p>
-            <a:pPr indent="0" marL="0">
-              <a:spcAft>
-                <a:spcPts val="400"/>
-              </a:spcAft>
-              <a:buNone/>
-            </a:pPr>
-            <a:r>
-              <a:rPr lang="en-US" sz="1300" dirty="0">
-                <a:solidFill>
-                  <a:srgbClr val="3D3A36"/>
+            <a:r>
+              <a:rPr lang="en-US" sz="1000" dirty="0">
+                <a:solidFill>
+                  <a:srgbClr val="9B9690"/>
                 </a:solidFill>
                 <a:latin typeface="Calibri" pitchFamily="34" charset="0"/>
                 <a:ea typeface="Calibri" pitchFamily="34" charset="-122"/>
                 <a:cs typeface="Calibri" pitchFamily="34" charset="-120"/>
               </a:rPr>
-              <a:t>The Moon is Earth's only natural satellite</a:t>
-            </a:r>
-            <a:endParaRPr lang="en-US" sz="1600" dirty="0"/>
-          </a:p>
-          <a:p>
-            <a:pPr indent="0" marL="0">
-              <a:spcAft>
-                <a:spcPts val="400"/>
-              </a:spcAft>
+              <a:t>One full spin = one day</a:t>
+            </a:r>
+            <a:endParaRPr lang="en-US" sz="1000" dirty="0"/>
+          </a:p>
+        </p:txBody>
+      </p:sp>
+      <p:sp>
+        <p:nvSpPr>
+          <p:cNvPr id="10" name="Shape 8"/>
+          <p:cNvSpPr/>
+          <p:nvPr/>
+        </p:nvSpPr>
+        <p:spPr>
+          <a:xfrm>
+            <a:off x="3383280" y="1280160"/>
+            <a:ext cx="2377440" cy="2377440"/>
+          </a:xfrm>
+          <a:prstGeom prst="rect">
+            <a:avLst/>
+          </a:prstGeom>
+          <a:solidFill>
+            <a:srgbClr val="FFFFFF"/>
+          </a:solidFill>
+          <a:ln/>
+          <a:effectLst>
+            <a:outerShdw sx="100000" sy="100000" kx="0" ky="0" algn="bl" rotWithShape="0" blurRad="50800" dist="25400" dir="8100000">
+              <a:srgbClr val="000000">
+                <a:alpha val="10000"/>
+              </a:srgbClr>
+            </a:outerShdw>
+          </a:effectLst>
+        </p:spPr>
+      </p:sp>
+      <p:sp>
+        <p:nvSpPr>
+          <p:cNvPr id="11" name="Text 9"/>
+          <p:cNvSpPr/>
+          <p:nvPr/>
+        </p:nvSpPr>
+        <p:spPr>
+          <a:xfrm>
+            <a:off x="3383280" y="1463040"/>
+            <a:ext cx="2377440" cy="914400"/>
+          </a:xfrm>
+          <a:prstGeom prst="rect">
+            <a:avLst/>
+          </a:prstGeom>
+          <a:noFill/>
+          <a:ln/>
+        </p:spPr>
+        <p:txBody>
+          <a:bodyPr wrap="square" rtlCol="0" anchor="ctr"/>
+          <a:lstStyle/>
+          <a:p>
+            <a:pPr algn="ctr" indent="0" marL="0">
               <a:buNone/>
             </a:pPr>
             <a:r>
-              <a:rPr lang="en-US" sz="1300" dirty="0">
-                <a:solidFill>
-                  <a:srgbClr val="3D3A36"/>
+              <a:rPr lang="en-US" sz="3600" b="1" dirty="0">
+                <a:solidFill>
+                  <a:srgbClr val="2A9D8F"/>
+                </a:solidFill>
+                <a:latin typeface="Georgia" pitchFamily="34" charset="0"/>
+                <a:ea typeface="Georgia" pitchFamily="34" charset="-122"/>
+                <a:cs typeface="Georgia" pitchFamily="34" charset="-120"/>
+              </a:rPr>
+              <a:t>365¼</a:t>
+            </a:r>
+            <a:endParaRPr lang="en-US" sz="3600" dirty="0"/>
+          </a:p>
+        </p:txBody>
+      </p:sp>
+      <p:sp>
+        <p:nvSpPr>
+          <p:cNvPr id="12" name="Text 10"/>
+          <p:cNvSpPr/>
+          <p:nvPr/>
+        </p:nvSpPr>
+        <p:spPr>
+          <a:xfrm>
+            <a:off x="3383280" y="2423160"/>
+            <a:ext cx="2377440" cy="365760"/>
+          </a:xfrm>
+          <a:prstGeom prst="rect">
+            <a:avLst/>
+          </a:prstGeom>
+          <a:noFill/>
+          <a:ln/>
+        </p:spPr>
+        <p:txBody>
+          <a:bodyPr wrap="square" rtlCol="0" anchor="ctr"/>
+          <a:lstStyle/>
+          <a:p>
+            <a:pPr algn="ctr" indent="0" marL="0">
+              <a:buNone/>
+            </a:pPr>
+            <a:r>
+              <a:rPr lang="en-US" sz="1200" b="1" dirty="0">
+                <a:solidFill>
+                  <a:srgbClr val="6B6660"/>
                 </a:solidFill>
                 <a:latin typeface="Calibri" pitchFamily="34" charset="0"/>
                 <a:ea typeface="Calibri" pitchFamily="34" charset="-122"/>
                 <a:cs typeface="Calibri" pitchFamily="34" charset="-120"/>
               </a:rPr>
-              <a:t>Diameter: ~3,474 km (about ¼ of Earth's)</a:t>
-            </a:r>
-            <a:endParaRPr lang="en-US" sz="1600" dirty="0"/>
-          </a:p>
-          <a:p>
-            <a:pPr indent="0" marL="0">
-              <a:spcAft>
-                <a:spcPts val="400"/>
-              </a:spcAft>
+              <a:t>DAYS PER YEAR</a:t>
+            </a:r>
+            <a:endParaRPr lang="en-US" sz="1200" dirty="0"/>
+          </a:p>
+        </p:txBody>
+      </p:sp>
+      <p:sp>
+        <p:nvSpPr>
+          <p:cNvPr id="13" name="Text 11"/>
+          <p:cNvSpPr/>
+          <p:nvPr/>
+        </p:nvSpPr>
+        <p:spPr>
+          <a:xfrm>
+            <a:off x="3474720" y="2834640"/>
+            <a:ext cx="2194560" cy="640080"/>
+          </a:xfrm>
+          <a:prstGeom prst="rect">
+            <a:avLst/>
+          </a:prstGeom>
+          <a:noFill/>
+          <a:ln/>
+        </p:spPr>
+        <p:txBody>
+          <a:bodyPr wrap="square" rtlCol="0" anchor="ctr"/>
+          <a:lstStyle/>
+          <a:p>
+            <a:pPr algn="ctr" indent="0" marL="0">
               <a:buNone/>
             </a:pPr>
             <a:r>
-              <a:rPr lang="en-US" sz="1300" dirty="0">
-                <a:solidFill>
-                  <a:srgbClr val="3D3A36"/>
+              <a:rPr lang="en-US" sz="1000" dirty="0">
+                <a:solidFill>
+                  <a:srgbClr val="9B9690"/>
                 </a:solidFill>
                 <a:latin typeface="Calibri" pitchFamily="34" charset="0"/>
                 <a:ea typeface="Calibri" pitchFamily="34" charset="-122"/>
                 <a:cs typeface="Calibri" pitchFamily="34" charset="-120"/>
               </a:rPr>
-              <a:t>No atmosphere, no weather, no liquid water</a:t>
-            </a:r>
-            <a:endParaRPr lang="en-US" sz="1600" dirty="0"/>
-          </a:p>
-          <a:p>
-            <a:pPr indent="0" marL="0">
-              <a:spcAft>
-                <a:spcPts val="400"/>
-              </a:spcAft>
+              <a:t>One orbit of the Sun</a:t>
+            </a:r>
+            <a:endParaRPr lang="en-US" sz="1000" dirty="0"/>
+          </a:p>
+        </p:txBody>
+      </p:sp>
+      <p:sp>
+        <p:nvSpPr>
+          <p:cNvPr id="14" name="Shape 12"/>
+          <p:cNvSpPr/>
+          <p:nvPr/>
+        </p:nvSpPr>
+        <p:spPr>
+          <a:xfrm>
+            <a:off x="6035040" y="1280160"/>
+            <a:ext cx="2377440" cy="2377440"/>
+          </a:xfrm>
+          <a:prstGeom prst="rect">
+            <a:avLst/>
+          </a:prstGeom>
+          <a:solidFill>
+            <a:srgbClr val="FFFFFF"/>
+          </a:solidFill>
+          <a:ln/>
+          <a:effectLst>
+            <a:outerShdw sx="100000" sy="100000" kx="0" ky="0" algn="bl" rotWithShape="0" blurRad="50800" dist="25400" dir="8100000">
+              <a:srgbClr val="000000">
+                <a:alpha val="10000"/>
+              </a:srgbClr>
+            </a:outerShdw>
+          </a:effectLst>
+        </p:spPr>
+      </p:sp>
+      <p:sp>
+        <p:nvSpPr>
+          <p:cNvPr id="15" name="Text 13"/>
+          <p:cNvSpPr/>
+          <p:nvPr/>
+        </p:nvSpPr>
+        <p:spPr>
+          <a:xfrm>
+            <a:off x="6035040" y="1463040"/>
+            <a:ext cx="2377440" cy="914400"/>
+          </a:xfrm>
+          <a:prstGeom prst="rect">
+            <a:avLst/>
+          </a:prstGeom>
+          <a:noFill/>
+          <a:ln/>
+        </p:spPr>
+        <p:txBody>
+          <a:bodyPr wrap="square" rtlCol="0" anchor="ctr"/>
+          <a:lstStyle/>
+          <a:p>
+            <a:pPr algn="ctr" indent="0" marL="0">
               <a:buNone/>
             </a:pPr>
             <a:r>
-              <a:rPr lang="en-US" sz="1300" dirty="0">
-                <a:solidFill>
-                  <a:srgbClr val="3D3A36"/>
+              <a:rPr lang="en-US" sz="3600" b="1" dirty="0">
+                <a:solidFill>
+                  <a:srgbClr val="2A9D8F"/>
+                </a:solidFill>
+                <a:latin typeface="Georgia" pitchFamily="34" charset="0"/>
+                <a:ea typeface="Georgia" pitchFamily="34" charset="-122"/>
+                <a:cs typeface="Georgia" pitchFamily="34" charset="-120"/>
+              </a:rPr>
+              <a:t>27.3</a:t>
+            </a:r>
+            <a:endParaRPr lang="en-US" sz="3600" dirty="0"/>
+          </a:p>
+        </p:txBody>
+      </p:sp>
+      <p:sp>
+        <p:nvSpPr>
+          <p:cNvPr id="16" name="Text 14"/>
+          <p:cNvSpPr/>
+          <p:nvPr/>
+        </p:nvSpPr>
+        <p:spPr>
+          <a:xfrm>
+            <a:off x="6035040" y="2423160"/>
+            <a:ext cx="2377440" cy="365760"/>
+          </a:xfrm>
+          <a:prstGeom prst="rect">
+            <a:avLst/>
+          </a:prstGeom>
+          <a:noFill/>
+          <a:ln/>
+        </p:spPr>
+        <p:txBody>
+          <a:bodyPr wrap="square" rtlCol="0" anchor="ctr"/>
+          <a:lstStyle/>
+          <a:p>
+            <a:pPr algn="ctr" indent="0" marL="0">
+              <a:buNone/>
+            </a:pPr>
+            <a:r>
+              <a:rPr lang="en-US" sz="1200" b="1" dirty="0">
+                <a:solidFill>
+                  <a:srgbClr val="6B6660"/>
                 </a:solidFill>
                 <a:latin typeface="Calibri" pitchFamily="34" charset="0"/>
                 <a:ea typeface="Calibri" pitchFamily="34" charset="-122"/>
                 <a:cs typeface="Calibri" pitchFamily="34" charset="-120"/>
               </a:rPr>
-              <a:t>Surface: craters from asteroid impacts, 'seas' (dark flat areas of solidified lava)</a:t>
-            </a:r>
-            <a:endParaRPr lang="en-US" sz="1600" dirty="0"/>
-          </a:p>
-          <a:p>
-            <a:pPr indent="0" marL="0">
-              <a:spcAft>
-                <a:spcPts val="400"/>
-              </a:spcAft>
+              <a:t>DAYS PER LUNAR ORBIT</a:t>
+            </a:r>
+            <a:endParaRPr lang="en-US" sz="1200" dirty="0"/>
+          </a:p>
+        </p:txBody>
+      </p:sp>
+      <p:sp>
+        <p:nvSpPr>
+          <p:cNvPr id="17" name="Text 15"/>
+          <p:cNvSpPr/>
+          <p:nvPr/>
+        </p:nvSpPr>
+        <p:spPr>
+          <a:xfrm>
+            <a:off x="6126480" y="2834640"/>
+            <a:ext cx="2194560" cy="640080"/>
+          </a:xfrm>
+          <a:prstGeom prst="rect">
+            <a:avLst/>
+          </a:prstGeom>
+          <a:noFill/>
+          <a:ln/>
+        </p:spPr>
+        <p:txBody>
+          <a:bodyPr wrap="square" rtlCol="0" anchor="ctr"/>
+          <a:lstStyle/>
+          <a:p>
+            <a:pPr algn="ctr" indent="0" marL="0">
               <a:buNone/>
             </a:pPr>
             <a:r>
-              <a:rPr lang="en-US" sz="1300" dirty="0">
-                <a:solidFill>
-                  <a:srgbClr val="3D3A36"/>
+              <a:rPr lang="en-US" sz="1000" dirty="0">
+                <a:solidFill>
+                  <a:srgbClr val="9B9690"/>
                 </a:solidFill>
                 <a:latin typeface="Calibri" pitchFamily="34" charset="0"/>
                 <a:ea typeface="Calibri" pitchFamily="34" charset="-122"/>
                 <a:cs typeface="Calibri" pitchFamily="34" charset="-120"/>
               </a:rPr>
-              <a:t>The Moon's gravity causes tides on Earth</a:t>
-            </a:r>
-            <a:endParaRPr lang="en-US" sz="1600" dirty="0"/>
+              <a:t>Moon orbits Earth</a:t>
+            </a:r>
+            <a:endParaRPr lang="en-US" sz="1000" dirty="0"/>
           </a:p>
         </p:txBody>
       </p:sp>
@@ -2115,7 +3194,47 @@
         <p:spPr>
           <a:xfrm>
             <a:off x="0" y="0"/>
-            <a:ext cx="9144000" cy="54864"/>
+            <a:ext cx="9144000" cy="822960"/>
+          </a:xfrm>
+          <a:prstGeom prst="rect">
+            <a:avLst/>
+          </a:prstGeom>
+          <a:solidFill>
+            <a:srgbClr val="FFFFFF"/>
+          </a:solidFill>
+          <a:ln/>
+        </p:spPr>
+      </p:sp>
+      <p:sp>
+        <p:nvSpPr>
+          <p:cNvPr id="3" name="Shape 1"/>
+          <p:cNvSpPr/>
+          <p:nvPr/>
+        </p:nvSpPr>
+        <p:spPr>
+          <a:xfrm>
+            <a:off x="0" y="804672"/>
+            <a:ext cx="9144000" cy="27432"/>
+          </a:xfrm>
+          <a:prstGeom prst="rect">
+            <a:avLst/>
+          </a:prstGeom>
+          <a:solidFill>
+            <a:srgbClr val="E5E2DC"/>
+          </a:solidFill>
+          <a:ln/>
+        </p:spPr>
+      </p:sp>
+      <p:sp>
+        <p:nvSpPr>
+          <p:cNvPr id="4" name="Shape 2"/>
+          <p:cNvSpPr/>
+          <p:nvPr/>
+        </p:nvSpPr>
+        <p:spPr>
+          <a:xfrm>
+            <a:off x="548640" y="201168"/>
+            <a:ext cx="54864" cy="420624"/>
           </a:xfrm>
           <a:prstGeom prst="rect">
             <a:avLst/>
@@ -2128,14 +3247,14 @@
       </p:sp>
       <p:sp>
         <p:nvSpPr>
-          <p:cNvPr id="3" name="Text 1"/>
-          <p:cNvSpPr/>
-          <p:nvPr/>
-        </p:nvSpPr>
-        <p:spPr>
-          <a:xfrm>
-            <a:off x="7772400" y="4709160"/>
-            <a:ext cx="1097280" cy="320040"/>
+          <p:cNvPr id="5" name="Text 3"/>
+          <p:cNvSpPr/>
+          <p:nvPr/>
+        </p:nvSpPr>
+        <p:spPr>
+          <a:xfrm>
+            <a:off x="777240" y="137160"/>
+            <a:ext cx="7772400" cy="548640"/>
           </a:xfrm>
           <a:prstGeom prst="rect">
             <a:avLst/>
@@ -2144,53 +3263,14 @@
           <a:ln/>
         </p:spPr>
         <p:txBody>
-          <a:bodyPr wrap="square" rtlCol="0" anchor="ctr"/>
-          <a:lstStyle/>
-          <a:p>
-            <a:pPr algn="r" indent="0" marL="0">
-              <a:buNone/>
-            </a:pPr>
-            <a:r>
-              <a:rPr lang="en-US" sz="900" dirty="0">
-                <a:solidFill>
-                  <a:srgbClr val="6B6660"/>
-                </a:solidFill>
-                <a:latin typeface="Calibri" pitchFamily="34" charset="0"/>
-                <a:ea typeface="Calibri" pitchFamily="34" charset="-122"/>
-                <a:cs typeface="Calibri" pitchFamily="34" charset="-120"/>
-              </a:rPr>
-              <a:t>4 / 5</a:t>
-            </a:r>
-            <a:endParaRPr lang="en-US" sz="900" dirty="0"/>
-          </a:p>
-        </p:txBody>
-      </p:sp>
-      <p:sp>
-        <p:nvSpPr>
-          <p:cNvPr id="4" name="Text 2"/>
-          <p:cNvSpPr/>
-          <p:nvPr/>
-        </p:nvSpPr>
-        <p:spPr>
-          <a:xfrm>
-            <a:off x="457200" y="274320"/>
-            <a:ext cx="8229600" cy="640080"/>
-          </a:xfrm>
-          <a:prstGeom prst="rect">
-            <a:avLst/>
-          </a:prstGeom>
-          <a:noFill/>
-          <a:ln/>
-        </p:spPr>
-        <p:txBody>
-          <a:bodyPr wrap="square" rtlCol="0" anchor="ctr"/>
+          <a:bodyPr wrap="square" lIns="0" tIns="0" rIns="0" bIns="0" rtlCol="0" anchor="ctr"/>
           <a:lstStyle/>
           <a:p>
             <a:pPr indent="0" marL="0">
               <a:buNone/>
             </a:pPr>
             <a:r>
-              <a:rPr lang="en-US" sz="2600" b="1" dirty="0">
+              <a:rPr lang="en-US" sz="2000" b="1" dirty="0">
                 <a:solidFill>
                   <a:srgbClr val="1B2A4A"/>
                 </a:solidFill>
@@ -2198,22 +3278,22 @@
                 <a:ea typeface="Georgia" pitchFamily="34" charset="-122"/>
                 <a:cs typeface="Georgia" pitchFamily="34" charset="-120"/>
               </a:rPr>
-              <a:t>Moon Phases</a:t>
-            </a:r>
-            <a:endParaRPr lang="en-US" sz="2600" dirty="0"/>
-          </a:p>
-        </p:txBody>
-      </p:sp>
-      <p:sp>
-        <p:nvSpPr>
-          <p:cNvPr id="5" name="Shape 3"/>
-          <p:cNvSpPr/>
-          <p:nvPr/>
-        </p:nvSpPr>
-        <p:spPr>
-          <a:xfrm>
-            <a:off x="457200" y="1188720"/>
-            <a:ext cx="2560320" cy="1828800"/>
+              <a:t>Solar Eclipse vs Lunar Eclipse</a:t>
+            </a:r>
+            <a:endParaRPr lang="en-US" sz="2000" dirty="0"/>
+          </a:p>
+        </p:txBody>
+      </p:sp>
+      <p:sp>
+        <p:nvSpPr>
+          <p:cNvPr id="6" name="Shape 4"/>
+          <p:cNvSpPr/>
+          <p:nvPr/>
+        </p:nvSpPr>
+        <p:spPr>
+          <a:xfrm>
+            <a:off x="548640" y="1051560"/>
+            <a:ext cx="3840480" cy="3474720"/>
           </a:xfrm>
           <a:prstGeom prst="rect">
             <a:avLst/>
@@ -2221,12 +3301,7 @@
           <a:solidFill>
             <a:srgbClr val="FFFFFF"/>
           </a:solidFill>
-          <a:ln w="12700">
-            <a:solidFill>
-              <a:srgbClr val="E5E2DC"/>
-            </a:solidFill>
-            <a:prstDash val="solid"/>
-          </a:ln>
+          <a:ln/>
           <a:effectLst>
             <a:outerShdw sx="100000" sy="100000" kx="0" ky="0" algn="bl" rotWithShape="0" blurRad="50800" dist="25400" dir="8100000">
               <a:srgbClr val="000000">
@@ -2238,14 +3313,14 @@
       </p:sp>
       <p:sp>
         <p:nvSpPr>
-          <p:cNvPr id="6" name="Shape 4"/>
-          <p:cNvSpPr/>
-          <p:nvPr/>
-        </p:nvSpPr>
-        <p:spPr>
-          <a:xfrm>
-            <a:off x="457200" y="1188720"/>
-            <a:ext cx="2560320" cy="54864"/>
+          <p:cNvPr id="7" name="Shape 5"/>
+          <p:cNvSpPr/>
+          <p:nvPr/>
+        </p:nvSpPr>
+        <p:spPr>
+          <a:xfrm>
+            <a:off x="548640" y="1051560"/>
+            <a:ext cx="3840480" cy="54864"/>
           </a:xfrm>
           <a:prstGeom prst="rect">
             <a:avLst/>
@@ -2258,14 +3333,14 @@
       </p:sp>
       <p:sp>
         <p:nvSpPr>
-          <p:cNvPr id="7" name="Text 5"/>
-          <p:cNvSpPr/>
-          <p:nvPr/>
-        </p:nvSpPr>
-        <p:spPr>
-          <a:xfrm>
-            <a:off x="594360" y="1325880"/>
-            <a:ext cx="2286000" cy="365760"/>
+          <p:cNvPr id="8" name="Text 6"/>
+          <p:cNvSpPr/>
+          <p:nvPr/>
+        </p:nvSpPr>
+        <p:spPr>
+          <a:xfrm>
+            <a:off x="777240" y="1188720"/>
+            <a:ext cx="3383280" cy="457200"/>
           </a:xfrm>
           <a:prstGeom prst="rect">
             <a:avLst/>
@@ -2274,53 +3349,78 @@
           <a:ln/>
         </p:spPr>
         <p:txBody>
-          <a:bodyPr wrap="square" rtlCol="0" anchor="ctr"/>
+          <a:bodyPr wrap="square" lIns="0" tIns="0" rIns="0" bIns="0" rtlCol="0" anchor="ctr"/>
           <a:lstStyle/>
           <a:p>
             <a:pPr indent="0" marL="0">
               <a:buNone/>
             </a:pPr>
             <a:r>
-              <a:rPr lang="en-US" sz="1400" b="1" dirty="0">
+              <a:rPr lang="en-US" sz="1500" b="1" dirty="0">
                 <a:solidFill>
                   <a:srgbClr val="1B2A4A"/>
+                </a:solidFill>
+                <a:latin typeface="Georgia" pitchFamily="34" charset="0"/>
+                <a:ea typeface="Georgia" pitchFamily="34" charset="-122"/>
+                <a:cs typeface="Georgia" pitchFamily="34" charset="-120"/>
+              </a:rPr>
+              <a:t>Solar Eclipse</a:t>
+            </a:r>
+            <a:endParaRPr lang="en-US" sz="1500" dirty="0"/>
+          </a:p>
+        </p:txBody>
+      </p:sp>
+      <p:sp>
+        <p:nvSpPr>
+          <p:cNvPr id="9" name="Text 7"/>
+          <p:cNvSpPr/>
+          <p:nvPr/>
+        </p:nvSpPr>
+        <p:spPr>
+          <a:xfrm>
+            <a:off x="777240" y="1691640"/>
+            <a:ext cx="3383280" cy="2651760"/>
+          </a:xfrm>
+          <a:prstGeom prst="rect">
+            <a:avLst/>
+          </a:prstGeom>
+          <a:noFill/>
+          <a:ln/>
+        </p:spPr>
+        <p:txBody>
+          <a:bodyPr wrap="square" rtlCol="0" anchor="t"/>
+          <a:lstStyle/>
+          <a:p>
+            <a:pPr marL="342900" indent="-342900">
+              <a:spcAft>
+                <a:spcPts val="600"/>
+              </a:spcAft>
+              <a:buSzPct val="100000"/>
+              <a:buChar char="•"/>
+            </a:pPr>
+            <a:r>
+              <a:rPr lang="en-US" sz="1300" dirty="0">
+                <a:solidFill>
+                  <a:srgbClr val="3D3A36"/>
                 </a:solidFill>
                 <a:latin typeface="Calibri" pitchFamily="34" charset="0"/>
                 <a:ea typeface="Calibri" pitchFamily="34" charset="-122"/>
                 <a:cs typeface="Calibri" pitchFamily="34" charset="-120"/>
               </a:rPr>
-              <a:t>New Moon</a:t>
-            </a:r>
-            <a:endParaRPr lang="en-US" sz="1400" dirty="0"/>
-          </a:p>
-        </p:txBody>
-      </p:sp>
-      <p:sp>
-        <p:nvSpPr>
-          <p:cNvPr id="8" name="Text 6"/>
-          <p:cNvSpPr/>
-          <p:nvPr/>
-        </p:nvSpPr>
-        <p:spPr>
-          <a:xfrm>
-            <a:off x="594360" y="1737360"/>
-            <a:ext cx="2286000" cy="1097280"/>
-          </a:xfrm>
-          <a:prstGeom prst="rect">
-            <a:avLst/>
-          </a:prstGeom>
-          <a:noFill/>
-          <a:ln/>
-        </p:spPr>
-        <p:txBody>
-          <a:bodyPr wrap="square" rtlCol="0" anchor="t"/>
-          <a:lstStyle/>
-          <a:p>
-            <a:pPr indent="0" marL="0">
-              <a:buNone/>
-            </a:pPr>
-            <a:r>
-              <a:rPr lang="en-US" sz="1100" dirty="0">
+              <a:t>Moon passes between Earth and Sun</a:t>
+            </a:r>
+            <a:endParaRPr lang="en-US" sz="1300" dirty="0"/>
+          </a:p>
+          <a:p>
+            <a:pPr marL="342900" indent="-342900">
+              <a:spcAft>
+                <a:spcPts val="600"/>
+              </a:spcAft>
+              <a:buSzPct val="100000"/>
+              <a:buChar char="•"/>
+            </a:pPr>
+            <a:r>
+              <a:rPr lang="en-US" sz="1300" dirty="0">
                 <a:solidFill>
                   <a:srgbClr val="3D3A36"/>
                 </a:solidFill>
@@ -2328,22 +3428,85 @@
                 <a:ea typeface="Calibri" pitchFamily="34" charset="-122"/>
                 <a:cs typeface="Calibri" pitchFamily="34" charset="-120"/>
               </a:rPr>
-              <a:t>Moon between Earth and Sun. Dark side faces us. Cannot see it.</a:t>
-            </a:r>
-            <a:endParaRPr lang="en-US" sz="1100" dirty="0"/>
-          </a:p>
-        </p:txBody>
-      </p:sp>
-      <p:sp>
-        <p:nvSpPr>
-          <p:cNvPr id="9" name="Shape 7"/>
-          <p:cNvSpPr/>
-          <p:nvPr/>
-        </p:nvSpPr>
-        <p:spPr>
-          <a:xfrm>
-            <a:off x="3291840" y="1188720"/>
-            <a:ext cx="2560320" cy="1828800"/>
+              <a:t>Moon blocks sunlight</a:t>
+            </a:r>
+            <a:endParaRPr lang="en-US" sz="1300" dirty="0"/>
+          </a:p>
+          <a:p>
+            <a:pPr marL="342900" indent="-342900">
+              <a:spcAft>
+                <a:spcPts val="600"/>
+              </a:spcAft>
+              <a:buSzPct val="100000"/>
+              <a:buChar char="•"/>
+            </a:pPr>
+            <a:r>
+              <a:rPr lang="en-US" sz="1300" dirty="0">
+                <a:solidFill>
+                  <a:srgbClr val="3D3A36"/>
+                </a:solidFill>
+                <a:latin typeface="Calibri" pitchFamily="34" charset="0"/>
+                <a:ea typeface="Calibri" pitchFamily="34" charset="-122"/>
+                <a:cs typeface="Calibri" pitchFamily="34" charset="-120"/>
+              </a:rPr>
+              <a:t>Only visible from small area on Earth</a:t>
+            </a:r>
+            <a:endParaRPr lang="en-US" sz="1300" dirty="0"/>
+          </a:p>
+          <a:p>
+            <a:pPr marL="342900" indent="-342900">
+              <a:spcAft>
+                <a:spcPts val="600"/>
+              </a:spcAft>
+              <a:buSzPct val="100000"/>
+              <a:buChar char="•"/>
+            </a:pPr>
+            <a:r>
+              <a:rPr lang="en-US" sz="1300" dirty="0">
+                <a:solidFill>
+                  <a:srgbClr val="3D3A36"/>
+                </a:solidFill>
+                <a:latin typeface="Calibri" pitchFamily="34" charset="0"/>
+                <a:ea typeface="Calibri" pitchFamily="34" charset="-122"/>
+                <a:cs typeface="Calibri" pitchFamily="34" charset="-120"/>
+              </a:rPr>
+              <a:t>Happens during daytime</a:t>
+            </a:r>
+            <a:endParaRPr lang="en-US" sz="1300" dirty="0"/>
+          </a:p>
+          <a:p>
+            <a:pPr marL="342900" indent="-342900">
+              <a:spcAft>
+                <a:spcPts val="600"/>
+              </a:spcAft>
+              <a:buSzPct val="100000"/>
+              <a:buChar char="•"/>
+            </a:pPr>
+            <a:r>
+              <a:rPr lang="en-US" sz="1300" dirty="0">
+                <a:solidFill>
+                  <a:srgbClr val="3D3A36"/>
+                </a:solidFill>
+                <a:latin typeface="Calibri" pitchFamily="34" charset="0"/>
+                <a:ea typeface="Calibri" pitchFamily="34" charset="-122"/>
+                <a:cs typeface="Calibri" pitchFamily="34" charset="-120"/>
+              </a:rPr>
+              <a:t>NEVER look directly at the Sun</a:t>
+            </a:r>
+            <a:endParaRPr lang="en-US" sz="1300" dirty="0"/>
+          </a:p>
+        </p:txBody>
+      </p:sp>
+      <p:sp>
+        <p:nvSpPr>
+          <p:cNvPr id="10" name="Shape 8"/>
+          <p:cNvSpPr/>
+          <p:nvPr/>
+        </p:nvSpPr>
+        <p:spPr>
+          <a:xfrm>
+            <a:off x="4754880" y="1051560"/>
+            <a:ext cx="3840480" cy="3474720"/>
           </a:xfrm>
           <a:prstGeom prst="rect">
             <a:avLst/>
@@ -2351,12 +3514,7 @@
           <a:solidFill>
             <a:srgbClr val="FFFFFF"/>
           </a:solidFill>
-          <a:ln w="12700">
-            <a:solidFill>
-              <a:srgbClr val="E5E2DC"/>
-            </a:solidFill>
-            <a:prstDash val="solid"/>
-          </a:ln>
+          <a:ln/>
           <a:effectLst>
             <a:outerShdw sx="100000" sy="100000" kx="0" ky="0" algn="bl" rotWithShape="0" blurRad="50800" dist="25400" dir="8100000">
               <a:srgbClr val="000000">
@@ -2368,34 +3526,34 @@
       </p:sp>
       <p:sp>
         <p:nvSpPr>
-          <p:cNvPr id="10" name="Shape 8"/>
-          <p:cNvSpPr/>
-          <p:nvPr/>
-        </p:nvSpPr>
-        <p:spPr>
-          <a:xfrm>
-            <a:off x="3291840" y="1188720"/>
-            <a:ext cx="2560320" cy="54864"/>
-          </a:xfrm>
-          <a:prstGeom prst="rect">
-            <a:avLst/>
-          </a:prstGeom>
-          <a:solidFill>
-            <a:srgbClr val="2A9D8F"/>
-          </a:solidFill>
-          <a:ln/>
-        </p:spPr>
-      </p:sp>
-      <p:sp>
-        <p:nvSpPr>
-          <p:cNvPr id="11" name="Text 9"/>
-          <p:cNvSpPr/>
-          <p:nvPr/>
-        </p:nvSpPr>
-        <p:spPr>
-          <a:xfrm>
-            <a:off x="3429000" y="1325880"/>
-            <a:ext cx="2286000" cy="365760"/>
+          <p:cNvPr id="11" name="Shape 9"/>
+          <p:cNvSpPr/>
+          <p:nvPr/>
+        </p:nvSpPr>
+        <p:spPr>
+          <a:xfrm>
+            <a:off x="4754880" y="1051560"/>
+            <a:ext cx="3840480" cy="54864"/>
+          </a:xfrm>
+          <a:prstGeom prst="rect">
+            <a:avLst/>
+          </a:prstGeom>
+          <a:solidFill>
+            <a:srgbClr val="E9C46A"/>
+          </a:solidFill>
+          <a:ln/>
+        </p:spPr>
+      </p:sp>
+      <p:sp>
+        <p:nvSpPr>
+          <p:cNvPr id="12" name="Text 10"/>
+          <p:cNvSpPr/>
+          <p:nvPr/>
+        </p:nvSpPr>
+        <p:spPr>
+          <a:xfrm>
+            <a:off x="4983480" y="1188720"/>
+            <a:ext cx="3383280" cy="457200"/>
           </a:xfrm>
           <a:prstGeom prst="rect">
             <a:avLst/>
@@ -2404,53 +3562,78 @@
           <a:ln/>
         </p:spPr>
         <p:txBody>
-          <a:bodyPr wrap="square" rtlCol="0" anchor="ctr"/>
+          <a:bodyPr wrap="square" lIns="0" tIns="0" rIns="0" bIns="0" rtlCol="0" anchor="ctr"/>
           <a:lstStyle/>
           <a:p>
             <a:pPr indent="0" marL="0">
               <a:buNone/>
             </a:pPr>
             <a:r>
-              <a:rPr lang="en-US" sz="1400" b="1" dirty="0">
+              <a:rPr lang="en-US" sz="1500" b="1" dirty="0">
                 <a:solidFill>
                   <a:srgbClr val="1B2A4A"/>
+                </a:solidFill>
+                <a:latin typeface="Georgia" pitchFamily="34" charset="0"/>
+                <a:ea typeface="Georgia" pitchFamily="34" charset="-122"/>
+                <a:cs typeface="Georgia" pitchFamily="34" charset="-120"/>
+              </a:rPr>
+              <a:t>Lunar Eclipse</a:t>
+            </a:r>
+            <a:endParaRPr lang="en-US" sz="1500" dirty="0"/>
+          </a:p>
+        </p:txBody>
+      </p:sp>
+      <p:sp>
+        <p:nvSpPr>
+          <p:cNvPr id="13" name="Text 11"/>
+          <p:cNvSpPr/>
+          <p:nvPr/>
+        </p:nvSpPr>
+        <p:spPr>
+          <a:xfrm>
+            <a:off x="4983480" y="1691640"/>
+            <a:ext cx="3383280" cy="2651760"/>
+          </a:xfrm>
+          <a:prstGeom prst="rect">
+            <a:avLst/>
+          </a:prstGeom>
+          <a:noFill/>
+          <a:ln/>
+        </p:spPr>
+        <p:txBody>
+          <a:bodyPr wrap="square" rtlCol="0" anchor="t"/>
+          <a:lstStyle/>
+          <a:p>
+            <a:pPr marL="342900" indent="-342900">
+              <a:spcAft>
+                <a:spcPts val="600"/>
+              </a:spcAft>
+              <a:buSzPct val="100000"/>
+              <a:buChar char="•"/>
+            </a:pPr>
+            <a:r>
+              <a:rPr lang="en-US" sz="1300" dirty="0">
+                <a:solidFill>
+                  <a:srgbClr val="3D3A36"/>
                 </a:solidFill>
                 <a:latin typeface="Calibri" pitchFamily="34" charset="0"/>
                 <a:ea typeface="Calibri" pitchFamily="34" charset="-122"/>
                 <a:cs typeface="Calibri" pitchFamily="34" charset="-120"/>
               </a:rPr>
-              <a:t>First Quarter</a:t>
-            </a:r>
-            <a:endParaRPr lang="en-US" sz="1400" dirty="0"/>
-          </a:p>
-        </p:txBody>
-      </p:sp>
-      <p:sp>
-        <p:nvSpPr>
-          <p:cNvPr id="12" name="Text 10"/>
-          <p:cNvSpPr/>
-          <p:nvPr/>
-        </p:nvSpPr>
-        <p:spPr>
-          <a:xfrm>
-            <a:off x="3429000" y="1737360"/>
-            <a:ext cx="2286000" cy="1097280"/>
-          </a:xfrm>
-          <a:prstGeom prst="rect">
-            <a:avLst/>
-          </a:prstGeom>
-          <a:noFill/>
-          <a:ln/>
-        </p:spPr>
-        <p:txBody>
-          <a:bodyPr wrap="square" rtlCol="0" anchor="t"/>
-          <a:lstStyle/>
-          <a:p>
-            <a:pPr indent="0" marL="0">
-              <a:buNone/>
-            </a:pPr>
-            <a:r>
-              <a:rPr lang="en-US" sz="1100" dirty="0">
+              <a:t>Earth passes between Sun and Moon</a:t>
+            </a:r>
+            <a:endParaRPr lang="en-US" sz="1300" dirty="0"/>
+          </a:p>
+          <a:p>
+            <a:pPr marL="342900" indent="-342900">
+              <a:spcAft>
+                <a:spcPts val="600"/>
+              </a:spcAft>
+              <a:buSzPct val="100000"/>
+              <a:buChar char="•"/>
+            </a:pPr>
+            <a:r>
+              <a:rPr lang="en-US" sz="1300" dirty="0">
                 <a:solidFill>
                   <a:srgbClr val="3D3A36"/>
                 </a:solidFill>
@@ -2458,129 +3641,41 @@
                 <a:ea typeface="Calibri" pitchFamily="34" charset="-122"/>
                 <a:cs typeface="Calibri" pitchFamily="34" charset="-120"/>
               </a:rPr>
-              <a:t>Half the Moon is lit (right half). Growing = 'waxing'.</a:t>
-            </a:r>
-            <a:endParaRPr lang="en-US" sz="1100" dirty="0"/>
-          </a:p>
-        </p:txBody>
-      </p:sp>
-      <p:sp>
-        <p:nvSpPr>
-          <p:cNvPr id="13" name="Shape 11"/>
-          <p:cNvSpPr/>
-          <p:nvPr/>
-        </p:nvSpPr>
-        <p:spPr>
-          <a:xfrm>
-            <a:off x="6126480" y="1188720"/>
-            <a:ext cx="2560320" cy="1828800"/>
-          </a:xfrm>
-          <a:prstGeom prst="rect">
-            <a:avLst/>
-          </a:prstGeom>
-          <a:solidFill>
-            <a:srgbClr val="FFFFFF"/>
-          </a:solidFill>
-          <a:ln w="12700">
-            <a:solidFill>
-              <a:srgbClr val="E5E2DC"/>
-            </a:solidFill>
-            <a:prstDash val="solid"/>
-          </a:ln>
-          <a:effectLst>
-            <a:outerShdw sx="100000" sy="100000" kx="0" ky="0" algn="bl" rotWithShape="0" blurRad="50800" dist="25400" dir="8100000">
-              <a:srgbClr val="000000">
-                <a:alpha val="10000"/>
-              </a:srgbClr>
-            </a:outerShdw>
-          </a:effectLst>
-        </p:spPr>
-      </p:sp>
-      <p:sp>
-        <p:nvSpPr>
-          <p:cNvPr id="14" name="Shape 12"/>
-          <p:cNvSpPr/>
-          <p:nvPr/>
-        </p:nvSpPr>
-        <p:spPr>
-          <a:xfrm>
-            <a:off x="6126480" y="1188720"/>
-            <a:ext cx="2560320" cy="54864"/>
-          </a:xfrm>
-          <a:prstGeom prst="rect">
-            <a:avLst/>
-          </a:prstGeom>
-          <a:solidFill>
-            <a:srgbClr val="2A9D8F"/>
-          </a:solidFill>
-          <a:ln/>
-        </p:spPr>
-      </p:sp>
-      <p:sp>
-        <p:nvSpPr>
-          <p:cNvPr id="15" name="Text 13"/>
-          <p:cNvSpPr/>
-          <p:nvPr/>
-        </p:nvSpPr>
-        <p:spPr>
-          <a:xfrm>
-            <a:off x="6263640" y="1325880"/>
-            <a:ext cx="2286000" cy="365760"/>
-          </a:xfrm>
-          <a:prstGeom prst="rect">
-            <a:avLst/>
-          </a:prstGeom>
-          <a:noFill/>
-          <a:ln/>
-        </p:spPr>
-        <p:txBody>
-          <a:bodyPr wrap="square" rtlCol="0" anchor="ctr"/>
-          <a:lstStyle/>
-          <a:p>
-            <a:pPr indent="0" marL="0">
-              <a:buNone/>
-            </a:pPr>
-            <a:r>
-              <a:rPr lang="en-US" sz="1400" b="1" dirty="0">
-                <a:solidFill>
-                  <a:srgbClr val="1B2A4A"/>
+              <a:t>Earth's shadow falls on the Moon</a:t>
+            </a:r>
+            <a:endParaRPr lang="en-US" sz="1300" dirty="0"/>
+          </a:p>
+          <a:p>
+            <a:pPr marL="342900" indent="-342900">
+              <a:spcAft>
+                <a:spcPts val="600"/>
+              </a:spcAft>
+              <a:buSzPct val="100000"/>
+              <a:buChar char="•"/>
+            </a:pPr>
+            <a:r>
+              <a:rPr lang="en-US" sz="1300" dirty="0">
+                <a:solidFill>
+                  <a:srgbClr val="3D3A36"/>
                 </a:solidFill>
                 <a:latin typeface="Calibri" pitchFamily="34" charset="0"/>
                 <a:ea typeface="Calibri" pitchFamily="34" charset="-122"/>
                 <a:cs typeface="Calibri" pitchFamily="34" charset="-120"/>
               </a:rPr>
-              <a:t>Full Moon</a:t>
-            </a:r>
-            <a:endParaRPr lang="en-US" sz="1400" dirty="0"/>
-          </a:p>
-        </p:txBody>
-      </p:sp>
-      <p:sp>
-        <p:nvSpPr>
-          <p:cNvPr id="16" name="Text 14"/>
-          <p:cNvSpPr/>
-          <p:nvPr/>
-        </p:nvSpPr>
-        <p:spPr>
-          <a:xfrm>
-            <a:off x="6263640" y="1737360"/>
-            <a:ext cx="2286000" cy="1097280"/>
-          </a:xfrm>
-          <a:prstGeom prst="rect">
-            <a:avLst/>
-          </a:prstGeom>
-          <a:noFill/>
-          <a:ln/>
-        </p:spPr>
-        <p:txBody>
-          <a:bodyPr wrap="square" rtlCol="0" anchor="t"/>
-          <a:lstStyle/>
-          <a:p>
-            <a:pPr indent="0" marL="0">
-              <a:buNone/>
-            </a:pPr>
-            <a:r>
-              <a:rPr lang="en-US" sz="1100" dirty="0">
+              <a:t>Visible from entire night side of Earth</a:t>
+            </a:r>
+            <a:endParaRPr lang="en-US" sz="1300" dirty="0"/>
+          </a:p>
+          <a:p>
+            <a:pPr marL="342900" indent="-342900">
+              <a:spcAft>
+                <a:spcPts val="600"/>
+              </a:spcAft>
+              <a:buSzPct val="100000"/>
+              <a:buChar char="•"/>
+            </a:pPr>
+            <a:r>
+              <a:rPr lang="en-US" sz="1300" dirty="0">
                 <a:solidFill>
                   <a:srgbClr val="3D3A36"/>
                 </a:solidFill>
@@ -2588,139 +3683,30 @@
                 <a:ea typeface="Calibri" pitchFamily="34" charset="-122"/>
                 <a:cs typeface="Calibri" pitchFamily="34" charset="-120"/>
               </a:rPr>
-              <a:t>Earth between Sun and Moon. Entire face lit. Brightest phase.</a:t>
-            </a:r>
-            <a:endParaRPr lang="en-US" sz="1100" dirty="0"/>
-          </a:p>
-        </p:txBody>
-      </p:sp>
-      <p:sp>
-        <p:nvSpPr>
-          <p:cNvPr id="17" name="Shape 15"/>
-          <p:cNvSpPr/>
-          <p:nvPr/>
-        </p:nvSpPr>
-        <p:spPr>
-          <a:xfrm>
-            <a:off x="457200" y="3200400"/>
-            <a:ext cx="2560320" cy="1828800"/>
-          </a:xfrm>
-          <a:prstGeom prst="rect">
-            <a:avLst/>
-          </a:prstGeom>
-          <a:solidFill>
-            <a:srgbClr val="FFFFFF"/>
-          </a:solidFill>
-          <a:ln w="12700">
-            <a:solidFill>
-              <a:srgbClr val="E5E2DC"/>
-            </a:solidFill>
-            <a:prstDash val="solid"/>
-          </a:ln>
-          <a:effectLst>
-            <a:outerShdw sx="100000" sy="100000" kx="0" ky="0" algn="bl" rotWithShape="0" blurRad="50800" dist="25400" dir="8100000">
-              <a:srgbClr val="000000">
-                <a:alpha val="10000"/>
-              </a:srgbClr>
-            </a:outerShdw>
-          </a:effectLst>
-        </p:spPr>
-      </p:sp>
-      <p:sp>
-        <p:nvSpPr>
-          <p:cNvPr id="18" name="Shape 16"/>
-          <p:cNvSpPr/>
-          <p:nvPr/>
-        </p:nvSpPr>
-        <p:spPr>
-          <a:xfrm>
-            <a:off x="457200" y="3200400"/>
-            <a:ext cx="2560320" cy="54864"/>
-          </a:xfrm>
-          <a:prstGeom prst="rect">
-            <a:avLst/>
-          </a:prstGeom>
-          <a:solidFill>
-            <a:srgbClr val="2A9D8F"/>
-          </a:solidFill>
-          <a:ln/>
-        </p:spPr>
-      </p:sp>
-      <p:sp>
-        <p:nvSpPr>
-          <p:cNvPr id="19" name="Text 17"/>
-          <p:cNvSpPr/>
-          <p:nvPr/>
-        </p:nvSpPr>
-        <p:spPr>
-          <a:xfrm>
-            <a:off x="594360" y="3337560"/>
-            <a:ext cx="2286000" cy="365760"/>
-          </a:xfrm>
-          <a:prstGeom prst="rect">
-            <a:avLst/>
-          </a:prstGeom>
-          <a:noFill/>
-          <a:ln/>
-        </p:spPr>
-        <p:txBody>
-          <a:bodyPr wrap="square" rtlCol="0" anchor="ctr"/>
-          <a:lstStyle/>
-          <a:p>
-            <a:pPr indent="0" marL="0">
-              <a:buNone/>
-            </a:pPr>
-            <a:r>
-              <a:rPr lang="en-US" sz="1400" b="1" dirty="0">
-                <a:solidFill>
-                  <a:srgbClr val="1B2A4A"/>
+              <a:t>Moon turns reddish colour</a:t>
+            </a:r>
+            <a:endParaRPr lang="en-US" sz="1300" dirty="0"/>
+          </a:p>
+          <a:p>
+            <a:pPr marL="342900" indent="-342900">
+              <a:spcAft>
+                <a:spcPts val="600"/>
+              </a:spcAft>
+              <a:buSzPct val="100000"/>
+              <a:buChar char="•"/>
+            </a:pPr>
+            <a:r>
+              <a:rPr lang="en-US" sz="1300" dirty="0">
+                <a:solidFill>
+                  <a:srgbClr val="3D3A36"/>
                 </a:solidFill>
                 <a:latin typeface="Calibri" pitchFamily="34" charset="0"/>
                 <a:ea typeface="Calibri" pitchFamily="34" charset="-122"/>
                 <a:cs typeface="Calibri" pitchFamily="34" charset="-120"/>
               </a:rPr>
-              <a:t>Last Quarter</a:t>
-            </a:r>
-            <a:endParaRPr lang="en-US" sz="1400" dirty="0"/>
-          </a:p>
-        </p:txBody>
-      </p:sp>
-      <p:sp>
-        <p:nvSpPr>
-          <p:cNvPr id="20" name="Text 18"/>
-          <p:cNvSpPr/>
-          <p:nvPr/>
-        </p:nvSpPr>
-        <p:spPr>
-          <a:xfrm>
-            <a:off x="594360" y="3749040"/>
-            <a:ext cx="2286000" cy="1097280"/>
-          </a:xfrm>
-          <a:prstGeom prst="rect">
-            <a:avLst/>
-          </a:prstGeom>
-          <a:noFill/>
-          <a:ln/>
-        </p:spPr>
-        <p:txBody>
-          <a:bodyPr wrap="square" rtlCol="0" anchor="t"/>
-          <a:lstStyle/>
-          <a:p>
-            <a:pPr indent="0" marL="0">
-              <a:buNone/>
-            </a:pPr>
-            <a:r>
-              <a:rPr lang="en-US" sz="1100" dirty="0">
-                <a:solidFill>
-                  <a:srgbClr val="3D3A36"/>
-                </a:solidFill>
-                <a:latin typeface="Calibri" pitchFamily="34" charset="0"/>
-                <a:ea typeface="Calibri" pitchFamily="34" charset="-122"/>
-                <a:cs typeface="Calibri" pitchFamily="34" charset="-120"/>
-              </a:rPr>
-              <a:t>Half lit (left half). Shrinking = 'waning'. Cycle takes ~29.5 days.</a:t>
-            </a:r>
-            <a:endParaRPr lang="en-US" sz="1100" dirty="0"/>
+              <a:t>Safe to watch with your eyes</a:t>
+            </a:r>
+            <a:endParaRPr lang="en-US" sz="1300" dirty="0"/>
           </a:p>
         </p:txBody>
       </p:sp>
@@ -2738,7 +3724,7 @@
     <p:bg>
       <p:bgPr>
         <a:solidFill>
-          <a:srgbClr val="1B2A4A"/>
+          <a:srgbClr val="FAF8F5"/>
         </a:solidFill>
       </p:bgPr>
     </p:bg>
@@ -2765,27 +3751,67 @@
         <p:spPr>
           <a:xfrm>
             <a:off x="0" y="0"/>
-            <a:ext cx="109728" cy="5143500"/>
-          </a:xfrm>
-          <a:prstGeom prst="rect">
-            <a:avLst/>
-          </a:prstGeom>
-          <a:solidFill>
-            <a:srgbClr val="E9C46A"/>
-          </a:solidFill>
-          <a:ln/>
-        </p:spPr>
-      </p:sp>
-      <p:sp>
-        <p:nvSpPr>
-          <p:cNvPr id="3" name="Text 1"/>
-          <p:cNvSpPr/>
-          <p:nvPr/>
-        </p:nvSpPr>
-        <p:spPr>
-          <a:xfrm>
-            <a:off x="731520" y="457200"/>
-            <a:ext cx="7772400" cy="731520"/>
+            <a:ext cx="9144000" cy="822960"/>
+          </a:xfrm>
+          <a:prstGeom prst="rect">
+            <a:avLst/>
+          </a:prstGeom>
+          <a:solidFill>
+            <a:srgbClr val="FFFFFF"/>
+          </a:solidFill>
+          <a:ln/>
+        </p:spPr>
+      </p:sp>
+      <p:sp>
+        <p:nvSpPr>
+          <p:cNvPr id="3" name="Shape 1"/>
+          <p:cNvSpPr/>
+          <p:nvPr/>
+        </p:nvSpPr>
+        <p:spPr>
+          <a:xfrm>
+            <a:off x="0" y="804672"/>
+            <a:ext cx="9144000" cy="27432"/>
+          </a:xfrm>
+          <a:prstGeom prst="rect">
+            <a:avLst/>
+          </a:prstGeom>
+          <a:solidFill>
+            <a:srgbClr val="E5E2DC"/>
+          </a:solidFill>
+          <a:ln/>
+        </p:spPr>
+      </p:sp>
+      <p:sp>
+        <p:nvSpPr>
+          <p:cNvPr id="4" name="Shape 2"/>
+          <p:cNvSpPr/>
+          <p:nvPr/>
+        </p:nvSpPr>
+        <p:spPr>
+          <a:xfrm>
+            <a:off x="548640" y="201168"/>
+            <a:ext cx="54864" cy="420624"/>
+          </a:xfrm>
+          <a:prstGeom prst="rect">
+            <a:avLst/>
+          </a:prstGeom>
+          <a:solidFill>
+            <a:srgbClr val="2A9D8F"/>
+          </a:solidFill>
+          <a:ln/>
+        </p:spPr>
+      </p:sp>
+      <p:sp>
+        <p:nvSpPr>
+          <p:cNvPr id="5" name="Text 3"/>
+          <p:cNvSpPr/>
+          <p:nvPr/>
+        </p:nvSpPr>
+        <p:spPr>
+          <a:xfrm>
+            <a:off x="777240" y="137160"/>
+            <a:ext cx="7772400" cy="548640"/>
           </a:xfrm>
           <a:prstGeom prst="rect">
             <a:avLst/>
@@ -2794,37 +3820,37 @@
           <a:ln/>
         </p:spPr>
         <p:txBody>
-          <a:bodyPr wrap="square" rtlCol="0" anchor="ctr"/>
+          <a:bodyPr wrap="square" lIns="0" tIns="0" rIns="0" bIns="0" rtlCol="0" anchor="ctr"/>
           <a:lstStyle/>
           <a:p>
             <a:pPr indent="0" marL="0">
               <a:buNone/>
             </a:pPr>
             <a:r>
-              <a:rPr lang="en-US" sz="3200" b="1" dirty="0">
-                <a:solidFill>
-                  <a:srgbClr val="FFFFFF"/>
+              <a:rPr lang="en-US" sz="2000" b="1" dirty="0">
+                <a:solidFill>
+                  <a:srgbClr val="1B2A4A"/>
                 </a:solidFill>
                 <a:latin typeface="Georgia" pitchFamily="34" charset="0"/>
                 <a:ea typeface="Georgia" pitchFamily="34" charset="-122"/>
                 <a:cs typeface="Georgia" pitchFamily="34" charset="-120"/>
               </a:rPr>
-              <a:t>Key Takeaways</a:t>
-            </a:r>
-            <a:endParaRPr lang="en-US" sz="3200" dirty="0"/>
-          </a:p>
-        </p:txBody>
-      </p:sp>
-      <p:sp>
-        <p:nvSpPr>
-          <p:cNvPr id="4" name="Text 2"/>
-          <p:cNvSpPr/>
-          <p:nvPr/>
-        </p:nvSpPr>
-        <p:spPr>
-          <a:xfrm>
-            <a:off x="731520" y="1463040"/>
-            <a:ext cx="7772400" cy="3200400"/>
+              <a:t>Phases of the Moon</a:t>
+            </a:r>
+            <a:endParaRPr lang="en-US" sz="2000" dirty="0"/>
+          </a:p>
+        </p:txBody>
+      </p:sp>
+      <p:sp>
+        <p:nvSpPr>
+          <p:cNvPr id="6" name="Text 4"/>
+          <p:cNvSpPr/>
+          <p:nvPr/>
+        </p:nvSpPr>
+        <p:spPr>
+          <a:xfrm>
+            <a:off x="731520" y="1051560"/>
+            <a:ext cx="7680960" cy="3108960"/>
           </a:xfrm>
           <a:prstGeom prst="rect">
             <a:avLst/>
@@ -2838,7 +3864,7 @@
           <a:p>
             <a:pPr marL="342900" indent="-342900">
               <a:spcAft>
-                <a:spcPts val="1000"/>
+                <a:spcPts val="800"/>
               </a:spcAft>
               <a:buSzPct val="100000"/>
               <a:buChar char="•"/>
@@ -2846,20 +3872,20 @@
             <a:r>
               <a:rPr lang="en-US" sz="1500" dirty="0">
                 <a:solidFill>
-                  <a:srgbClr val="CADCFC"/>
+                  <a:srgbClr val="3D3A36"/>
                 </a:solidFill>
                 <a:latin typeface="Calibri" pitchFamily="34" charset="0"/>
                 <a:ea typeface="Calibri" pitchFamily="34" charset="-122"/>
                 <a:cs typeface="Calibri" pitchFamily="34" charset="-120"/>
               </a:rPr>
-              <a:t>Earth orbits Sun in 365.25 days; rotates in 24 hours</a:t>
+              <a:t>The Moon does not produce its own light — it REFLECTS sunlight.</a:t>
             </a:r>
             <a:endParaRPr lang="en-US" sz="1500" dirty="0"/>
           </a:p>
           <a:p>
             <a:pPr marL="342900" indent="-342900">
               <a:spcAft>
-                <a:spcPts val="1000"/>
+                <a:spcPts val="800"/>
               </a:spcAft>
               <a:buSzPct val="100000"/>
               <a:buChar char="•"/>
@@ -2867,20 +3893,20 @@
             <a:r>
               <a:rPr lang="en-US" sz="1500" dirty="0">
                 <a:solidFill>
-                  <a:srgbClr val="CADCFC"/>
+                  <a:srgbClr val="3D3A36"/>
                 </a:solidFill>
                 <a:latin typeface="Calibri" pitchFamily="34" charset="0"/>
                 <a:ea typeface="Calibri" pitchFamily="34" charset="-122"/>
                 <a:cs typeface="Calibri" pitchFamily="34" charset="-120"/>
               </a:rPr>
-              <a:t>Axis tilted 23.5° — causes seasons</a:t>
+              <a:t>As the Moon orbits Earth, we see different amounts of the lit side.</a:t>
             </a:r>
             <a:endParaRPr lang="en-US" sz="1500" dirty="0"/>
           </a:p>
           <a:p>
             <a:pPr marL="342900" indent="-342900">
               <a:spcAft>
-                <a:spcPts val="1000"/>
+                <a:spcPts val="800"/>
               </a:spcAft>
               <a:buSzPct val="100000"/>
               <a:buChar char="•"/>
@@ -2888,20 +3914,20 @@
             <a:r>
               <a:rPr lang="en-US" sz="1500" dirty="0">
                 <a:solidFill>
-                  <a:srgbClr val="CADCFC"/>
+                  <a:srgbClr val="3D3A36"/>
                 </a:solidFill>
                 <a:latin typeface="Calibri" pitchFamily="34" charset="0"/>
                 <a:ea typeface="Calibri" pitchFamily="34" charset="-122"/>
                 <a:cs typeface="Calibri" pitchFamily="34" charset="-120"/>
               </a:rPr>
-              <a:t>Moon orbits Earth in ~27.3 days; phases cycle in ~29.5 days</a:t>
+              <a:t>New Moon → Waxing Crescent → First Quarter → Waxing Gibbous → Full Moon.</a:t>
             </a:r>
             <a:endParaRPr lang="en-US" sz="1500" dirty="0"/>
           </a:p>
           <a:p>
             <a:pPr marL="342900" indent="-342900">
               <a:spcAft>
-                <a:spcPts val="1000"/>
+                <a:spcPts val="800"/>
               </a:spcAft>
               <a:buSzPct val="100000"/>
               <a:buChar char="•"/>
@@ -2909,20 +3935,20 @@
             <a:r>
               <a:rPr lang="en-US" sz="1500" dirty="0">
                 <a:solidFill>
-                  <a:srgbClr val="CADCFC"/>
+                  <a:srgbClr val="3D3A36"/>
                 </a:solidFill>
                 <a:latin typeface="Calibri" pitchFamily="34" charset="0"/>
                 <a:ea typeface="Calibri" pitchFamily="34" charset="-122"/>
                 <a:cs typeface="Calibri" pitchFamily="34" charset="-120"/>
               </a:rPr>
-              <a:t>Moon phases: new → first quarter → full → last quarter</a:t>
+              <a:t>Full Moon → Waning Gibbous → Third Quarter → Waning Crescent → New Moon.</a:t>
             </a:r>
             <a:endParaRPr lang="en-US" sz="1500" dirty="0"/>
           </a:p>
           <a:p>
             <a:pPr marL="342900" indent="-342900">
               <a:spcAft>
-                <a:spcPts val="1000"/>
+                <a:spcPts val="800"/>
               </a:spcAft>
               <a:buSzPct val="100000"/>
               <a:buChar char="•"/>
@@ -2930,13 +3956,13 @@
             <a:r>
               <a:rPr lang="en-US" sz="1500" dirty="0">
                 <a:solidFill>
-                  <a:srgbClr val="CADCFC"/>
+                  <a:srgbClr val="3D3A36"/>
                 </a:solidFill>
                 <a:latin typeface="Calibri" pitchFamily="34" charset="0"/>
                 <a:ea typeface="Calibri" pitchFamily="34" charset="-122"/>
                 <a:cs typeface="Calibri" pitchFamily="34" charset="-120"/>
               </a:rPr>
-              <a:t>Moon's gravity causes tides; Sun provides light and heat</a:t>
+              <a:t>A complete cycle of phases takes about 29.5 days.</a:t>
             </a:r>
             <a:endParaRPr lang="en-US" sz="1500" dirty="0"/>
           </a:p>
@@ -2944,14 +3970,41 @@
       </p:sp>
       <p:sp>
         <p:nvSpPr>
-          <p:cNvPr id="5" name="Text 3"/>
-          <p:cNvSpPr/>
-          <p:nvPr/>
-        </p:nvSpPr>
-        <p:spPr>
-          <a:xfrm>
-            <a:off x="731520" y="4572000"/>
-            <a:ext cx="7772400" cy="365760"/>
+          <p:cNvPr id="7" name="Shape 5"/>
+          <p:cNvSpPr/>
+          <p:nvPr/>
+        </p:nvSpPr>
+        <p:spPr>
+          <a:xfrm>
+            <a:off x="731520" y="4206240"/>
+            <a:ext cx="7680960" cy="640080"/>
+          </a:xfrm>
+          <a:prstGeom prst="rect">
+            <a:avLst/>
+          </a:prstGeom>
+          <a:solidFill>
+            <a:srgbClr val="E8F5F3"/>
+          </a:solidFill>
+          <a:ln/>
+          <a:effectLst>
+            <a:outerShdw sx="100000" sy="100000" kx="0" ky="0" algn="bl" rotWithShape="0" blurRad="50800" dist="25400" dir="8100000">
+              <a:srgbClr val="000000">
+                <a:alpha val="10000"/>
+              </a:srgbClr>
+            </a:outerShdw>
+          </a:effectLst>
+        </p:spPr>
+      </p:sp>
+      <p:sp>
+        <p:nvSpPr>
+          <p:cNvPr id="8" name="Text 6"/>
+          <p:cNvSpPr/>
+          <p:nvPr/>
+        </p:nvSpPr>
+        <p:spPr>
+          <a:xfrm>
+            <a:off x="914400" y="4251960"/>
+            <a:ext cx="7315200" cy="548640"/>
           </a:xfrm>
           <a:prstGeom prst="rect">
             <a:avLst/>
@@ -2967,17 +4020,1179 @@
               <a:buNone/>
             </a:pPr>
             <a:r>
-              <a:rPr lang="en-US" sz="1100" dirty="0">
-                <a:solidFill>
-                  <a:srgbClr val="E9C46A"/>
+              <a:rPr lang="en-US" sz="1200" b="1" dirty="0">
+                <a:solidFill>
+                  <a:srgbClr val="2A9D8F"/>
                 </a:solidFill>
                 <a:latin typeface="Calibri" pitchFamily="34" charset="0"/>
                 <a:ea typeface="Calibri" pitchFamily="34" charset="-122"/>
                 <a:cs typeface="Calibri" pitchFamily="34" charset="-120"/>
               </a:rPr>
+              <a:t>Key Idea: </a:t>
+            </a:r>
+            <a:pPr indent="0" marL="0">
+              <a:buNone/>
+            </a:pPr>
+            <a:r>
+              <a:rPr lang="en-US" sz="1200" i="1" dirty="0">
+                <a:solidFill>
+                  <a:srgbClr val="3D3A36"/>
+                </a:solidFill>
+                <a:latin typeface="Calibri" pitchFamily="34" charset="0"/>
+                <a:ea typeface="Calibri" pitchFamily="34" charset="-122"/>
+                <a:cs typeface="Calibri" pitchFamily="34" charset="-120"/>
+              </a:rPr>
+              <a:t>Waxing = growing bigger. Waning = getting smaller.</a:t>
+            </a:r>
+            <a:endParaRPr lang="en-US" sz="1200" dirty="0"/>
+          </a:p>
+        </p:txBody>
+      </p:sp>
+    </p:spTree>
+  </p:cSld>
+  <p:clrMapOvr>
+    <a:masterClrMapping/>
+  </p:clrMapOvr>
+</p:sld>
+</file>
+
+<file path=ppt/slides/slide6.xml><?xml version="1.0" encoding="utf-8"?>
+<p:sld xmlns:a="http://schemas.openxmlformats.org/drawingml/2006/main" xmlns:r="http://schemas.openxmlformats.org/officeDocument/2006/relationships" xmlns:p="http://schemas.openxmlformats.org/presentationml/2006/main">
+  <p:cSld name="Slide 6">
+    <p:bg>
+      <p:bgPr>
+        <a:solidFill>
+          <a:srgbClr val="FAF8F5"/>
+        </a:solidFill>
+      </p:bgPr>
+    </p:bg>
+    <p:spTree>
+      <p:nvGrpSpPr>
+        <p:cNvPr id="1" name=""/>
+        <p:cNvGrpSpPr/>
+        <p:nvPr/>
+      </p:nvGrpSpPr>
+      <p:grpSpPr>
+        <a:xfrm>
+          <a:off x="0" y="0"/>
+          <a:ext cx="0" cy="0"/>
+          <a:chOff x="0" y="0"/>
+          <a:chExt cx="0" cy="0"/>
+        </a:xfrm>
+      </p:grpSpPr>
+      <p:sp>
+        <p:nvSpPr>
+          <p:cNvPr id="2" name="Shape 0"/>
+          <p:cNvSpPr/>
+          <p:nvPr/>
+        </p:nvSpPr>
+        <p:spPr>
+          <a:xfrm>
+            <a:off x="0" y="0"/>
+            <a:ext cx="9144000" cy="822960"/>
+          </a:xfrm>
+          <a:prstGeom prst="rect">
+            <a:avLst/>
+          </a:prstGeom>
+          <a:solidFill>
+            <a:srgbClr val="FFFFFF"/>
+          </a:solidFill>
+          <a:ln/>
+        </p:spPr>
+      </p:sp>
+      <p:sp>
+        <p:nvSpPr>
+          <p:cNvPr id="3" name="Shape 1"/>
+          <p:cNvSpPr/>
+          <p:nvPr/>
+        </p:nvSpPr>
+        <p:spPr>
+          <a:xfrm>
+            <a:off x="0" y="804672"/>
+            <a:ext cx="9144000" cy="27432"/>
+          </a:xfrm>
+          <a:prstGeom prst="rect">
+            <a:avLst/>
+          </a:prstGeom>
+          <a:solidFill>
+            <a:srgbClr val="E5E2DC"/>
+          </a:solidFill>
+          <a:ln/>
+        </p:spPr>
+      </p:sp>
+      <p:sp>
+        <p:nvSpPr>
+          <p:cNvPr id="4" name="Shape 2"/>
+          <p:cNvSpPr/>
+          <p:nvPr/>
+        </p:nvSpPr>
+        <p:spPr>
+          <a:xfrm>
+            <a:off x="548640" y="201168"/>
+            <a:ext cx="54864" cy="420624"/>
+          </a:xfrm>
+          <a:prstGeom prst="rect">
+            <a:avLst/>
+          </a:prstGeom>
+          <a:solidFill>
+            <a:srgbClr val="2A9D8F"/>
+          </a:solidFill>
+          <a:ln/>
+        </p:spPr>
+      </p:sp>
+      <p:sp>
+        <p:nvSpPr>
+          <p:cNvPr id="5" name="Text 3"/>
+          <p:cNvSpPr/>
+          <p:nvPr/>
+        </p:nvSpPr>
+        <p:spPr>
+          <a:xfrm>
+            <a:off x="777240" y="137160"/>
+            <a:ext cx="7772400" cy="548640"/>
+          </a:xfrm>
+          <a:prstGeom prst="rect">
+            <a:avLst/>
+          </a:prstGeom>
+          <a:noFill/>
+          <a:ln/>
+        </p:spPr>
+        <p:txBody>
+          <a:bodyPr wrap="square" lIns="0" tIns="0" rIns="0" bIns="0" rtlCol="0" anchor="ctr"/>
+          <a:lstStyle/>
+          <a:p>
+            <a:pPr indent="0" marL="0">
+              <a:buNone/>
+            </a:pPr>
+            <a:r>
+              <a:rPr lang="en-US" sz="2000" b="1" dirty="0">
+                <a:solidFill>
+                  <a:srgbClr val="1B2A4A"/>
+                </a:solidFill>
+                <a:latin typeface="Georgia" pitchFamily="34" charset="0"/>
+                <a:ea typeface="Georgia" pitchFamily="34" charset="-122"/>
+                <a:cs typeface="Georgia" pitchFamily="34" charset="-120"/>
+              </a:rPr>
+              <a:t>Tides — The Moon's Pull on Earth</a:t>
+            </a:r>
+            <a:endParaRPr lang="en-US" sz="2000" dirty="0"/>
+          </a:p>
+        </p:txBody>
+      </p:sp>
+      <p:sp>
+        <p:nvSpPr>
+          <p:cNvPr id="6" name="Text 4"/>
+          <p:cNvSpPr/>
+          <p:nvPr/>
+        </p:nvSpPr>
+        <p:spPr>
+          <a:xfrm>
+            <a:off x="731520" y="1051560"/>
+            <a:ext cx="7680960" cy="3108960"/>
+          </a:xfrm>
+          <a:prstGeom prst="rect">
+            <a:avLst/>
+          </a:prstGeom>
+          <a:noFill/>
+          <a:ln/>
+        </p:spPr>
+        <p:txBody>
+          <a:bodyPr wrap="square" rtlCol="0" anchor="t"/>
+          <a:lstStyle/>
+          <a:p>
+            <a:pPr marL="342900" indent="-342900">
+              <a:spcAft>
+                <a:spcPts val="800"/>
+              </a:spcAft>
+              <a:buSzPct val="100000"/>
+              <a:buChar char="•"/>
+            </a:pPr>
+            <a:r>
+              <a:rPr lang="en-US" sz="1500" dirty="0">
+                <a:solidFill>
+                  <a:srgbClr val="3D3A36"/>
+                </a:solidFill>
+                <a:latin typeface="Calibri" pitchFamily="34" charset="0"/>
+                <a:ea typeface="Calibri" pitchFamily="34" charset="-122"/>
+                <a:cs typeface="Calibri" pitchFamily="34" charset="-120"/>
+              </a:rPr>
+              <a:t>The Moon's gravity pulls on Earth's oceans, creating tides.</a:t>
+            </a:r>
+            <a:endParaRPr lang="en-US" sz="1500" dirty="0"/>
+          </a:p>
+          <a:p>
+            <a:pPr marL="342900" indent="-342900">
+              <a:spcAft>
+                <a:spcPts val="800"/>
+              </a:spcAft>
+              <a:buSzPct val="100000"/>
+              <a:buChar char="•"/>
+            </a:pPr>
+            <a:r>
+              <a:rPr lang="en-US" sz="1500" dirty="0">
+                <a:solidFill>
+                  <a:srgbClr val="3D3A36"/>
+                </a:solidFill>
+                <a:latin typeface="Calibri" pitchFamily="34" charset="0"/>
+                <a:ea typeface="Calibri" pitchFamily="34" charset="-122"/>
+                <a:cs typeface="Calibri" pitchFamily="34" charset="-120"/>
+              </a:rPr>
+              <a:t>HIGH TIDE: the ocean is pulled towards the Moon (and on the opposite side).</a:t>
+            </a:r>
+            <a:endParaRPr lang="en-US" sz="1500" dirty="0"/>
+          </a:p>
+          <a:p>
+            <a:pPr marL="342900" indent="-342900">
+              <a:spcAft>
+                <a:spcPts val="800"/>
+              </a:spcAft>
+              <a:buSzPct val="100000"/>
+              <a:buChar char="•"/>
+            </a:pPr>
+            <a:r>
+              <a:rPr lang="en-US" sz="1500" dirty="0">
+                <a:solidFill>
+                  <a:srgbClr val="3D3A36"/>
+                </a:solidFill>
+                <a:latin typeface="Calibri" pitchFamily="34" charset="0"/>
+                <a:ea typeface="Calibri" pitchFamily="34" charset="-122"/>
+                <a:cs typeface="Calibri" pitchFamily="34" charset="-120"/>
+              </a:rPr>
+              <a:t>LOW TIDE: water moves away from the areas between high tides.</a:t>
+            </a:r>
+            <a:endParaRPr lang="en-US" sz="1500" dirty="0"/>
+          </a:p>
+          <a:p>
+            <a:pPr marL="342900" indent="-342900">
+              <a:spcAft>
+                <a:spcPts val="800"/>
+              </a:spcAft>
+              <a:buSzPct val="100000"/>
+              <a:buChar char="•"/>
+            </a:pPr>
+            <a:r>
+              <a:rPr lang="en-US" sz="1500" dirty="0">
+                <a:solidFill>
+                  <a:srgbClr val="3D3A36"/>
+                </a:solidFill>
+                <a:latin typeface="Calibri" pitchFamily="34" charset="0"/>
+                <a:ea typeface="Calibri" pitchFamily="34" charset="-122"/>
+                <a:cs typeface="Calibri" pitchFamily="34" charset="-120"/>
+              </a:rPr>
+              <a:t>There are about 2 high tides and 2 low tides every day.</a:t>
+            </a:r>
+            <a:endParaRPr lang="en-US" sz="1500" dirty="0"/>
+          </a:p>
+          <a:p>
+            <a:pPr marL="342900" indent="-342900">
+              <a:spcAft>
+                <a:spcPts val="800"/>
+              </a:spcAft>
+              <a:buSzPct val="100000"/>
+              <a:buChar char="•"/>
+            </a:pPr>
+            <a:r>
+              <a:rPr lang="en-US" sz="1500" dirty="0">
+                <a:solidFill>
+                  <a:srgbClr val="3D3A36"/>
+                </a:solidFill>
+                <a:latin typeface="Calibri" pitchFamily="34" charset="0"/>
+                <a:ea typeface="Calibri" pitchFamily="34" charset="-122"/>
+                <a:cs typeface="Calibri" pitchFamily="34" charset="-120"/>
+              </a:rPr>
+              <a:t>Spring tides (extra high) happen during Full Moon and New Moon.</a:t>
+            </a:r>
+            <a:endParaRPr lang="en-US" sz="1500" dirty="0"/>
+          </a:p>
+        </p:txBody>
+      </p:sp>
+    </p:spTree>
+  </p:cSld>
+  <p:clrMapOvr>
+    <a:masterClrMapping/>
+  </p:clrMapOvr>
+</p:sld>
+</file>
+
+<file path=ppt/slides/slide7.xml><?xml version="1.0" encoding="utf-8"?>
+<p:sld xmlns:a="http://schemas.openxmlformats.org/drawingml/2006/main" xmlns:r="http://schemas.openxmlformats.org/officeDocument/2006/relationships" xmlns:p="http://schemas.openxmlformats.org/presentationml/2006/main">
+  <p:cSld name="Slide 7">
+    <p:bg>
+      <p:bgPr>
+        <a:solidFill>
+          <a:srgbClr val="FAF8F5"/>
+        </a:solidFill>
+      </p:bgPr>
+    </p:bg>
+    <p:spTree>
+      <p:nvGrpSpPr>
+        <p:cNvPr id="1" name=""/>
+        <p:cNvGrpSpPr/>
+        <p:nvPr/>
+      </p:nvGrpSpPr>
+      <p:grpSpPr>
+        <a:xfrm>
+          <a:off x="0" y="0"/>
+          <a:ext cx="0" cy="0"/>
+          <a:chOff x="0" y="0"/>
+          <a:chExt cx="0" cy="0"/>
+        </a:xfrm>
+      </p:grpSpPr>
+      <p:sp>
+        <p:nvSpPr>
+          <p:cNvPr id="2" name="Shape 0"/>
+          <p:cNvSpPr/>
+          <p:nvPr/>
+        </p:nvSpPr>
+        <p:spPr>
+          <a:xfrm>
+            <a:off x="0" y="0"/>
+            <a:ext cx="9144000" cy="822960"/>
+          </a:xfrm>
+          <a:prstGeom prst="rect">
+            <a:avLst/>
+          </a:prstGeom>
+          <a:solidFill>
+            <a:srgbClr val="FFFFFF"/>
+          </a:solidFill>
+          <a:ln/>
+        </p:spPr>
+      </p:sp>
+      <p:sp>
+        <p:nvSpPr>
+          <p:cNvPr id="3" name="Shape 1"/>
+          <p:cNvSpPr/>
+          <p:nvPr/>
+        </p:nvSpPr>
+        <p:spPr>
+          <a:xfrm>
+            <a:off x="0" y="804672"/>
+            <a:ext cx="9144000" cy="27432"/>
+          </a:xfrm>
+          <a:prstGeom prst="rect">
+            <a:avLst/>
+          </a:prstGeom>
+          <a:solidFill>
+            <a:srgbClr val="E5E2DC"/>
+          </a:solidFill>
+          <a:ln/>
+        </p:spPr>
+      </p:sp>
+      <p:sp>
+        <p:nvSpPr>
+          <p:cNvPr id="4" name="Shape 2"/>
+          <p:cNvSpPr/>
+          <p:nvPr/>
+        </p:nvSpPr>
+        <p:spPr>
+          <a:xfrm>
+            <a:off x="548640" y="201168"/>
+            <a:ext cx="54864" cy="420624"/>
+          </a:xfrm>
+          <a:prstGeom prst="rect">
+            <a:avLst/>
+          </a:prstGeom>
+          <a:solidFill>
+            <a:srgbClr val="2A9D8F"/>
+          </a:solidFill>
+          <a:ln/>
+        </p:spPr>
+      </p:sp>
+      <p:sp>
+        <p:nvSpPr>
+          <p:cNvPr id="5" name="Text 3"/>
+          <p:cNvSpPr/>
+          <p:nvPr/>
+        </p:nvSpPr>
+        <p:spPr>
+          <a:xfrm>
+            <a:off x="777240" y="137160"/>
+            <a:ext cx="7772400" cy="548640"/>
+          </a:xfrm>
+          <a:prstGeom prst="rect">
+            <a:avLst/>
+          </a:prstGeom>
+          <a:noFill/>
+          <a:ln/>
+        </p:spPr>
+        <p:txBody>
+          <a:bodyPr wrap="square" lIns="0" tIns="0" rIns="0" bIns="0" rtlCol="0" anchor="ctr"/>
+          <a:lstStyle/>
+          <a:p>
+            <a:pPr indent="0" marL="0">
+              <a:buNone/>
+            </a:pPr>
+            <a:r>
+              <a:rPr lang="en-US" sz="2000" b="1" dirty="0">
+                <a:solidFill>
+                  <a:srgbClr val="1B2A4A"/>
+                </a:solidFill>
+                <a:latin typeface="Georgia" pitchFamily="34" charset="0"/>
+                <a:ea typeface="Georgia" pitchFamily="34" charset="-122"/>
+                <a:cs typeface="Georgia" pitchFamily="34" charset="-120"/>
+              </a:rPr>
+              <a:t>Check Your Understanding</a:t>
+            </a:r>
+            <a:endParaRPr lang="en-US" sz="2000" dirty="0"/>
+          </a:p>
+        </p:txBody>
+      </p:sp>
+      <p:sp>
+        <p:nvSpPr>
+          <p:cNvPr id="6" name="Shape 4"/>
+          <p:cNvSpPr/>
+          <p:nvPr/>
+        </p:nvSpPr>
+        <p:spPr>
+          <a:xfrm>
+            <a:off x="731520" y="1051560"/>
+            <a:ext cx="7680960" cy="438912"/>
+          </a:xfrm>
+          <a:prstGeom prst="rect">
+            <a:avLst/>
+          </a:prstGeom>
+          <a:solidFill>
+            <a:srgbClr val="FFFFFF"/>
+          </a:solidFill>
+          <a:ln/>
+        </p:spPr>
+      </p:sp>
+      <p:sp>
+        <p:nvSpPr>
+          <p:cNvPr id="7" name="Text 5"/>
+          <p:cNvSpPr/>
+          <p:nvPr/>
+        </p:nvSpPr>
+        <p:spPr>
+          <a:xfrm>
+            <a:off x="868680" y="1051560"/>
+            <a:ext cx="320040" cy="438912"/>
+          </a:xfrm>
+          <a:prstGeom prst="rect">
+            <a:avLst/>
+          </a:prstGeom>
+          <a:noFill/>
+          <a:ln/>
+        </p:spPr>
+        <p:txBody>
+          <a:bodyPr wrap="square" rtlCol="0" anchor="ctr"/>
+          <a:lstStyle/>
+          <a:p>
+            <a:pPr indent="0" marL="0">
+              <a:buNone/>
+            </a:pPr>
+            <a:r>
+              <a:rPr lang="en-US" sz="1400" dirty="0">
+                <a:solidFill>
+                  <a:srgbClr val="2A9D8F"/>
+                </a:solidFill>
+              </a:rPr>
+              <a:t>☐</a:t>
+            </a:r>
+            <a:endParaRPr lang="en-US" sz="1400" dirty="0"/>
+          </a:p>
+        </p:txBody>
+      </p:sp>
+      <p:sp>
+        <p:nvSpPr>
+          <p:cNvPr id="8" name="Text 6"/>
+          <p:cNvSpPr/>
+          <p:nvPr/>
+        </p:nvSpPr>
+        <p:spPr>
+          <a:xfrm>
+            <a:off x="1234440" y="1051560"/>
+            <a:ext cx="6949440" cy="438912"/>
+          </a:xfrm>
+          <a:prstGeom prst="rect">
+            <a:avLst/>
+          </a:prstGeom>
+          <a:noFill/>
+          <a:ln/>
+        </p:spPr>
+        <p:txBody>
+          <a:bodyPr wrap="square" rtlCol="0" anchor="ctr"/>
+          <a:lstStyle/>
+          <a:p>
+            <a:pPr indent="0" marL="0">
+              <a:buNone/>
+            </a:pPr>
+            <a:r>
+              <a:rPr lang="en-US" sz="1300" dirty="0">
+                <a:solidFill>
+                  <a:srgbClr val="3D3A36"/>
+                </a:solidFill>
+                <a:latin typeface="Calibri" pitchFamily="34" charset="0"/>
+                <a:ea typeface="Calibri" pitchFamily="34" charset="-122"/>
+                <a:cs typeface="Calibri" pitchFamily="34" charset="-120"/>
+              </a:rPr>
+              <a:t>I know the difference between rotation and revolution</a:t>
+            </a:r>
+            <a:endParaRPr lang="en-US" sz="1300" dirty="0"/>
+          </a:p>
+        </p:txBody>
+      </p:sp>
+      <p:sp>
+        <p:nvSpPr>
+          <p:cNvPr id="9" name="Shape 7"/>
+          <p:cNvSpPr/>
+          <p:nvPr/>
+        </p:nvSpPr>
+        <p:spPr>
+          <a:xfrm>
+            <a:off x="731520" y="1554480"/>
+            <a:ext cx="7680960" cy="438912"/>
+          </a:xfrm>
+          <a:prstGeom prst="rect">
+            <a:avLst/>
+          </a:prstGeom>
+          <a:solidFill>
+            <a:srgbClr val="F8F6F3"/>
+          </a:solidFill>
+          <a:ln/>
+        </p:spPr>
+      </p:sp>
+      <p:sp>
+        <p:nvSpPr>
+          <p:cNvPr id="10" name="Text 8"/>
+          <p:cNvSpPr/>
+          <p:nvPr/>
+        </p:nvSpPr>
+        <p:spPr>
+          <a:xfrm>
+            <a:off x="868680" y="1554480"/>
+            <a:ext cx="320040" cy="438912"/>
+          </a:xfrm>
+          <a:prstGeom prst="rect">
+            <a:avLst/>
+          </a:prstGeom>
+          <a:noFill/>
+          <a:ln/>
+        </p:spPr>
+        <p:txBody>
+          <a:bodyPr wrap="square" rtlCol="0" anchor="ctr"/>
+          <a:lstStyle/>
+          <a:p>
+            <a:pPr indent="0" marL="0">
+              <a:buNone/>
+            </a:pPr>
+            <a:r>
+              <a:rPr lang="en-US" sz="1400" dirty="0">
+                <a:solidFill>
+                  <a:srgbClr val="2A9D8F"/>
+                </a:solidFill>
+              </a:rPr>
+              <a:t>☐</a:t>
+            </a:r>
+            <a:endParaRPr lang="en-US" sz="1400" dirty="0"/>
+          </a:p>
+        </p:txBody>
+      </p:sp>
+      <p:sp>
+        <p:nvSpPr>
+          <p:cNvPr id="11" name="Text 9"/>
+          <p:cNvSpPr/>
+          <p:nvPr/>
+        </p:nvSpPr>
+        <p:spPr>
+          <a:xfrm>
+            <a:off x="1234440" y="1554480"/>
+            <a:ext cx="6949440" cy="438912"/>
+          </a:xfrm>
+          <a:prstGeom prst="rect">
+            <a:avLst/>
+          </a:prstGeom>
+          <a:noFill/>
+          <a:ln/>
+        </p:spPr>
+        <p:txBody>
+          <a:bodyPr wrap="square" rtlCol="0" anchor="ctr"/>
+          <a:lstStyle/>
+          <a:p>
+            <a:pPr indent="0" marL="0">
+              <a:buNone/>
+            </a:pPr>
+            <a:r>
+              <a:rPr lang="en-US" sz="1300" dirty="0">
+                <a:solidFill>
+                  <a:srgbClr val="3D3A36"/>
+                </a:solidFill>
+                <a:latin typeface="Calibri" pitchFamily="34" charset="0"/>
+                <a:ea typeface="Calibri" pitchFamily="34" charset="-122"/>
+                <a:cs typeface="Calibri" pitchFamily="34" charset="-120"/>
+              </a:rPr>
+              <a:t>I can explain what causes day, night, and seasons</a:t>
+            </a:r>
+            <a:endParaRPr lang="en-US" sz="1300" dirty="0"/>
+          </a:p>
+        </p:txBody>
+      </p:sp>
+      <p:sp>
+        <p:nvSpPr>
+          <p:cNvPr id="12" name="Shape 10"/>
+          <p:cNvSpPr/>
+          <p:nvPr/>
+        </p:nvSpPr>
+        <p:spPr>
+          <a:xfrm>
+            <a:off x="731520" y="2057400"/>
+            <a:ext cx="7680960" cy="438912"/>
+          </a:xfrm>
+          <a:prstGeom prst="rect">
+            <a:avLst/>
+          </a:prstGeom>
+          <a:solidFill>
+            <a:srgbClr val="FFFFFF"/>
+          </a:solidFill>
+          <a:ln/>
+        </p:spPr>
+      </p:sp>
+      <p:sp>
+        <p:nvSpPr>
+          <p:cNvPr id="13" name="Text 11"/>
+          <p:cNvSpPr/>
+          <p:nvPr/>
+        </p:nvSpPr>
+        <p:spPr>
+          <a:xfrm>
+            <a:off x="868680" y="2057400"/>
+            <a:ext cx="320040" cy="438912"/>
+          </a:xfrm>
+          <a:prstGeom prst="rect">
+            <a:avLst/>
+          </a:prstGeom>
+          <a:noFill/>
+          <a:ln/>
+        </p:spPr>
+        <p:txBody>
+          <a:bodyPr wrap="square" rtlCol="0" anchor="ctr"/>
+          <a:lstStyle/>
+          <a:p>
+            <a:pPr indent="0" marL="0">
+              <a:buNone/>
+            </a:pPr>
+            <a:r>
+              <a:rPr lang="en-US" sz="1400" dirty="0">
+                <a:solidFill>
+                  <a:srgbClr val="2A9D8F"/>
+                </a:solidFill>
+              </a:rPr>
+              <a:t>☐</a:t>
+            </a:r>
+            <a:endParaRPr lang="en-US" sz="1400" dirty="0"/>
+          </a:p>
+        </p:txBody>
+      </p:sp>
+      <p:sp>
+        <p:nvSpPr>
+          <p:cNvPr id="14" name="Text 12"/>
+          <p:cNvSpPr/>
+          <p:nvPr/>
+        </p:nvSpPr>
+        <p:spPr>
+          <a:xfrm>
+            <a:off x="1234440" y="2057400"/>
+            <a:ext cx="6949440" cy="438912"/>
+          </a:xfrm>
+          <a:prstGeom prst="rect">
+            <a:avLst/>
+          </a:prstGeom>
+          <a:noFill/>
+          <a:ln/>
+        </p:spPr>
+        <p:txBody>
+          <a:bodyPr wrap="square" rtlCol="0" anchor="ctr"/>
+          <a:lstStyle/>
+          <a:p>
+            <a:pPr indent="0" marL="0">
+              <a:buNone/>
+            </a:pPr>
+            <a:r>
+              <a:rPr lang="en-US" sz="1300" dirty="0">
+                <a:solidFill>
+                  <a:srgbClr val="3D3A36"/>
+                </a:solidFill>
+                <a:latin typeface="Calibri" pitchFamily="34" charset="0"/>
+                <a:ea typeface="Calibri" pitchFamily="34" charset="-122"/>
+                <a:cs typeface="Calibri" pitchFamily="34" charset="-120"/>
+              </a:rPr>
+              <a:t>I can describe the phases of the Moon</a:t>
+            </a:r>
+            <a:endParaRPr lang="en-US" sz="1300" dirty="0"/>
+          </a:p>
+        </p:txBody>
+      </p:sp>
+      <p:sp>
+        <p:nvSpPr>
+          <p:cNvPr id="15" name="Shape 13"/>
+          <p:cNvSpPr/>
+          <p:nvPr/>
+        </p:nvSpPr>
+        <p:spPr>
+          <a:xfrm>
+            <a:off x="731520" y="2560320"/>
+            <a:ext cx="7680960" cy="438912"/>
+          </a:xfrm>
+          <a:prstGeom prst="rect">
+            <a:avLst/>
+          </a:prstGeom>
+          <a:solidFill>
+            <a:srgbClr val="F8F6F3"/>
+          </a:solidFill>
+          <a:ln/>
+        </p:spPr>
+      </p:sp>
+      <p:sp>
+        <p:nvSpPr>
+          <p:cNvPr id="16" name="Text 14"/>
+          <p:cNvSpPr/>
+          <p:nvPr/>
+        </p:nvSpPr>
+        <p:spPr>
+          <a:xfrm>
+            <a:off x="868680" y="2560320"/>
+            <a:ext cx="320040" cy="438912"/>
+          </a:xfrm>
+          <a:prstGeom prst="rect">
+            <a:avLst/>
+          </a:prstGeom>
+          <a:noFill/>
+          <a:ln/>
+        </p:spPr>
+        <p:txBody>
+          <a:bodyPr wrap="square" rtlCol="0" anchor="ctr"/>
+          <a:lstStyle/>
+          <a:p>
+            <a:pPr indent="0" marL="0">
+              <a:buNone/>
+            </a:pPr>
+            <a:r>
+              <a:rPr lang="en-US" sz="1400" dirty="0">
+                <a:solidFill>
+                  <a:srgbClr val="2A9D8F"/>
+                </a:solidFill>
+              </a:rPr>
+              <a:t>☐</a:t>
+            </a:r>
+            <a:endParaRPr lang="en-US" sz="1400" dirty="0"/>
+          </a:p>
+        </p:txBody>
+      </p:sp>
+      <p:sp>
+        <p:nvSpPr>
+          <p:cNvPr id="17" name="Text 15"/>
+          <p:cNvSpPr/>
+          <p:nvPr/>
+        </p:nvSpPr>
+        <p:spPr>
+          <a:xfrm>
+            <a:off x="1234440" y="2560320"/>
+            <a:ext cx="6949440" cy="438912"/>
+          </a:xfrm>
+          <a:prstGeom prst="rect">
+            <a:avLst/>
+          </a:prstGeom>
+          <a:noFill/>
+          <a:ln/>
+        </p:spPr>
+        <p:txBody>
+          <a:bodyPr wrap="square" rtlCol="0" anchor="ctr"/>
+          <a:lstStyle/>
+          <a:p>
+            <a:pPr indent="0" marL="0">
+              <a:buNone/>
+            </a:pPr>
+            <a:r>
+              <a:rPr lang="en-US" sz="1300" dirty="0">
+                <a:solidFill>
+                  <a:srgbClr val="3D3A36"/>
+                </a:solidFill>
+                <a:latin typeface="Calibri" pitchFamily="34" charset="0"/>
+                <a:ea typeface="Calibri" pitchFamily="34" charset="-122"/>
+                <a:cs typeface="Calibri" pitchFamily="34" charset="-120"/>
+              </a:rPr>
+              <a:t>I know the difference between solar and lunar eclipses</a:t>
+            </a:r>
+            <a:endParaRPr lang="en-US" sz="1300" dirty="0"/>
+          </a:p>
+        </p:txBody>
+      </p:sp>
+      <p:sp>
+        <p:nvSpPr>
+          <p:cNvPr id="18" name="Shape 16"/>
+          <p:cNvSpPr/>
+          <p:nvPr/>
+        </p:nvSpPr>
+        <p:spPr>
+          <a:xfrm>
+            <a:off x="731520" y="3063240"/>
+            <a:ext cx="7680960" cy="438912"/>
+          </a:xfrm>
+          <a:prstGeom prst="rect">
+            <a:avLst/>
+          </a:prstGeom>
+          <a:solidFill>
+            <a:srgbClr val="FFFFFF"/>
+          </a:solidFill>
+          <a:ln/>
+        </p:spPr>
+      </p:sp>
+      <p:sp>
+        <p:nvSpPr>
+          <p:cNvPr id="19" name="Text 17"/>
+          <p:cNvSpPr/>
+          <p:nvPr/>
+        </p:nvSpPr>
+        <p:spPr>
+          <a:xfrm>
+            <a:off x="868680" y="3063240"/>
+            <a:ext cx="320040" cy="438912"/>
+          </a:xfrm>
+          <a:prstGeom prst="rect">
+            <a:avLst/>
+          </a:prstGeom>
+          <a:noFill/>
+          <a:ln/>
+        </p:spPr>
+        <p:txBody>
+          <a:bodyPr wrap="square" rtlCol="0" anchor="ctr"/>
+          <a:lstStyle/>
+          <a:p>
+            <a:pPr indent="0" marL="0">
+              <a:buNone/>
+            </a:pPr>
+            <a:r>
+              <a:rPr lang="en-US" sz="1400" dirty="0">
+                <a:solidFill>
+                  <a:srgbClr val="2A9D8F"/>
+                </a:solidFill>
+              </a:rPr>
+              <a:t>☐</a:t>
+            </a:r>
+            <a:endParaRPr lang="en-US" sz="1400" dirty="0"/>
+          </a:p>
+        </p:txBody>
+      </p:sp>
+      <p:sp>
+        <p:nvSpPr>
+          <p:cNvPr id="20" name="Text 18"/>
+          <p:cNvSpPr/>
+          <p:nvPr/>
+        </p:nvSpPr>
+        <p:spPr>
+          <a:xfrm>
+            <a:off x="1234440" y="3063240"/>
+            <a:ext cx="6949440" cy="438912"/>
+          </a:xfrm>
+          <a:prstGeom prst="rect">
+            <a:avLst/>
+          </a:prstGeom>
+          <a:noFill/>
+          <a:ln/>
+        </p:spPr>
+        <p:txBody>
+          <a:bodyPr wrap="square" rtlCol="0" anchor="ctr"/>
+          <a:lstStyle/>
+          <a:p>
+            <a:pPr indent="0" marL="0">
+              <a:buNone/>
+            </a:pPr>
+            <a:r>
+              <a:rPr lang="en-US" sz="1300" dirty="0">
+                <a:solidFill>
+                  <a:srgbClr val="3D3A36"/>
+                </a:solidFill>
+                <a:latin typeface="Calibri" pitchFamily="34" charset="0"/>
+                <a:ea typeface="Calibri" pitchFamily="34" charset="-122"/>
+                <a:cs typeface="Calibri" pitchFamily="34" charset="-120"/>
+              </a:rPr>
+              <a:t>I understand what causes tides</a:t>
+            </a:r>
+            <a:endParaRPr lang="en-US" sz="1300" dirty="0"/>
+          </a:p>
+        </p:txBody>
+      </p:sp>
+      <p:sp>
+        <p:nvSpPr>
+          <p:cNvPr id="21" name="Shape 19"/>
+          <p:cNvSpPr/>
+          <p:nvPr/>
+        </p:nvSpPr>
+        <p:spPr>
+          <a:xfrm>
+            <a:off x="731520" y="3749040"/>
+            <a:ext cx="7680960" cy="594360"/>
+          </a:xfrm>
+          <a:prstGeom prst="rect">
+            <a:avLst/>
+          </a:prstGeom>
+          <a:solidFill>
+            <a:srgbClr val="E8F5F3"/>
+          </a:solidFill>
+          <a:ln/>
+          <a:effectLst>
+            <a:outerShdw sx="100000" sy="100000" kx="0" ky="0" algn="bl" rotWithShape="0" blurRad="50800" dist="25400" dir="8100000">
+              <a:srgbClr val="000000">
+                <a:alpha val="10000"/>
+              </a:srgbClr>
+            </a:outerShdw>
+          </a:effectLst>
+        </p:spPr>
+      </p:sp>
+      <p:sp>
+        <p:nvSpPr>
+          <p:cNvPr id="22" name="Text 20"/>
+          <p:cNvSpPr/>
+          <p:nvPr/>
+        </p:nvSpPr>
+        <p:spPr>
+          <a:xfrm>
+            <a:off x="914400" y="3749040"/>
+            <a:ext cx="7315200" cy="594360"/>
+          </a:xfrm>
+          <a:prstGeom prst="rect">
+            <a:avLst/>
+          </a:prstGeom>
+          <a:noFill/>
+          <a:ln/>
+        </p:spPr>
+        <p:txBody>
+          <a:bodyPr wrap="square" rtlCol="0" anchor="ctr"/>
+          <a:lstStyle/>
+          <a:p>
+            <a:pPr indent="0" marL="0">
+              <a:buNone/>
+            </a:pPr>
+            <a:r>
+              <a:rPr lang="en-US" sz="1200" b="1" dirty="0">
+                <a:solidFill>
+                  <a:srgbClr val="2A9D8F"/>
+                </a:solidFill>
+                <a:latin typeface="Calibri" pitchFamily="34" charset="0"/>
+                <a:ea typeface="Calibri" pitchFamily="34" charset="-122"/>
+                <a:cs typeface="Calibri" pitchFamily="34" charset="-120"/>
+              </a:rPr>
+              <a:t>Key Idea: </a:t>
+            </a:r>
+            <a:pPr indent="0" marL="0">
+              <a:buNone/>
+            </a:pPr>
+            <a:r>
+              <a:rPr lang="en-US" sz="1200" i="1" dirty="0">
+                <a:solidFill>
+                  <a:srgbClr val="3D3A36"/>
+                </a:solidFill>
+                <a:latin typeface="Calibri" pitchFamily="34" charset="0"/>
+                <a:ea typeface="Calibri" pitchFamily="34" charset="-122"/>
+                <a:cs typeface="Calibri" pitchFamily="34" charset="-120"/>
+              </a:rPr>
+              <a:t>Earth, Sun, and Moon form a system where gravity controls everything.</a:t>
+            </a:r>
+            <a:endParaRPr lang="en-US" sz="1200" dirty="0"/>
+          </a:p>
+        </p:txBody>
+      </p:sp>
+    </p:spTree>
+  </p:cSld>
+  <p:clrMapOvr>
+    <a:masterClrMapping/>
+  </p:clrMapOvr>
+</p:sld>
+</file>
+
+<file path=ppt/slides/slide8.xml><?xml version="1.0" encoding="utf-8"?>
+<p:sld xmlns:a="http://schemas.openxmlformats.org/drawingml/2006/main" xmlns:r="http://schemas.openxmlformats.org/officeDocument/2006/relationships" xmlns:p="http://schemas.openxmlformats.org/presentationml/2006/main">
+  <p:cSld name="Slide 8">
+    <p:spTree>
+      <p:nvGrpSpPr>
+        <p:cNvPr id="1" name=""/>
+        <p:cNvGrpSpPr/>
+        <p:nvPr/>
+      </p:nvGrpSpPr>
+      <p:grpSpPr>
+        <a:xfrm>
+          <a:off x="0" y="0"/>
+          <a:ext cx="0" cy="0"/>
+          <a:chOff x="0" y="0"/>
+          <a:chExt cx="0" cy="0"/>
+        </a:xfrm>
+      </p:grpSpPr>
+      <p:sp>
+        <p:nvSpPr>
+          <p:cNvPr id="2" name="Shape 0"/>
+          <p:cNvSpPr/>
+          <p:nvPr/>
+        </p:nvSpPr>
+        <p:spPr>
+          <a:xfrm>
+            <a:off x="0" y="0"/>
+            <a:ext cx="9144000" cy="5143500"/>
+          </a:xfrm>
+          <a:prstGeom prst="rect">
+            <a:avLst/>
+          </a:prstGeom>
+          <a:solidFill>
+            <a:srgbClr val="1B2A4A"/>
+          </a:solidFill>
+          <a:ln/>
+        </p:spPr>
+      </p:sp>
+      <p:sp>
+        <p:nvSpPr>
+          <p:cNvPr id="3" name="Shape 1"/>
+          <p:cNvSpPr/>
+          <p:nvPr/>
+        </p:nvSpPr>
+        <p:spPr>
+          <a:xfrm>
+            <a:off x="0" y="4777740"/>
+            <a:ext cx="9144000" cy="365760"/>
+          </a:xfrm>
+          <a:prstGeom prst="rect">
+            <a:avLst/>
+          </a:prstGeom>
+          <a:solidFill>
+            <a:srgbClr val="2A9D8F"/>
+          </a:solidFill>
+          <a:ln/>
+        </p:spPr>
+      </p:sp>
+      <p:sp>
+        <p:nvSpPr>
+          <p:cNvPr id="4" name="Shape 2"/>
+          <p:cNvSpPr/>
+          <p:nvPr/>
+        </p:nvSpPr>
+        <p:spPr>
+          <a:xfrm>
+            <a:off x="-914400" y="-914400"/>
+            <a:ext cx="3657600" cy="3657600"/>
+          </a:xfrm>
+          <a:prstGeom prst="ellipse">
+            <a:avLst/>
+          </a:prstGeom>
+          <a:solidFill>
+            <a:srgbClr val="2A9D8F">
+              <a:alpha val="10000"/>
+            </a:srgbClr>
+          </a:solidFill>
+          <a:ln/>
+        </p:spPr>
+      </p:sp>
+      <p:sp>
+        <p:nvSpPr>
+          <p:cNvPr id="5" name="Text 3"/>
+          <p:cNvSpPr/>
+          <p:nvPr/>
+        </p:nvSpPr>
+        <p:spPr>
+          <a:xfrm>
+            <a:off x="731520" y="1463040"/>
+            <a:ext cx="7680960" cy="822960"/>
+          </a:xfrm>
+          <a:prstGeom prst="rect">
+            <a:avLst/>
+          </a:prstGeom>
+          <a:noFill/>
+          <a:ln/>
+        </p:spPr>
+        <p:txBody>
+          <a:bodyPr wrap="square" rtlCol="0" anchor="ctr"/>
+          <a:lstStyle/>
+          <a:p>
+            <a:pPr algn="ctr" indent="0" marL="0">
+              <a:buNone/>
+            </a:pPr>
+            <a:r>
+              <a:rPr lang="en-US" sz="3400" b="1" dirty="0">
+                <a:solidFill>
+                  <a:srgbClr val="FFFFFF"/>
+                </a:solidFill>
+                <a:latin typeface="Georgia" pitchFamily="34" charset="0"/>
+                <a:ea typeface="Georgia" pitchFamily="34" charset="-122"/>
+                <a:cs typeface="Georgia" pitchFamily="34" charset="-120"/>
+              </a:rPr>
+              <a:t>Review &amp; Practise</a:t>
+            </a:r>
+            <a:endParaRPr lang="en-US" sz="3400" dirty="0"/>
+          </a:p>
+        </p:txBody>
+      </p:sp>
+      <p:sp>
+        <p:nvSpPr>
+          <p:cNvPr id="6" name="Text 4"/>
+          <p:cNvSpPr/>
+          <p:nvPr/>
+        </p:nvSpPr>
+        <p:spPr>
+          <a:xfrm>
+            <a:off x="731520" y="2468880"/>
+            <a:ext cx="7680960" cy="457200"/>
+          </a:xfrm>
+          <a:prstGeom prst="rect">
+            <a:avLst/>
+          </a:prstGeom>
+          <a:noFill/>
+          <a:ln/>
+        </p:spPr>
+        <p:txBody>
+          <a:bodyPr wrap="square" rtlCol="0" anchor="ctr"/>
+          <a:lstStyle/>
+          <a:p>
+            <a:pPr algn="ctr" indent="0" marL="0">
+              <a:buNone/>
+            </a:pPr>
+            <a:r>
+              <a:rPr lang="en-US" sz="1800" dirty="0">
+                <a:solidFill>
+                  <a:srgbClr val="2A9D8F"/>
+                </a:solidFill>
+                <a:latin typeface="Calibri" pitchFamily="34" charset="0"/>
+                <a:ea typeface="Calibri" pitchFamily="34" charset="-122"/>
+                <a:cs typeface="Calibri" pitchFamily="34" charset="-120"/>
+              </a:rPr>
               <a:t>mrzocchi.com</a:t>
             </a:r>
-            <a:endParaRPr lang="en-US" sz="1100" dirty="0"/>
+            <a:endParaRPr lang="en-US" sz="1800" dirty="0"/>
+          </a:p>
+        </p:txBody>
+      </p:sp>
+      <p:sp>
+        <p:nvSpPr>
+          <p:cNvPr id="7" name="Text 5"/>
+          <p:cNvSpPr/>
+          <p:nvPr/>
+        </p:nvSpPr>
+        <p:spPr>
+          <a:xfrm>
+            <a:off x="731520" y="3108960"/>
+            <a:ext cx="7680960" cy="457200"/>
+          </a:xfrm>
+          <a:prstGeom prst="rect">
+            <a:avLst/>
+          </a:prstGeom>
+          <a:noFill/>
+          <a:ln/>
+        </p:spPr>
+        <p:txBody>
+          <a:bodyPr wrap="square" rtlCol="0" anchor="ctr"/>
+          <a:lstStyle/>
+          <a:p>
+            <a:pPr algn="ctr" indent="0" marL="0">
+              <a:buNone/>
+            </a:pPr>
+            <a:r>
+              <a:rPr lang="en-US" sz="1300" dirty="0">
+                <a:solidFill>
+                  <a:srgbClr val="9B9690"/>
+                </a:solidFill>
+                <a:latin typeface="Calibri" pitchFamily="34" charset="0"/>
+                <a:ea typeface="Calibri" pitchFamily="34" charset="-122"/>
+                <a:cs typeface="Calibri" pitchFamily="34" charset="-120"/>
+              </a:rPr>
+              <a:t>Use the Self-Quiz, Review Games, and Practice Builder to test yourself.</a:t>
+            </a:r>
+            <a:endParaRPr lang="en-US" sz="1300" dirty="0"/>
           </a:p>
         </p:txBody>
       </p:sp>
